--- a/五郎_成果物/高校さがし_公立編_五郎.pptx
+++ b/五郎_成果物/高校さがし_公立編_五郎.pptx
@@ -141,7 +141,7 @@
           <p:cNvPr id="2" name="タイトル 1">
             <a:extLst>
               <a:ext uri="{FF2B5EF4-FFF2-40B4-BE49-F238E27FC236}">
-                <a16:creationId xmlns:a16="http://schemas.microsoft.com/office/drawing/2014/main" id="{30387099-B196-3D05-D765-97B59665D470}"/>
+                <a16:creationId xmlns:a16="http://schemas.microsoft.com/office/drawing/2014/main" id="{C2EB9398-9F59-69AA-0293-001AE29B4AAE}"/>
               </a:ext>
             </a:extLst>
           </p:cNvPr>
@@ -178,7 +178,7 @@
           <p:cNvPr id="3" name="字幕 2">
             <a:extLst>
               <a:ext uri="{FF2B5EF4-FFF2-40B4-BE49-F238E27FC236}">
-                <a16:creationId xmlns:a16="http://schemas.microsoft.com/office/drawing/2014/main" id="{E3F1A230-317F-5E3B-C984-3287343CAD09}"/>
+                <a16:creationId xmlns:a16="http://schemas.microsoft.com/office/drawing/2014/main" id="{8140756B-D5FC-7F92-8D0B-4F2AF29CE8D9}"/>
               </a:ext>
             </a:extLst>
           </p:cNvPr>
@@ -248,7 +248,7 @@
           <p:cNvPr id="4" name="日付プレースホルダー 3">
             <a:extLst>
               <a:ext uri="{FF2B5EF4-FFF2-40B4-BE49-F238E27FC236}">
-                <a16:creationId xmlns:a16="http://schemas.microsoft.com/office/drawing/2014/main" id="{3D31F88B-25AA-5995-148B-0D157C3BC8E7}"/>
+                <a16:creationId xmlns:a16="http://schemas.microsoft.com/office/drawing/2014/main" id="{C9382B77-2A97-BA62-D87B-AB5614493532}"/>
               </a:ext>
             </a:extLst>
           </p:cNvPr>
@@ -264,7 +264,7 @@
           <a:bodyPr/>
           <a:lstStyle/>
           <a:p>
-            <a:fld id="{2C08C4EC-AA62-410E-B470-EDCDC70BD255}" type="datetimeFigureOut">
+            <a:fld id="{A8BB45A4-B792-4418-9F1E-7C691C836D9B}" type="datetimeFigureOut">
               <a:rPr kumimoji="1" lang="ja-JP" altLang="en-US" smtClean="0"/>
               <a:t>2026/6/28</a:t>
             </a:fld>
@@ -277,7 +277,7 @@
           <p:cNvPr id="5" name="フッター プレースホルダー 4">
             <a:extLst>
               <a:ext uri="{FF2B5EF4-FFF2-40B4-BE49-F238E27FC236}">
-                <a16:creationId xmlns:a16="http://schemas.microsoft.com/office/drawing/2014/main" id="{A370D27A-1B67-2A02-31DE-21FC51ABF019}"/>
+                <a16:creationId xmlns:a16="http://schemas.microsoft.com/office/drawing/2014/main" id="{2A25F932-A53A-A48B-9C98-1A1D9E872053}"/>
               </a:ext>
             </a:extLst>
           </p:cNvPr>
@@ -302,7 +302,7 @@
           <p:cNvPr id="6" name="スライド番号プレースホルダー 5">
             <a:extLst>
               <a:ext uri="{FF2B5EF4-FFF2-40B4-BE49-F238E27FC236}">
-                <a16:creationId xmlns:a16="http://schemas.microsoft.com/office/drawing/2014/main" id="{ABE9DAA4-D71E-1CE3-36D8-65C61DBDAC44}"/>
+                <a16:creationId xmlns:a16="http://schemas.microsoft.com/office/drawing/2014/main" id="{623C7A1E-2CDF-391A-147E-F14AD754BFD5}"/>
               </a:ext>
             </a:extLst>
           </p:cNvPr>
@@ -318,7 +318,7 @@
           <a:bodyPr/>
           <a:lstStyle/>
           <a:p>
-            <a:fld id="{D2C6DB13-8864-4086-9C19-81E295767B53}" type="slidenum">
+            <a:fld id="{B1E36797-0AB7-41B0-839D-7D3047F16152}" type="slidenum">
               <a:rPr kumimoji="1" lang="ja-JP" altLang="en-US" smtClean="0"/>
               <a:t>‹#›</a:t>
             </a:fld>
@@ -329,7 +329,7 @@
     </p:spTree>
     <p:extLst>
       <p:ext uri="{BB962C8B-B14F-4D97-AF65-F5344CB8AC3E}">
-        <p14:creationId xmlns:p14="http://schemas.microsoft.com/office/powerpoint/2010/main" val="3058274595"/>
+        <p14:creationId xmlns:p14="http://schemas.microsoft.com/office/powerpoint/2010/main" val="1845318708"/>
       </p:ext>
     </p:extLst>
   </p:cSld>
@@ -361,7 +361,7 @@
           <p:cNvPr id="2" name="タイトル 1">
             <a:extLst>
               <a:ext uri="{FF2B5EF4-FFF2-40B4-BE49-F238E27FC236}">
-                <a16:creationId xmlns:a16="http://schemas.microsoft.com/office/drawing/2014/main" id="{BE33F5E7-5572-7ECA-486B-FEC104273CA6}"/>
+                <a16:creationId xmlns:a16="http://schemas.microsoft.com/office/drawing/2014/main" id="{D2C12052-C657-F749-8897-139431FDBC2B}"/>
               </a:ext>
             </a:extLst>
           </p:cNvPr>
@@ -389,7 +389,7 @@
           <p:cNvPr id="3" name="縦書きテキスト プレースホルダー 2">
             <a:extLst>
               <a:ext uri="{FF2B5EF4-FFF2-40B4-BE49-F238E27FC236}">
-                <a16:creationId xmlns:a16="http://schemas.microsoft.com/office/drawing/2014/main" id="{8E077AA0-A6E6-410F-B4F6-9F6903F11D42}"/>
+                <a16:creationId xmlns:a16="http://schemas.microsoft.com/office/drawing/2014/main" id="{3A6F3A59-8AD9-32D6-9752-C8C31B580312}"/>
               </a:ext>
             </a:extLst>
           </p:cNvPr>
@@ -478,7 +478,7 @@
           <p:cNvPr id="4" name="日付プレースホルダー 3">
             <a:extLst>
               <a:ext uri="{FF2B5EF4-FFF2-40B4-BE49-F238E27FC236}">
-                <a16:creationId xmlns:a16="http://schemas.microsoft.com/office/drawing/2014/main" id="{F623750F-C4A5-83F9-BB21-D6160AD4AA9D}"/>
+                <a16:creationId xmlns:a16="http://schemas.microsoft.com/office/drawing/2014/main" id="{E35D69E4-437D-20EC-43D8-08E123F7A6A2}"/>
               </a:ext>
             </a:extLst>
           </p:cNvPr>
@@ -494,7 +494,7 @@
           <a:bodyPr/>
           <a:lstStyle/>
           <a:p>
-            <a:fld id="{2C08C4EC-AA62-410E-B470-EDCDC70BD255}" type="datetimeFigureOut">
+            <a:fld id="{A8BB45A4-B792-4418-9F1E-7C691C836D9B}" type="datetimeFigureOut">
               <a:rPr kumimoji="1" lang="ja-JP" altLang="en-US" smtClean="0"/>
               <a:t>2026/6/28</a:t>
             </a:fld>
@@ -507,7 +507,7 @@
           <p:cNvPr id="5" name="フッター プレースホルダー 4">
             <a:extLst>
               <a:ext uri="{FF2B5EF4-FFF2-40B4-BE49-F238E27FC236}">
-                <a16:creationId xmlns:a16="http://schemas.microsoft.com/office/drawing/2014/main" id="{C1E2A13F-1EF1-C140-A7B9-64AA305ABB97}"/>
+                <a16:creationId xmlns:a16="http://schemas.microsoft.com/office/drawing/2014/main" id="{44701824-B0D8-68EA-7BAB-F65597AF1CCB}"/>
               </a:ext>
             </a:extLst>
           </p:cNvPr>
@@ -532,7 +532,7 @@
           <p:cNvPr id="6" name="スライド番号プレースホルダー 5">
             <a:extLst>
               <a:ext uri="{FF2B5EF4-FFF2-40B4-BE49-F238E27FC236}">
-                <a16:creationId xmlns:a16="http://schemas.microsoft.com/office/drawing/2014/main" id="{F05AED34-55CE-B892-1A21-E12519CD31D3}"/>
+                <a16:creationId xmlns:a16="http://schemas.microsoft.com/office/drawing/2014/main" id="{3DCB4002-7C7D-8A61-7DE7-AB66C0D630DF}"/>
               </a:ext>
             </a:extLst>
           </p:cNvPr>
@@ -548,7 +548,7 @@
           <a:bodyPr/>
           <a:lstStyle/>
           <a:p>
-            <a:fld id="{D2C6DB13-8864-4086-9C19-81E295767B53}" type="slidenum">
+            <a:fld id="{B1E36797-0AB7-41B0-839D-7D3047F16152}" type="slidenum">
               <a:rPr kumimoji="1" lang="ja-JP" altLang="en-US" smtClean="0"/>
               <a:t>‹#›</a:t>
             </a:fld>
@@ -559,7 +559,7 @@
     </p:spTree>
     <p:extLst>
       <p:ext uri="{BB962C8B-B14F-4D97-AF65-F5344CB8AC3E}">
-        <p14:creationId xmlns:p14="http://schemas.microsoft.com/office/powerpoint/2010/main" val="2412978471"/>
+        <p14:creationId xmlns:p14="http://schemas.microsoft.com/office/powerpoint/2010/main" val="4190876240"/>
       </p:ext>
     </p:extLst>
   </p:cSld>
@@ -591,7 +591,7 @@
           <p:cNvPr id="2" name="縦書きタイトル 1">
             <a:extLst>
               <a:ext uri="{FF2B5EF4-FFF2-40B4-BE49-F238E27FC236}">
-                <a16:creationId xmlns:a16="http://schemas.microsoft.com/office/drawing/2014/main" id="{0C69B518-7B7E-A7BC-00F7-D64D346F56D3}"/>
+                <a16:creationId xmlns:a16="http://schemas.microsoft.com/office/drawing/2014/main" id="{B132C4C2-B2B8-3D5A-7894-51D4D2E42BC5}"/>
               </a:ext>
             </a:extLst>
           </p:cNvPr>
@@ -624,7 +624,7 @@
           <p:cNvPr id="3" name="縦書きテキスト プレースホルダー 2">
             <a:extLst>
               <a:ext uri="{FF2B5EF4-FFF2-40B4-BE49-F238E27FC236}">
-                <a16:creationId xmlns:a16="http://schemas.microsoft.com/office/drawing/2014/main" id="{FAC84F2D-8FF9-77CD-0A4D-230B40BB687C}"/>
+                <a16:creationId xmlns:a16="http://schemas.microsoft.com/office/drawing/2014/main" id="{DBB109DC-9ABE-6CCB-262D-8248D382DB4D}"/>
               </a:ext>
             </a:extLst>
           </p:cNvPr>
@@ -718,7 +718,7 @@
           <p:cNvPr id="4" name="日付プレースホルダー 3">
             <a:extLst>
               <a:ext uri="{FF2B5EF4-FFF2-40B4-BE49-F238E27FC236}">
-                <a16:creationId xmlns:a16="http://schemas.microsoft.com/office/drawing/2014/main" id="{2723152B-8644-4E58-CB9A-132A4EA468DA}"/>
+                <a16:creationId xmlns:a16="http://schemas.microsoft.com/office/drawing/2014/main" id="{23B62B22-36E8-420F-B475-CAC5675B3C13}"/>
               </a:ext>
             </a:extLst>
           </p:cNvPr>
@@ -734,7 +734,7 @@
           <a:bodyPr/>
           <a:lstStyle/>
           <a:p>
-            <a:fld id="{2C08C4EC-AA62-410E-B470-EDCDC70BD255}" type="datetimeFigureOut">
+            <a:fld id="{A8BB45A4-B792-4418-9F1E-7C691C836D9B}" type="datetimeFigureOut">
               <a:rPr kumimoji="1" lang="ja-JP" altLang="en-US" smtClean="0"/>
               <a:t>2026/6/28</a:t>
             </a:fld>
@@ -747,7 +747,7 @@
           <p:cNvPr id="5" name="フッター プレースホルダー 4">
             <a:extLst>
               <a:ext uri="{FF2B5EF4-FFF2-40B4-BE49-F238E27FC236}">
-                <a16:creationId xmlns:a16="http://schemas.microsoft.com/office/drawing/2014/main" id="{E4518A88-C2DA-4B9D-08DC-58C0684C28FF}"/>
+                <a16:creationId xmlns:a16="http://schemas.microsoft.com/office/drawing/2014/main" id="{ED8C1B40-E971-78D5-9676-6D1DCB7A993D}"/>
               </a:ext>
             </a:extLst>
           </p:cNvPr>
@@ -772,7 +772,7 @@
           <p:cNvPr id="6" name="スライド番号プレースホルダー 5">
             <a:extLst>
               <a:ext uri="{FF2B5EF4-FFF2-40B4-BE49-F238E27FC236}">
-                <a16:creationId xmlns:a16="http://schemas.microsoft.com/office/drawing/2014/main" id="{ED88D371-F4E6-8FC9-665B-6B47700F68C5}"/>
+                <a16:creationId xmlns:a16="http://schemas.microsoft.com/office/drawing/2014/main" id="{94E47632-3700-5FD0-9BE4-5F2533F8C26C}"/>
               </a:ext>
             </a:extLst>
           </p:cNvPr>
@@ -788,7 +788,7 @@
           <a:bodyPr/>
           <a:lstStyle/>
           <a:p>
-            <a:fld id="{D2C6DB13-8864-4086-9C19-81E295767B53}" type="slidenum">
+            <a:fld id="{B1E36797-0AB7-41B0-839D-7D3047F16152}" type="slidenum">
               <a:rPr kumimoji="1" lang="ja-JP" altLang="en-US" smtClean="0"/>
               <a:t>‹#›</a:t>
             </a:fld>
@@ -799,7 +799,7 @@
     </p:spTree>
     <p:extLst>
       <p:ext uri="{BB962C8B-B14F-4D97-AF65-F5344CB8AC3E}">
-        <p14:creationId xmlns:p14="http://schemas.microsoft.com/office/powerpoint/2010/main" val="873273876"/>
+        <p14:creationId xmlns:p14="http://schemas.microsoft.com/office/powerpoint/2010/main" val="150541143"/>
       </p:ext>
     </p:extLst>
   </p:cSld>
@@ -831,7 +831,7 @@
           <p:cNvPr id="2" name="タイトル 1">
             <a:extLst>
               <a:ext uri="{FF2B5EF4-FFF2-40B4-BE49-F238E27FC236}">
-                <a16:creationId xmlns:a16="http://schemas.microsoft.com/office/drawing/2014/main" id="{3E812E71-F99E-678B-2B28-39284ABD5A18}"/>
+                <a16:creationId xmlns:a16="http://schemas.microsoft.com/office/drawing/2014/main" id="{8C709D89-8904-C180-C64B-FB1D89B76BB2}"/>
               </a:ext>
             </a:extLst>
           </p:cNvPr>
@@ -859,7 +859,7 @@
           <p:cNvPr id="3" name="コンテンツ プレースホルダー 2">
             <a:extLst>
               <a:ext uri="{FF2B5EF4-FFF2-40B4-BE49-F238E27FC236}">
-                <a16:creationId xmlns:a16="http://schemas.microsoft.com/office/drawing/2014/main" id="{7ECAF594-7A29-1ABF-8197-414A7AF79B83}"/>
+                <a16:creationId xmlns:a16="http://schemas.microsoft.com/office/drawing/2014/main" id="{68AB8A05-142F-3EF6-9630-4B947682915A}"/>
               </a:ext>
             </a:extLst>
           </p:cNvPr>
@@ -948,7 +948,7 @@
           <p:cNvPr id="4" name="日付プレースホルダー 3">
             <a:extLst>
               <a:ext uri="{FF2B5EF4-FFF2-40B4-BE49-F238E27FC236}">
-                <a16:creationId xmlns:a16="http://schemas.microsoft.com/office/drawing/2014/main" id="{21399F64-22CB-6E6D-25AB-F7641BA4338E}"/>
+                <a16:creationId xmlns:a16="http://schemas.microsoft.com/office/drawing/2014/main" id="{1D0590D1-E9A0-077C-D7F4-8050B065EC77}"/>
               </a:ext>
             </a:extLst>
           </p:cNvPr>
@@ -964,7 +964,7 @@
           <a:bodyPr/>
           <a:lstStyle/>
           <a:p>
-            <a:fld id="{2C08C4EC-AA62-410E-B470-EDCDC70BD255}" type="datetimeFigureOut">
+            <a:fld id="{A8BB45A4-B792-4418-9F1E-7C691C836D9B}" type="datetimeFigureOut">
               <a:rPr kumimoji="1" lang="ja-JP" altLang="en-US" smtClean="0"/>
               <a:t>2026/6/28</a:t>
             </a:fld>
@@ -977,7 +977,7 @@
           <p:cNvPr id="5" name="フッター プレースホルダー 4">
             <a:extLst>
               <a:ext uri="{FF2B5EF4-FFF2-40B4-BE49-F238E27FC236}">
-                <a16:creationId xmlns:a16="http://schemas.microsoft.com/office/drawing/2014/main" id="{7FC6FCDE-CFAD-56E5-5773-16C6A1B91D74}"/>
+                <a16:creationId xmlns:a16="http://schemas.microsoft.com/office/drawing/2014/main" id="{107569A1-4D49-8451-01BB-4AEF9EA8BFB4}"/>
               </a:ext>
             </a:extLst>
           </p:cNvPr>
@@ -1002,7 +1002,7 @@
           <p:cNvPr id="6" name="スライド番号プレースホルダー 5">
             <a:extLst>
               <a:ext uri="{FF2B5EF4-FFF2-40B4-BE49-F238E27FC236}">
-                <a16:creationId xmlns:a16="http://schemas.microsoft.com/office/drawing/2014/main" id="{1ECDB562-AB46-0777-40DE-90F66D27D19B}"/>
+                <a16:creationId xmlns:a16="http://schemas.microsoft.com/office/drawing/2014/main" id="{0632844E-B7F1-2574-8DFE-85ED93CDB137}"/>
               </a:ext>
             </a:extLst>
           </p:cNvPr>
@@ -1018,7 +1018,7 @@
           <a:bodyPr/>
           <a:lstStyle/>
           <a:p>
-            <a:fld id="{D2C6DB13-8864-4086-9C19-81E295767B53}" type="slidenum">
+            <a:fld id="{B1E36797-0AB7-41B0-839D-7D3047F16152}" type="slidenum">
               <a:rPr kumimoji="1" lang="ja-JP" altLang="en-US" smtClean="0"/>
               <a:t>‹#›</a:t>
             </a:fld>
@@ -1029,7 +1029,7 @@
     </p:spTree>
     <p:extLst>
       <p:ext uri="{BB962C8B-B14F-4D97-AF65-F5344CB8AC3E}">
-        <p14:creationId xmlns:p14="http://schemas.microsoft.com/office/powerpoint/2010/main" val="2760144889"/>
+        <p14:creationId xmlns:p14="http://schemas.microsoft.com/office/powerpoint/2010/main" val="1010302506"/>
       </p:ext>
     </p:extLst>
   </p:cSld>
@@ -1061,7 +1061,7 @@
           <p:cNvPr id="2" name="タイトル 1">
             <a:extLst>
               <a:ext uri="{FF2B5EF4-FFF2-40B4-BE49-F238E27FC236}">
-                <a16:creationId xmlns:a16="http://schemas.microsoft.com/office/drawing/2014/main" id="{8EC7C5D5-B5BC-DEB5-78E5-BD8D24615851}"/>
+                <a16:creationId xmlns:a16="http://schemas.microsoft.com/office/drawing/2014/main" id="{D68570DA-0E91-4E0A-1A11-77E03FD057AB}"/>
               </a:ext>
             </a:extLst>
           </p:cNvPr>
@@ -1098,7 +1098,7 @@
           <p:cNvPr id="3" name="テキスト プレースホルダー 2">
             <a:extLst>
               <a:ext uri="{FF2B5EF4-FFF2-40B4-BE49-F238E27FC236}">
-                <a16:creationId xmlns:a16="http://schemas.microsoft.com/office/drawing/2014/main" id="{635DEB79-BAF7-269E-BB49-D468720F4E6C}"/>
+                <a16:creationId xmlns:a16="http://schemas.microsoft.com/office/drawing/2014/main" id="{40C0DB87-B578-DA8F-A467-45A205A97DFA}"/>
               </a:ext>
             </a:extLst>
           </p:cNvPr>
@@ -1223,7 +1223,7 @@
           <p:cNvPr id="4" name="日付プレースホルダー 3">
             <a:extLst>
               <a:ext uri="{FF2B5EF4-FFF2-40B4-BE49-F238E27FC236}">
-                <a16:creationId xmlns:a16="http://schemas.microsoft.com/office/drawing/2014/main" id="{95B24681-2EBE-49CF-38E7-A18D5B329DAA}"/>
+                <a16:creationId xmlns:a16="http://schemas.microsoft.com/office/drawing/2014/main" id="{343D2819-9948-2CBE-315A-119AD4BE6C00}"/>
               </a:ext>
             </a:extLst>
           </p:cNvPr>
@@ -1239,7 +1239,7 @@
           <a:bodyPr/>
           <a:lstStyle/>
           <a:p>
-            <a:fld id="{2C08C4EC-AA62-410E-B470-EDCDC70BD255}" type="datetimeFigureOut">
+            <a:fld id="{A8BB45A4-B792-4418-9F1E-7C691C836D9B}" type="datetimeFigureOut">
               <a:rPr kumimoji="1" lang="ja-JP" altLang="en-US" smtClean="0"/>
               <a:t>2026/6/28</a:t>
             </a:fld>
@@ -1252,7 +1252,7 @@
           <p:cNvPr id="5" name="フッター プレースホルダー 4">
             <a:extLst>
               <a:ext uri="{FF2B5EF4-FFF2-40B4-BE49-F238E27FC236}">
-                <a16:creationId xmlns:a16="http://schemas.microsoft.com/office/drawing/2014/main" id="{87D9056F-3C3D-6978-E2F9-1F9FF7E0D4F7}"/>
+                <a16:creationId xmlns:a16="http://schemas.microsoft.com/office/drawing/2014/main" id="{88E05CB7-2295-2E62-C191-8C56C65EBEC8}"/>
               </a:ext>
             </a:extLst>
           </p:cNvPr>
@@ -1277,7 +1277,7 @@
           <p:cNvPr id="6" name="スライド番号プレースホルダー 5">
             <a:extLst>
               <a:ext uri="{FF2B5EF4-FFF2-40B4-BE49-F238E27FC236}">
-                <a16:creationId xmlns:a16="http://schemas.microsoft.com/office/drawing/2014/main" id="{3BAAB543-3D98-6BAD-6FD2-B65803AEE25A}"/>
+                <a16:creationId xmlns:a16="http://schemas.microsoft.com/office/drawing/2014/main" id="{913F1A4A-5B2C-0852-EAAE-795CEB24E194}"/>
               </a:ext>
             </a:extLst>
           </p:cNvPr>
@@ -1293,7 +1293,7 @@
           <a:bodyPr/>
           <a:lstStyle/>
           <a:p>
-            <a:fld id="{D2C6DB13-8864-4086-9C19-81E295767B53}" type="slidenum">
+            <a:fld id="{B1E36797-0AB7-41B0-839D-7D3047F16152}" type="slidenum">
               <a:rPr kumimoji="1" lang="ja-JP" altLang="en-US" smtClean="0"/>
               <a:t>‹#›</a:t>
             </a:fld>
@@ -1304,7 +1304,7 @@
     </p:spTree>
     <p:extLst>
       <p:ext uri="{BB962C8B-B14F-4D97-AF65-F5344CB8AC3E}">
-        <p14:creationId xmlns:p14="http://schemas.microsoft.com/office/powerpoint/2010/main" val="3026564681"/>
+        <p14:creationId xmlns:p14="http://schemas.microsoft.com/office/powerpoint/2010/main" val="197825941"/>
       </p:ext>
     </p:extLst>
   </p:cSld>
@@ -1336,7 +1336,7 @@
           <p:cNvPr id="2" name="タイトル 1">
             <a:extLst>
               <a:ext uri="{FF2B5EF4-FFF2-40B4-BE49-F238E27FC236}">
-                <a16:creationId xmlns:a16="http://schemas.microsoft.com/office/drawing/2014/main" id="{6BAD8F5C-0F9F-2D9C-B44D-5A11330C2F52}"/>
+                <a16:creationId xmlns:a16="http://schemas.microsoft.com/office/drawing/2014/main" id="{7BAF56C9-5053-A565-6B55-7E7322B5208C}"/>
               </a:ext>
             </a:extLst>
           </p:cNvPr>
@@ -1364,7 +1364,7 @@
           <p:cNvPr id="3" name="コンテンツ プレースホルダー 2">
             <a:extLst>
               <a:ext uri="{FF2B5EF4-FFF2-40B4-BE49-F238E27FC236}">
-                <a16:creationId xmlns:a16="http://schemas.microsoft.com/office/drawing/2014/main" id="{F43D3B7A-FB00-2C26-D407-763E33D6B400}"/>
+                <a16:creationId xmlns:a16="http://schemas.microsoft.com/office/drawing/2014/main" id="{60FD9525-B151-D88F-CABE-0631EFD31AA4}"/>
               </a:ext>
             </a:extLst>
           </p:cNvPr>
@@ -1458,7 +1458,7 @@
           <p:cNvPr id="4" name="コンテンツ プレースホルダー 3">
             <a:extLst>
               <a:ext uri="{FF2B5EF4-FFF2-40B4-BE49-F238E27FC236}">
-                <a16:creationId xmlns:a16="http://schemas.microsoft.com/office/drawing/2014/main" id="{4321EFF8-2A80-1469-A679-AE280A604385}"/>
+                <a16:creationId xmlns:a16="http://schemas.microsoft.com/office/drawing/2014/main" id="{EBAC3673-F9CB-345E-10EC-F3FB086A6A14}"/>
               </a:ext>
             </a:extLst>
           </p:cNvPr>
@@ -1552,7 +1552,7 @@
           <p:cNvPr id="5" name="日付プレースホルダー 4">
             <a:extLst>
               <a:ext uri="{FF2B5EF4-FFF2-40B4-BE49-F238E27FC236}">
-                <a16:creationId xmlns:a16="http://schemas.microsoft.com/office/drawing/2014/main" id="{8194C6AE-B454-71F4-DE67-566F37B4E9FB}"/>
+                <a16:creationId xmlns:a16="http://schemas.microsoft.com/office/drawing/2014/main" id="{2A4191AE-AF1E-4B81-3C23-A80D6E7A62CF}"/>
               </a:ext>
             </a:extLst>
           </p:cNvPr>
@@ -1568,7 +1568,7 @@
           <a:bodyPr/>
           <a:lstStyle/>
           <a:p>
-            <a:fld id="{2C08C4EC-AA62-410E-B470-EDCDC70BD255}" type="datetimeFigureOut">
+            <a:fld id="{A8BB45A4-B792-4418-9F1E-7C691C836D9B}" type="datetimeFigureOut">
               <a:rPr kumimoji="1" lang="ja-JP" altLang="en-US" smtClean="0"/>
               <a:t>2026/6/28</a:t>
             </a:fld>
@@ -1581,7 +1581,7 @@
           <p:cNvPr id="6" name="フッター プレースホルダー 5">
             <a:extLst>
               <a:ext uri="{FF2B5EF4-FFF2-40B4-BE49-F238E27FC236}">
-                <a16:creationId xmlns:a16="http://schemas.microsoft.com/office/drawing/2014/main" id="{A6AE4D44-66BD-25B3-E9E8-B0C8E2EB39FD}"/>
+                <a16:creationId xmlns:a16="http://schemas.microsoft.com/office/drawing/2014/main" id="{966BFAAC-626F-E554-206C-E39324C02E38}"/>
               </a:ext>
             </a:extLst>
           </p:cNvPr>
@@ -1606,7 +1606,7 @@
           <p:cNvPr id="7" name="スライド番号プレースホルダー 6">
             <a:extLst>
               <a:ext uri="{FF2B5EF4-FFF2-40B4-BE49-F238E27FC236}">
-                <a16:creationId xmlns:a16="http://schemas.microsoft.com/office/drawing/2014/main" id="{C6544AD6-C788-78B1-1551-9B97BB8E57E1}"/>
+                <a16:creationId xmlns:a16="http://schemas.microsoft.com/office/drawing/2014/main" id="{A55DEFA6-0D3E-E5D6-320E-70E890DF9108}"/>
               </a:ext>
             </a:extLst>
           </p:cNvPr>
@@ -1622,7 +1622,7 @@
           <a:bodyPr/>
           <a:lstStyle/>
           <a:p>
-            <a:fld id="{D2C6DB13-8864-4086-9C19-81E295767B53}" type="slidenum">
+            <a:fld id="{B1E36797-0AB7-41B0-839D-7D3047F16152}" type="slidenum">
               <a:rPr kumimoji="1" lang="ja-JP" altLang="en-US" smtClean="0"/>
               <a:t>‹#›</a:t>
             </a:fld>
@@ -1633,7 +1633,7 @@
     </p:spTree>
     <p:extLst>
       <p:ext uri="{BB962C8B-B14F-4D97-AF65-F5344CB8AC3E}">
-        <p14:creationId xmlns:p14="http://schemas.microsoft.com/office/powerpoint/2010/main" val="3177668014"/>
+        <p14:creationId xmlns:p14="http://schemas.microsoft.com/office/powerpoint/2010/main" val="2422405906"/>
       </p:ext>
     </p:extLst>
   </p:cSld>
@@ -1665,7 +1665,7 @@
           <p:cNvPr id="2" name="タイトル 1">
             <a:extLst>
               <a:ext uri="{FF2B5EF4-FFF2-40B4-BE49-F238E27FC236}">
-                <a16:creationId xmlns:a16="http://schemas.microsoft.com/office/drawing/2014/main" id="{22E3E7AC-C6E2-6F39-8C97-E6E88F4A76E1}"/>
+                <a16:creationId xmlns:a16="http://schemas.microsoft.com/office/drawing/2014/main" id="{F77F72C7-F50C-7B27-7D0C-E674F8EC85FB}"/>
               </a:ext>
             </a:extLst>
           </p:cNvPr>
@@ -1698,7 +1698,7 @@
           <p:cNvPr id="3" name="テキスト プレースホルダー 2">
             <a:extLst>
               <a:ext uri="{FF2B5EF4-FFF2-40B4-BE49-F238E27FC236}">
-                <a16:creationId xmlns:a16="http://schemas.microsoft.com/office/drawing/2014/main" id="{38C6DBF4-70F0-7DC8-0767-AD150AFFAB3E}"/>
+                <a16:creationId xmlns:a16="http://schemas.microsoft.com/office/drawing/2014/main" id="{3E3C02B1-4430-875F-A983-3CB5DDA047FA}"/>
               </a:ext>
             </a:extLst>
           </p:cNvPr>
@@ -1769,7 +1769,7 @@
           <p:cNvPr id="4" name="コンテンツ プレースホルダー 3">
             <a:extLst>
               <a:ext uri="{FF2B5EF4-FFF2-40B4-BE49-F238E27FC236}">
-                <a16:creationId xmlns:a16="http://schemas.microsoft.com/office/drawing/2014/main" id="{FEBE5FB2-8027-88DE-5DDA-A37151FEDAB5}"/>
+                <a16:creationId xmlns:a16="http://schemas.microsoft.com/office/drawing/2014/main" id="{E134EAE7-827A-3EFE-28A0-AABF3C20F14F}"/>
               </a:ext>
             </a:extLst>
           </p:cNvPr>
@@ -1863,7 +1863,7 @@
           <p:cNvPr id="5" name="テキスト プレースホルダー 4">
             <a:extLst>
               <a:ext uri="{FF2B5EF4-FFF2-40B4-BE49-F238E27FC236}">
-                <a16:creationId xmlns:a16="http://schemas.microsoft.com/office/drawing/2014/main" id="{128CCE94-57B8-5B3D-1E16-CBC46584BDE1}"/>
+                <a16:creationId xmlns:a16="http://schemas.microsoft.com/office/drawing/2014/main" id="{095FCA10-5C86-401B-3BEE-B187E747D96D}"/>
               </a:ext>
             </a:extLst>
           </p:cNvPr>
@@ -1934,7 +1934,7 @@
           <p:cNvPr id="6" name="コンテンツ プレースホルダー 5">
             <a:extLst>
               <a:ext uri="{FF2B5EF4-FFF2-40B4-BE49-F238E27FC236}">
-                <a16:creationId xmlns:a16="http://schemas.microsoft.com/office/drawing/2014/main" id="{4A07AD63-B9C7-3DF1-8247-FD80C878950C}"/>
+                <a16:creationId xmlns:a16="http://schemas.microsoft.com/office/drawing/2014/main" id="{00E4DC23-88A5-D355-23A5-AD71B9EC7034}"/>
               </a:ext>
             </a:extLst>
           </p:cNvPr>
@@ -2028,7 +2028,7 @@
           <p:cNvPr id="7" name="日付プレースホルダー 6">
             <a:extLst>
               <a:ext uri="{FF2B5EF4-FFF2-40B4-BE49-F238E27FC236}">
-                <a16:creationId xmlns:a16="http://schemas.microsoft.com/office/drawing/2014/main" id="{E5126FDC-664C-F0F8-A2C1-DF2FAC391A10}"/>
+                <a16:creationId xmlns:a16="http://schemas.microsoft.com/office/drawing/2014/main" id="{686AAA6E-FA08-1E24-B110-A65BD74D3830}"/>
               </a:ext>
             </a:extLst>
           </p:cNvPr>
@@ -2044,7 +2044,7 @@
           <a:bodyPr/>
           <a:lstStyle/>
           <a:p>
-            <a:fld id="{2C08C4EC-AA62-410E-B470-EDCDC70BD255}" type="datetimeFigureOut">
+            <a:fld id="{A8BB45A4-B792-4418-9F1E-7C691C836D9B}" type="datetimeFigureOut">
               <a:rPr kumimoji="1" lang="ja-JP" altLang="en-US" smtClean="0"/>
               <a:t>2026/6/28</a:t>
             </a:fld>
@@ -2057,7 +2057,7 @@
           <p:cNvPr id="8" name="フッター プレースホルダー 7">
             <a:extLst>
               <a:ext uri="{FF2B5EF4-FFF2-40B4-BE49-F238E27FC236}">
-                <a16:creationId xmlns:a16="http://schemas.microsoft.com/office/drawing/2014/main" id="{E2DE84C2-5DB8-2F80-699A-F78B9C7CC80B}"/>
+                <a16:creationId xmlns:a16="http://schemas.microsoft.com/office/drawing/2014/main" id="{4379A7EE-103D-493E-A7E2-2B9ABB5DF0B6}"/>
               </a:ext>
             </a:extLst>
           </p:cNvPr>
@@ -2082,7 +2082,7 @@
           <p:cNvPr id="9" name="スライド番号プレースホルダー 8">
             <a:extLst>
               <a:ext uri="{FF2B5EF4-FFF2-40B4-BE49-F238E27FC236}">
-                <a16:creationId xmlns:a16="http://schemas.microsoft.com/office/drawing/2014/main" id="{C9C8A163-7A1E-9F42-8684-AA9B0ABF90FD}"/>
+                <a16:creationId xmlns:a16="http://schemas.microsoft.com/office/drawing/2014/main" id="{FB484B07-5E5D-529A-AAFF-2627A464AADD}"/>
               </a:ext>
             </a:extLst>
           </p:cNvPr>
@@ -2098,7 +2098,7 @@
           <a:bodyPr/>
           <a:lstStyle/>
           <a:p>
-            <a:fld id="{D2C6DB13-8864-4086-9C19-81E295767B53}" type="slidenum">
+            <a:fld id="{B1E36797-0AB7-41B0-839D-7D3047F16152}" type="slidenum">
               <a:rPr kumimoji="1" lang="ja-JP" altLang="en-US" smtClean="0"/>
               <a:t>‹#›</a:t>
             </a:fld>
@@ -2109,7 +2109,7 @@
     </p:spTree>
     <p:extLst>
       <p:ext uri="{BB962C8B-B14F-4D97-AF65-F5344CB8AC3E}">
-        <p14:creationId xmlns:p14="http://schemas.microsoft.com/office/powerpoint/2010/main" val="2679752680"/>
+        <p14:creationId xmlns:p14="http://schemas.microsoft.com/office/powerpoint/2010/main" val="2038049237"/>
       </p:ext>
     </p:extLst>
   </p:cSld>
@@ -2141,7 +2141,7 @@
           <p:cNvPr id="2" name="タイトル 1">
             <a:extLst>
               <a:ext uri="{FF2B5EF4-FFF2-40B4-BE49-F238E27FC236}">
-                <a16:creationId xmlns:a16="http://schemas.microsoft.com/office/drawing/2014/main" id="{BD259A5C-9438-72E6-7F1C-1016520E33BA}"/>
+                <a16:creationId xmlns:a16="http://schemas.microsoft.com/office/drawing/2014/main" id="{52C7D645-4558-A685-34E7-AB9665EF9BAF}"/>
               </a:ext>
             </a:extLst>
           </p:cNvPr>
@@ -2169,7 +2169,7 @@
           <p:cNvPr id="3" name="日付プレースホルダー 2">
             <a:extLst>
               <a:ext uri="{FF2B5EF4-FFF2-40B4-BE49-F238E27FC236}">
-                <a16:creationId xmlns:a16="http://schemas.microsoft.com/office/drawing/2014/main" id="{7BD24B5D-60E1-8AB1-CA21-6ACF9D815ABF}"/>
+                <a16:creationId xmlns:a16="http://schemas.microsoft.com/office/drawing/2014/main" id="{18912631-3F2F-9C70-9028-C55603B265CE}"/>
               </a:ext>
             </a:extLst>
           </p:cNvPr>
@@ -2185,7 +2185,7 @@
           <a:bodyPr/>
           <a:lstStyle/>
           <a:p>
-            <a:fld id="{2C08C4EC-AA62-410E-B470-EDCDC70BD255}" type="datetimeFigureOut">
+            <a:fld id="{A8BB45A4-B792-4418-9F1E-7C691C836D9B}" type="datetimeFigureOut">
               <a:rPr kumimoji="1" lang="ja-JP" altLang="en-US" smtClean="0"/>
               <a:t>2026/6/28</a:t>
             </a:fld>
@@ -2198,7 +2198,7 @@
           <p:cNvPr id="4" name="フッター プレースホルダー 3">
             <a:extLst>
               <a:ext uri="{FF2B5EF4-FFF2-40B4-BE49-F238E27FC236}">
-                <a16:creationId xmlns:a16="http://schemas.microsoft.com/office/drawing/2014/main" id="{2FB3A26C-8B90-0D05-388A-EEA5A2DB33CD}"/>
+                <a16:creationId xmlns:a16="http://schemas.microsoft.com/office/drawing/2014/main" id="{4170DBA3-B716-9962-69D8-68467460DE36}"/>
               </a:ext>
             </a:extLst>
           </p:cNvPr>
@@ -2223,7 +2223,7 @@
           <p:cNvPr id="5" name="スライド番号プレースホルダー 4">
             <a:extLst>
               <a:ext uri="{FF2B5EF4-FFF2-40B4-BE49-F238E27FC236}">
-                <a16:creationId xmlns:a16="http://schemas.microsoft.com/office/drawing/2014/main" id="{D69D097E-0F41-8E9A-436F-6A4C897B351A}"/>
+                <a16:creationId xmlns:a16="http://schemas.microsoft.com/office/drawing/2014/main" id="{DC61EFAB-E678-517B-EF10-537C6CA96B77}"/>
               </a:ext>
             </a:extLst>
           </p:cNvPr>
@@ -2239,7 +2239,7 @@
           <a:bodyPr/>
           <a:lstStyle/>
           <a:p>
-            <a:fld id="{D2C6DB13-8864-4086-9C19-81E295767B53}" type="slidenum">
+            <a:fld id="{B1E36797-0AB7-41B0-839D-7D3047F16152}" type="slidenum">
               <a:rPr kumimoji="1" lang="ja-JP" altLang="en-US" smtClean="0"/>
               <a:t>‹#›</a:t>
             </a:fld>
@@ -2250,7 +2250,7 @@
     </p:spTree>
     <p:extLst>
       <p:ext uri="{BB962C8B-B14F-4D97-AF65-F5344CB8AC3E}">
-        <p14:creationId xmlns:p14="http://schemas.microsoft.com/office/powerpoint/2010/main" val="3157361483"/>
+        <p14:creationId xmlns:p14="http://schemas.microsoft.com/office/powerpoint/2010/main" val="3782967077"/>
       </p:ext>
     </p:extLst>
   </p:cSld>
@@ -2282,7 +2282,7 @@
           <p:cNvPr id="2" name="日付プレースホルダー 1">
             <a:extLst>
               <a:ext uri="{FF2B5EF4-FFF2-40B4-BE49-F238E27FC236}">
-                <a16:creationId xmlns:a16="http://schemas.microsoft.com/office/drawing/2014/main" id="{C9B6D9DC-7198-75EC-95A1-F7A8716A47DC}"/>
+                <a16:creationId xmlns:a16="http://schemas.microsoft.com/office/drawing/2014/main" id="{B9124A10-66EC-13B6-8593-6282C9469EC2}"/>
               </a:ext>
             </a:extLst>
           </p:cNvPr>
@@ -2298,7 +2298,7 @@
           <a:bodyPr/>
           <a:lstStyle/>
           <a:p>
-            <a:fld id="{2C08C4EC-AA62-410E-B470-EDCDC70BD255}" type="datetimeFigureOut">
+            <a:fld id="{A8BB45A4-B792-4418-9F1E-7C691C836D9B}" type="datetimeFigureOut">
               <a:rPr kumimoji="1" lang="ja-JP" altLang="en-US" smtClean="0"/>
               <a:t>2026/6/28</a:t>
             </a:fld>
@@ -2311,7 +2311,7 @@
           <p:cNvPr id="3" name="フッター プレースホルダー 2">
             <a:extLst>
               <a:ext uri="{FF2B5EF4-FFF2-40B4-BE49-F238E27FC236}">
-                <a16:creationId xmlns:a16="http://schemas.microsoft.com/office/drawing/2014/main" id="{2E3861D8-3394-AE29-F78F-B66F0325A860}"/>
+                <a16:creationId xmlns:a16="http://schemas.microsoft.com/office/drawing/2014/main" id="{C6A9E725-C6EA-B8A1-7041-FD026AB6EF40}"/>
               </a:ext>
             </a:extLst>
           </p:cNvPr>
@@ -2336,7 +2336,7 @@
           <p:cNvPr id="4" name="スライド番号プレースホルダー 3">
             <a:extLst>
               <a:ext uri="{FF2B5EF4-FFF2-40B4-BE49-F238E27FC236}">
-                <a16:creationId xmlns:a16="http://schemas.microsoft.com/office/drawing/2014/main" id="{9FF868C0-8C3D-4DC4-329E-E3EDFB7D76B4}"/>
+                <a16:creationId xmlns:a16="http://schemas.microsoft.com/office/drawing/2014/main" id="{26FA2342-7BC1-2C78-95F1-5983DAC79F69}"/>
               </a:ext>
             </a:extLst>
           </p:cNvPr>
@@ -2352,7 +2352,7 @@
           <a:bodyPr/>
           <a:lstStyle/>
           <a:p>
-            <a:fld id="{D2C6DB13-8864-4086-9C19-81E295767B53}" type="slidenum">
+            <a:fld id="{B1E36797-0AB7-41B0-839D-7D3047F16152}" type="slidenum">
               <a:rPr kumimoji="1" lang="ja-JP" altLang="en-US" smtClean="0"/>
               <a:t>‹#›</a:t>
             </a:fld>
@@ -2363,7 +2363,7 @@
     </p:spTree>
     <p:extLst>
       <p:ext uri="{BB962C8B-B14F-4D97-AF65-F5344CB8AC3E}">
-        <p14:creationId xmlns:p14="http://schemas.microsoft.com/office/powerpoint/2010/main" val="569559789"/>
+        <p14:creationId xmlns:p14="http://schemas.microsoft.com/office/powerpoint/2010/main" val="33939311"/>
       </p:ext>
     </p:extLst>
   </p:cSld>
@@ -2395,7 +2395,7 @@
           <p:cNvPr id="2" name="タイトル 1">
             <a:extLst>
               <a:ext uri="{FF2B5EF4-FFF2-40B4-BE49-F238E27FC236}">
-                <a16:creationId xmlns:a16="http://schemas.microsoft.com/office/drawing/2014/main" id="{94B53DBD-4FBE-68DE-4F2A-8F85CC0C4A13}"/>
+                <a16:creationId xmlns:a16="http://schemas.microsoft.com/office/drawing/2014/main" id="{0A932E7C-EDB1-57B4-7529-2B05543445B9}"/>
               </a:ext>
             </a:extLst>
           </p:cNvPr>
@@ -2432,7 +2432,7 @@
           <p:cNvPr id="3" name="コンテンツ プレースホルダー 2">
             <a:extLst>
               <a:ext uri="{FF2B5EF4-FFF2-40B4-BE49-F238E27FC236}">
-                <a16:creationId xmlns:a16="http://schemas.microsoft.com/office/drawing/2014/main" id="{B41D9664-BC37-C6EF-D67A-C5FA016D8C57}"/>
+                <a16:creationId xmlns:a16="http://schemas.microsoft.com/office/drawing/2014/main" id="{E5CCAFF7-CAA4-8676-961E-9C1D39FB8A2F}"/>
               </a:ext>
             </a:extLst>
           </p:cNvPr>
@@ -2554,7 +2554,7 @@
           <p:cNvPr id="4" name="テキスト プレースホルダー 3">
             <a:extLst>
               <a:ext uri="{FF2B5EF4-FFF2-40B4-BE49-F238E27FC236}">
-                <a16:creationId xmlns:a16="http://schemas.microsoft.com/office/drawing/2014/main" id="{C33B150F-FBCC-911C-7A70-AD6419A16EC8}"/>
+                <a16:creationId xmlns:a16="http://schemas.microsoft.com/office/drawing/2014/main" id="{4C28159A-5336-2395-9B62-4B0FA1769A2A}"/>
               </a:ext>
             </a:extLst>
           </p:cNvPr>
@@ -2625,7 +2625,7 @@
           <p:cNvPr id="5" name="日付プレースホルダー 4">
             <a:extLst>
               <a:ext uri="{FF2B5EF4-FFF2-40B4-BE49-F238E27FC236}">
-                <a16:creationId xmlns:a16="http://schemas.microsoft.com/office/drawing/2014/main" id="{BC6363FB-E407-3855-01FA-C2EF31342819}"/>
+                <a16:creationId xmlns:a16="http://schemas.microsoft.com/office/drawing/2014/main" id="{73E9BF08-FC12-0F9D-20EB-669B72460318}"/>
               </a:ext>
             </a:extLst>
           </p:cNvPr>
@@ -2641,7 +2641,7 @@
           <a:bodyPr/>
           <a:lstStyle/>
           <a:p>
-            <a:fld id="{2C08C4EC-AA62-410E-B470-EDCDC70BD255}" type="datetimeFigureOut">
+            <a:fld id="{A8BB45A4-B792-4418-9F1E-7C691C836D9B}" type="datetimeFigureOut">
               <a:rPr kumimoji="1" lang="ja-JP" altLang="en-US" smtClean="0"/>
               <a:t>2026/6/28</a:t>
             </a:fld>
@@ -2654,7 +2654,7 @@
           <p:cNvPr id="6" name="フッター プレースホルダー 5">
             <a:extLst>
               <a:ext uri="{FF2B5EF4-FFF2-40B4-BE49-F238E27FC236}">
-                <a16:creationId xmlns:a16="http://schemas.microsoft.com/office/drawing/2014/main" id="{6987DEE4-F25C-4748-A4CF-7A5BFF5FACEB}"/>
+                <a16:creationId xmlns:a16="http://schemas.microsoft.com/office/drawing/2014/main" id="{C70334AD-CCDD-8FA5-3823-5BA8A3568C23}"/>
               </a:ext>
             </a:extLst>
           </p:cNvPr>
@@ -2679,7 +2679,7 @@
           <p:cNvPr id="7" name="スライド番号プレースホルダー 6">
             <a:extLst>
               <a:ext uri="{FF2B5EF4-FFF2-40B4-BE49-F238E27FC236}">
-                <a16:creationId xmlns:a16="http://schemas.microsoft.com/office/drawing/2014/main" id="{A8BE85D8-2722-B999-BECD-041E4C58F384}"/>
+                <a16:creationId xmlns:a16="http://schemas.microsoft.com/office/drawing/2014/main" id="{F28E2C0F-2A1C-6BD9-3E58-F1528D991F8F}"/>
               </a:ext>
             </a:extLst>
           </p:cNvPr>
@@ -2695,7 +2695,7 @@
           <a:bodyPr/>
           <a:lstStyle/>
           <a:p>
-            <a:fld id="{D2C6DB13-8864-4086-9C19-81E295767B53}" type="slidenum">
+            <a:fld id="{B1E36797-0AB7-41B0-839D-7D3047F16152}" type="slidenum">
               <a:rPr kumimoji="1" lang="ja-JP" altLang="en-US" smtClean="0"/>
               <a:t>‹#›</a:t>
             </a:fld>
@@ -2706,7 +2706,7 @@
     </p:spTree>
     <p:extLst>
       <p:ext uri="{BB962C8B-B14F-4D97-AF65-F5344CB8AC3E}">
-        <p14:creationId xmlns:p14="http://schemas.microsoft.com/office/powerpoint/2010/main" val="2125194313"/>
+        <p14:creationId xmlns:p14="http://schemas.microsoft.com/office/powerpoint/2010/main" val="4223021032"/>
       </p:ext>
     </p:extLst>
   </p:cSld>
@@ -2738,7 +2738,7 @@
           <p:cNvPr id="2" name="タイトル 1">
             <a:extLst>
               <a:ext uri="{FF2B5EF4-FFF2-40B4-BE49-F238E27FC236}">
-                <a16:creationId xmlns:a16="http://schemas.microsoft.com/office/drawing/2014/main" id="{63966C79-E3A6-3E95-D2BD-C427010CA188}"/>
+                <a16:creationId xmlns:a16="http://schemas.microsoft.com/office/drawing/2014/main" id="{3E07C650-157F-02EC-FBCC-F247DFBDF2DB}"/>
               </a:ext>
             </a:extLst>
           </p:cNvPr>
@@ -2775,7 +2775,7 @@
           <p:cNvPr id="3" name="図プレースホルダー 2">
             <a:extLst>
               <a:ext uri="{FF2B5EF4-FFF2-40B4-BE49-F238E27FC236}">
-                <a16:creationId xmlns:a16="http://schemas.microsoft.com/office/drawing/2014/main" id="{70B4D8D6-01D9-E7CA-9C7E-16D5B90747BD}"/>
+                <a16:creationId xmlns:a16="http://schemas.microsoft.com/office/drawing/2014/main" id="{5AD7FDD9-88C4-E2B0-0744-1379C0D8C548}"/>
               </a:ext>
             </a:extLst>
           </p:cNvPr>
@@ -2842,7 +2842,7 @@
           <p:cNvPr id="4" name="テキスト プレースホルダー 3">
             <a:extLst>
               <a:ext uri="{FF2B5EF4-FFF2-40B4-BE49-F238E27FC236}">
-                <a16:creationId xmlns:a16="http://schemas.microsoft.com/office/drawing/2014/main" id="{6982B9F0-A823-D613-5047-1D20BE26666B}"/>
+                <a16:creationId xmlns:a16="http://schemas.microsoft.com/office/drawing/2014/main" id="{BBAFC351-85E7-95C0-4F2E-1E637000EE32}"/>
               </a:ext>
             </a:extLst>
           </p:cNvPr>
@@ -2913,7 +2913,7 @@
           <p:cNvPr id="5" name="日付プレースホルダー 4">
             <a:extLst>
               <a:ext uri="{FF2B5EF4-FFF2-40B4-BE49-F238E27FC236}">
-                <a16:creationId xmlns:a16="http://schemas.microsoft.com/office/drawing/2014/main" id="{FC08A2F8-D65D-7AA2-DFF9-339DB827B86D}"/>
+                <a16:creationId xmlns:a16="http://schemas.microsoft.com/office/drawing/2014/main" id="{50A470C7-A127-8A57-DF0F-32497038AF80}"/>
               </a:ext>
             </a:extLst>
           </p:cNvPr>
@@ -2929,7 +2929,7 @@
           <a:bodyPr/>
           <a:lstStyle/>
           <a:p>
-            <a:fld id="{2C08C4EC-AA62-410E-B470-EDCDC70BD255}" type="datetimeFigureOut">
+            <a:fld id="{A8BB45A4-B792-4418-9F1E-7C691C836D9B}" type="datetimeFigureOut">
               <a:rPr kumimoji="1" lang="ja-JP" altLang="en-US" smtClean="0"/>
               <a:t>2026/6/28</a:t>
             </a:fld>
@@ -2942,7 +2942,7 @@
           <p:cNvPr id="6" name="フッター プレースホルダー 5">
             <a:extLst>
               <a:ext uri="{FF2B5EF4-FFF2-40B4-BE49-F238E27FC236}">
-                <a16:creationId xmlns:a16="http://schemas.microsoft.com/office/drawing/2014/main" id="{E01C2C9B-2659-4C71-7BF7-A1E448118C54}"/>
+                <a16:creationId xmlns:a16="http://schemas.microsoft.com/office/drawing/2014/main" id="{5F25DFA7-65B0-8984-542C-72DA67C0B5B0}"/>
               </a:ext>
             </a:extLst>
           </p:cNvPr>
@@ -2967,7 +2967,7 @@
           <p:cNvPr id="7" name="スライド番号プレースホルダー 6">
             <a:extLst>
               <a:ext uri="{FF2B5EF4-FFF2-40B4-BE49-F238E27FC236}">
-                <a16:creationId xmlns:a16="http://schemas.microsoft.com/office/drawing/2014/main" id="{273A0B99-3321-CDAA-39A0-7C74E82B5409}"/>
+                <a16:creationId xmlns:a16="http://schemas.microsoft.com/office/drawing/2014/main" id="{EB264A52-A89D-D2FB-25E2-9345F3A72535}"/>
               </a:ext>
             </a:extLst>
           </p:cNvPr>
@@ -2983,7 +2983,7 @@
           <a:bodyPr/>
           <a:lstStyle/>
           <a:p>
-            <a:fld id="{D2C6DB13-8864-4086-9C19-81E295767B53}" type="slidenum">
+            <a:fld id="{B1E36797-0AB7-41B0-839D-7D3047F16152}" type="slidenum">
               <a:rPr kumimoji="1" lang="ja-JP" altLang="en-US" smtClean="0"/>
               <a:t>‹#›</a:t>
             </a:fld>
@@ -2994,7 +2994,7 @@
     </p:spTree>
     <p:extLst>
       <p:ext uri="{BB962C8B-B14F-4D97-AF65-F5344CB8AC3E}">
-        <p14:creationId xmlns:p14="http://schemas.microsoft.com/office/powerpoint/2010/main" val="3367127202"/>
+        <p14:creationId xmlns:p14="http://schemas.microsoft.com/office/powerpoint/2010/main" val="514429931"/>
       </p:ext>
     </p:extLst>
   </p:cSld>
@@ -3031,7 +3031,7 @@
           <p:cNvPr id="2" name="タイトル プレースホルダー 1">
             <a:extLst>
               <a:ext uri="{FF2B5EF4-FFF2-40B4-BE49-F238E27FC236}">
-                <a16:creationId xmlns:a16="http://schemas.microsoft.com/office/drawing/2014/main" id="{412885D3-A737-1B4B-33B8-8EC36F772FD4}"/>
+                <a16:creationId xmlns:a16="http://schemas.microsoft.com/office/drawing/2014/main" id="{E83E0D94-DD81-ED92-2847-658354EA7454}"/>
               </a:ext>
             </a:extLst>
           </p:cNvPr>
@@ -3069,7 +3069,7 @@
           <p:cNvPr id="3" name="テキスト プレースホルダー 2">
             <a:extLst>
               <a:ext uri="{FF2B5EF4-FFF2-40B4-BE49-F238E27FC236}">
-                <a16:creationId xmlns:a16="http://schemas.microsoft.com/office/drawing/2014/main" id="{9374BF8F-DAEF-F879-A232-D1493F339258}"/>
+                <a16:creationId xmlns:a16="http://schemas.microsoft.com/office/drawing/2014/main" id="{6B6ADD21-F36E-AD6F-788D-0D4BAEAA7C8E}"/>
               </a:ext>
             </a:extLst>
           </p:cNvPr>
@@ -3168,7 +3168,7 @@
           <p:cNvPr id="4" name="日付プレースホルダー 3">
             <a:extLst>
               <a:ext uri="{FF2B5EF4-FFF2-40B4-BE49-F238E27FC236}">
-                <a16:creationId xmlns:a16="http://schemas.microsoft.com/office/drawing/2014/main" id="{A58C77A4-BF23-DDE3-2E75-2138272C5B09}"/>
+                <a16:creationId xmlns:a16="http://schemas.microsoft.com/office/drawing/2014/main" id="{CB8BB52B-CB11-44BD-DCFE-7451AFA8C4BF}"/>
               </a:ext>
             </a:extLst>
           </p:cNvPr>
@@ -3202,7 +3202,7 @@
             </a:lvl1pPr>
           </a:lstStyle>
           <a:p>
-            <a:fld id="{2C08C4EC-AA62-410E-B470-EDCDC70BD255}" type="datetimeFigureOut">
+            <a:fld id="{A8BB45A4-B792-4418-9F1E-7C691C836D9B}" type="datetimeFigureOut">
               <a:rPr kumimoji="1" lang="ja-JP" altLang="en-US" smtClean="0"/>
               <a:t>2026/6/28</a:t>
             </a:fld>
@@ -3215,7 +3215,7 @@
           <p:cNvPr id="5" name="フッター プレースホルダー 4">
             <a:extLst>
               <a:ext uri="{FF2B5EF4-FFF2-40B4-BE49-F238E27FC236}">
-                <a16:creationId xmlns:a16="http://schemas.microsoft.com/office/drawing/2014/main" id="{FA7D29E1-0A54-209E-A69B-8CA95C2D6419}"/>
+                <a16:creationId xmlns:a16="http://schemas.microsoft.com/office/drawing/2014/main" id="{E1F4EE9B-1C0A-1AF1-3C33-9FBB4B05FE45}"/>
               </a:ext>
             </a:extLst>
           </p:cNvPr>
@@ -3258,7 +3258,7 @@
           <p:cNvPr id="6" name="スライド番号プレースホルダー 5">
             <a:extLst>
               <a:ext uri="{FF2B5EF4-FFF2-40B4-BE49-F238E27FC236}">
-                <a16:creationId xmlns:a16="http://schemas.microsoft.com/office/drawing/2014/main" id="{F1CF14E0-C9A1-4BF2-7E9B-77284F57ABE8}"/>
+                <a16:creationId xmlns:a16="http://schemas.microsoft.com/office/drawing/2014/main" id="{E151DDB1-C1F2-F429-C9B1-59DB705C76D4}"/>
               </a:ext>
             </a:extLst>
           </p:cNvPr>
@@ -3292,7 +3292,7 @@
             </a:lvl1pPr>
           </a:lstStyle>
           <a:p>
-            <a:fld id="{D2C6DB13-8864-4086-9C19-81E295767B53}" type="slidenum">
+            <a:fld id="{B1E36797-0AB7-41B0-839D-7D3047F16152}" type="slidenum">
               <a:rPr kumimoji="1" lang="ja-JP" altLang="en-US" smtClean="0"/>
               <a:t>‹#›</a:t>
             </a:fld>
@@ -3303,7 +3303,7 @@
     </p:spTree>
     <p:extLst>
       <p:ext uri="{BB962C8B-B14F-4D97-AF65-F5344CB8AC3E}">
-        <p14:creationId xmlns:p14="http://schemas.microsoft.com/office/powerpoint/2010/main" val="3647241668"/>
+        <p14:creationId xmlns:p14="http://schemas.microsoft.com/office/powerpoint/2010/main" val="3144240929"/>
       </p:ext>
     </p:extLst>
   </p:cSld>
@@ -3634,7 +3634,7 @@
           <p:cNvPr id="2" name="楕円 1">
             <a:extLst>
               <a:ext uri="{FF2B5EF4-FFF2-40B4-BE49-F238E27FC236}">
-                <a16:creationId xmlns:a16="http://schemas.microsoft.com/office/drawing/2014/main" id="{D3C37FF8-16EE-20C4-22B5-38820E52AD4D}"/>
+                <a16:creationId xmlns:a16="http://schemas.microsoft.com/office/drawing/2014/main" id="{6E522C84-5A1D-D1D2-7E31-3EDDEC6EA5EE}"/>
               </a:ext>
             </a:extLst>
           </p:cNvPr>
@@ -3702,7 +3702,7 @@
           <p:cNvPr id="3" name="楕円 2">
             <a:extLst>
               <a:ext uri="{FF2B5EF4-FFF2-40B4-BE49-F238E27FC236}">
-                <a16:creationId xmlns:a16="http://schemas.microsoft.com/office/drawing/2014/main" id="{08009290-89C6-736B-DB89-3D98ADE052B8}"/>
+                <a16:creationId xmlns:a16="http://schemas.microsoft.com/office/drawing/2014/main" id="{43201DA0-5C28-9B8E-30A4-5DF00317B53F}"/>
               </a:ext>
             </a:extLst>
           </p:cNvPr>
@@ -3770,7 +3770,7 @@
           <p:cNvPr id="4" name="楕円 3">
             <a:extLst>
               <a:ext uri="{FF2B5EF4-FFF2-40B4-BE49-F238E27FC236}">
-                <a16:creationId xmlns:a16="http://schemas.microsoft.com/office/drawing/2014/main" id="{122D65DE-CE6F-909D-8296-724AF9DE728B}"/>
+                <a16:creationId xmlns:a16="http://schemas.microsoft.com/office/drawing/2014/main" id="{48012512-8CDA-4A19-DF74-4C945FA01C90}"/>
               </a:ext>
             </a:extLst>
           </p:cNvPr>
@@ -3838,7 +3838,7 @@
           <p:cNvPr id="5" name="テキスト ボックス 4">
             <a:extLst>
               <a:ext uri="{FF2B5EF4-FFF2-40B4-BE49-F238E27FC236}">
-                <a16:creationId xmlns:a16="http://schemas.microsoft.com/office/drawing/2014/main" id="{A760456A-9827-2E04-68E3-50A34FDDD748}"/>
+                <a16:creationId xmlns:a16="http://schemas.microsoft.com/office/drawing/2014/main" id="{19E3CEDD-1E5A-DAF3-EA42-D2A5ACFB122B}"/>
               </a:ext>
             </a:extLst>
           </p:cNvPr>
@@ -3878,7 +3878,7 @@
           <p:cNvPr id="6" name="テキスト ボックス 5">
             <a:extLst>
               <a:ext uri="{FF2B5EF4-FFF2-40B4-BE49-F238E27FC236}">
-                <a16:creationId xmlns:a16="http://schemas.microsoft.com/office/drawing/2014/main" id="{30EA4014-39C4-6CEB-F84F-8FCDC5C0F610}"/>
+                <a16:creationId xmlns:a16="http://schemas.microsoft.com/office/drawing/2014/main" id="{2F6DEC5B-5945-F278-628D-6A5930BC3D0A}"/>
               </a:ext>
             </a:extLst>
           </p:cNvPr>
@@ -3918,7 +3918,7 @@
           <p:cNvPr id="7" name="テキスト ボックス 6">
             <a:extLst>
               <a:ext uri="{FF2B5EF4-FFF2-40B4-BE49-F238E27FC236}">
-                <a16:creationId xmlns:a16="http://schemas.microsoft.com/office/drawing/2014/main" id="{0A7DCA15-8205-04BD-ADE4-A72AF9051B89}"/>
+                <a16:creationId xmlns:a16="http://schemas.microsoft.com/office/drawing/2014/main" id="{2ABE8880-8CE1-BB87-4EB3-E3B24537597B}"/>
               </a:ext>
             </a:extLst>
           </p:cNvPr>
@@ -3976,7 +3976,7 @@
           <p:cNvPr id="8" name="テキスト ボックス 7">
             <a:extLst>
               <a:ext uri="{FF2B5EF4-FFF2-40B4-BE49-F238E27FC236}">
-                <a16:creationId xmlns:a16="http://schemas.microsoft.com/office/drawing/2014/main" id="{AB7E9CB9-2F63-A23C-B5B6-C4B7525A386D}"/>
+                <a16:creationId xmlns:a16="http://schemas.microsoft.com/office/drawing/2014/main" id="{289E2664-5E21-189D-F53A-6BA390305975}"/>
               </a:ext>
             </a:extLst>
           </p:cNvPr>
@@ -4086,7 +4086,7 @@
     </p:spTree>
     <p:extLst>
       <p:ext uri="{BB962C8B-B14F-4D97-AF65-F5344CB8AC3E}">
-        <p14:creationId xmlns:p14="http://schemas.microsoft.com/office/powerpoint/2010/main" val="2401725307"/>
+        <p14:creationId xmlns:p14="http://schemas.microsoft.com/office/powerpoint/2010/main" val="3525490752"/>
       </p:ext>
     </p:extLst>
   </p:cSld>
@@ -4126,7 +4126,7 @@
           <p:cNvPr id="2" name="四角形: 角を丸くする 1">
             <a:extLst>
               <a:ext uri="{FF2B5EF4-FFF2-40B4-BE49-F238E27FC236}">
-                <a16:creationId xmlns:a16="http://schemas.microsoft.com/office/drawing/2014/main" id="{9CBE778B-3F97-DBA9-18E5-4480513BF7B4}"/>
+                <a16:creationId xmlns:a16="http://schemas.microsoft.com/office/drawing/2014/main" id="{43B23C53-0F04-F03E-3285-EEE10D096915}"/>
               </a:ext>
             </a:extLst>
           </p:cNvPr>
@@ -4194,7 +4194,7 @@
           <p:cNvPr id="3" name="テキスト ボックス 2">
             <a:extLst>
               <a:ext uri="{FF2B5EF4-FFF2-40B4-BE49-F238E27FC236}">
-                <a16:creationId xmlns:a16="http://schemas.microsoft.com/office/drawing/2014/main" id="{B162D25C-8434-3440-F1EC-2F5A5EA0E87A}"/>
+                <a16:creationId xmlns:a16="http://schemas.microsoft.com/office/drawing/2014/main" id="{A81CB0EC-F926-D4EC-86D3-6965C0850EDE}"/>
               </a:ext>
             </a:extLst>
           </p:cNvPr>
@@ -4240,7 +4240,7 @@
           <p:cNvPr id="4" name="テキスト ボックス 3">
             <a:extLst>
               <a:ext uri="{FF2B5EF4-FFF2-40B4-BE49-F238E27FC236}">
-                <a16:creationId xmlns:a16="http://schemas.microsoft.com/office/drawing/2014/main" id="{AFE65A2C-651C-2B0F-8630-533B9CBC6BB7}"/>
+                <a16:creationId xmlns:a16="http://schemas.microsoft.com/office/drawing/2014/main" id="{170619F5-0190-63F6-0C16-ACFB1D0A5840}"/>
               </a:ext>
             </a:extLst>
           </p:cNvPr>
@@ -4280,7 +4280,7 @@
           <p:cNvPr id="5" name="四角形: 角を丸くする 4">
             <a:extLst>
               <a:ext uri="{FF2B5EF4-FFF2-40B4-BE49-F238E27FC236}">
-                <a16:creationId xmlns:a16="http://schemas.microsoft.com/office/drawing/2014/main" id="{7FE3D1D2-2194-BB12-FDD1-B09A6B4FC1AB}"/>
+                <a16:creationId xmlns:a16="http://schemas.microsoft.com/office/drawing/2014/main" id="{F6BE3BB6-B09D-8BD1-5AF7-90C67B31DA3A}"/>
               </a:ext>
             </a:extLst>
           </p:cNvPr>
@@ -4334,7 +4334,7 @@
           <p:cNvPr id="6" name="テキスト ボックス 5">
             <a:extLst>
               <a:ext uri="{FF2B5EF4-FFF2-40B4-BE49-F238E27FC236}">
-                <a16:creationId xmlns:a16="http://schemas.microsoft.com/office/drawing/2014/main" id="{8421BE8A-DD0B-FFA6-003F-3404A85658B0}"/>
+                <a16:creationId xmlns:a16="http://schemas.microsoft.com/office/drawing/2014/main" id="{C09ED8CA-9787-47FE-114A-0F67E330D16C}"/>
               </a:ext>
             </a:extLst>
           </p:cNvPr>
@@ -4375,7 +4375,7 @@
           <p:cNvPr id="7" name="テキスト ボックス 6">
             <a:extLst>
               <a:ext uri="{FF2B5EF4-FFF2-40B4-BE49-F238E27FC236}">
-                <a16:creationId xmlns:a16="http://schemas.microsoft.com/office/drawing/2014/main" id="{ADF410F6-E01F-1167-9C47-593CFDCA180B}"/>
+                <a16:creationId xmlns:a16="http://schemas.microsoft.com/office/drawing/2014/main" id="{0E2D70A4-6908-EB47-0DF4-A49FF2AA3D76}"/>
               </a:ext>
             </a:extLst>
           </p:cNvPr>
@@ -4422,7 +4422,7 @@
           <p:cNvPr id="8" name="テキスト ボックス 7">
             <a:extLst>
               <a:ext uri="{FF2B5EF4-FFF2-40B4-BE49-F238E27FC236}">
-                <a16:creationId xmlns:a16="http://schemas.microsoft.com/office/drawing/2014/main" id="{C24D3EAC-96FD-CF7E-BFC1-487F618F5319}"/>
+                <a16:creationId xmlns:a16="http://schemas.microsoft.com/office/drawing/2014/main" id="{8DF37CB5-7BAD-0AAC-6541-0D97BC217FF0}"/>
               </a:ext>
             </a:extLst>
           </p:cNvPr>
@@ -4496,7 +4496,7 @@
           <p:cNvPr id="9" name="四角形: 角を丸くする 8">
             <a:extLst>
               <a:ext uri="{FF2B5EF4-FFF2-40B4-BE49-F238E27FC236}">
-                <a16:creationId xmlns:a16="http://schemas.microsoft.com/office/drawing/2014/main" id="{069B1534-738C-2F7B-BCE7-52E7EBF418C1}"/>
+                <a16:creationId xmlns:a16="http://schemas.microsoft.com/office/drawing/2014/main" id="{881A6624-7334-E86D-DDBB-85FA0F9A2A66}"/>
               </a:ext>
             </a:extLst>
           </p:cNvPr>
@@ -4564,7 +4564,7 @@
           <p:cNvPr id="10" name="テキスト ボックス 9">
             <a:extLst>
               <a:ext uri="{FF2B5EF4-FFF2-40B4-BE49-F238E27FC236}">
-                <a16:creationId xmlns:a16="http://schemas.microsoft.com/office/drawing/2014/main" id="{C4087787-B750-38E4-4088-E9A37111AB58}"/>
+                <a16:creationId xmlns:a16="http://schemas.microsoft.com/office/drawing/2014/main" id="{FB237EB5-2014-786F-6535-C2018CE512F3}"/>
               </a:ext>
             </a:extLst>
           </p:cNvPr>
@@ -4605,7 +4605,7 @@
           <p:cNvPr id="12" name="図 11">
             <a:extLst>
               <a:ext uri="{FF2B5EF4-FFF2-40B4-BE49-F238E27FC236}">
-                <a16:creationId xmlns:a16="http://schemas.microsoft.com/office/drawing/2014/main" id="{A61AE75F-C570-50F7-C58C-470D48AF7487}"/>
+                <a16:creationId xmlns:a16="http://schemas.microsoft.com/office/drawing/2014/main" id="{8D00D849-B795-6556-9302-B7BFCBD96B3C}"/>
               </a:ext>
             </a:extLst>
           </p:cNvPr>
@@ -4646,7 +4646,7 @@
           <p:cNvPr id="13" name="テキスト ボックス 12">
             <a:extLst>
               <a:ext uri="{FF2B5EF4-FFF2-40B4-BE49-F238E27FC236}">
-                <a16:creationId xmlns:a16="http://schemas.microsoft.com/office/drawing/2014/main" id="{7096662E-66E9-577B-1672-68716073AFED}"/>
+                <a16:creationId xmlns:a16="http://schemas.microsoft.com/office/drawing/2014/main" id="{48FB662A-3F87-241C-7DE2-67FDDA3A1D52}"/>
               </a:ext>
             </a:extLst>
           </p:cNvPr>
@@ -4687,7 +4687,7 @@
           <p:cNvPr id="14" name="四角形: 角を丸くする 13">
             <a:extLst>
               <a:ext uri="{FF2B5EF4-FFF2-40B4-BE49-F238E27FC236}">
-                <a16:creationId xmlns:a16="http://schemas.microsoft.com/office/drawing/2014/main" id="{0EBCED3D-9BD7-1659-F7F4-B76E258AAAF4}"/>
+                <a16:creationId xmlns:a16="http://schemas.microsoft.com/office/drawing/2014/main" id="{29620909-3C37-3AD0-2F70-C23503EABD1C}"/>
               </a:ext>
             </a:extLst>
           </p:cNvPr>
@@ -4755,7 +4755,7 @@
           <p:cNvPr id="15" name="テキスト ボックス 14">
             <a:extLst>
               <a:ext uri="{FF2B5EF4-FFF2-40B4-BE49-F238E27FC236}">
-                <a16:creationId xmlns:a16="http://schemas.microsoft.com/office/drawing/2014/main" id="{6610D516-CFD9-989A-4AB5-5CDBD6C5FC6A}"/>
+                <a16:creationId xmlns:a16="http://schemas.microsoft.com/office/drawing/2014/main" id="{E8D9DC32-C44E-3831-CC49-D31CE79DB3A0}"/>
               </a:ext>
             </a:extLst>
           </p:cNvPr>
@@ -4795,7 +4795,7 @@
           <p:cNvPr id="16" name="テキスト ボックス 15">
             <a:extLst>
               <a:ext uri="{FF2B5EF4-FFF2-40B4-BE49-F238E27FC236}">
-                <a16:creationId xmlns:a16="http://schemas.microsoft.com/office/drawing/2014/main" id="{F85A5329-FB95-8675-637B-716E63B7CEFA}"/>
+                <a16:creationId xmlns:a16="http://schemas.microsoft.com/office/drawing/2014/main" id="{24E3EEF6-B588-08E8-58F9-4E5E126CA2F9}"/>
               </a:ext>
             </a:extLst>
           </p:cNvPr>
@@ -4835,7 +4835,7 @@
           <p:cNvPr id="17" name="四角形: 角を丸くする 16">
             <a:extLst>
               <a:ext uri="{FF2B5EF4-FFF2-40B4-BE49-F238E27FC236}">
-                <a16:creationId xmlns:a16="http://schemas.microsoft.com/office/drawing/2014/main" id="{233B5A85-31B3-935D-4414-1A31C0E447B3}"/>
+                <a16:creationId xmlns:a16="http://schemas.microsoft.com/office/drawing/2014/main" id="{C11A6891-61DC-4EB0-726A-39FC6D319B77}"/>
               </a:ext>
             </a:extLst>
           </p:cNvPr>
@@ -4903,7 +4903,7 @@
           <p:cNvPr id="18" name="テキスト ボックス 17">
             <a:extLst>
               <a:ext uri="{FF2B5EF4-FFF2-40B4-BE49-F238E27FC236}">
-                <a16:creationId xmlns:a16="http://schemas.microsoft.com/office/drawing/2014/main" id="{5AB5D281-E134-8988-DC65-26C327C9C99A}"/>
+                <a16:creationId xmlns:a16="http://schemas.microsoft.com/office/drawing/2014/main" id="{A8A9834C-2F85-BC05-A2F5-646080722116}"/>
               </a:ext>
             </a:extLst>
           </p:cNvPr>
@@ -4943,7 +4943,7 @@
           <p:cNvPr id="19" name="テキスト ボックス 18">
             <a:extLst>
               <a:ext uri="{FF2B5EF4-FFF2-40B4-BE49-F238E27FC236}">
-                <a16:creationId xmlns:a16="http://schemas.microsoft.com/office/drawing/2014/main" id="{BAF91E94-1633-D949-29A2-443844D8D9F6}"/>
+                <a16:creationId xmlns:a16="http://schemas.microsoft.com/office/drawing/2014/main" id="{19CAC807-FABD-4FEC-CBA6-9585032243DA}"/>
               </a:ext>
             </a:extLst>
           </p:cNvPr>
@@ -5001,7 +5001,7 @@
           <p:cNvPr id="20" name="四角形: 角を丸くする 19">
             <a:extLst>
               <a:ext uri="{FF2B5EF4-FFF2-40B4-BE49-F238E27FC236}">
-                <a16:creationId xmlns:a16="http://schemas.microsoft.com/office/drawing/2014/main" id="{19DB12F9-D698-0771-F3FD-E944262BD4A3}"/>
+                <a16:creationId xmlns:a16="http://schemas.microsoft.com/office/drawing/2014/main" id="{67C3CAED-76AA-A19F-5F19-C34DE5C7C49C}"/>
               </a:ext>
             </a:extLst>
           </p:cNvPr>
@@ -5069,7 +5069,7 @@
           <p:cNvPr id="21" name="テキスト ボックス 20">
             <a:extLst>
               <a:ext uri="{FF2B5EF4-FFF2-40B4-BE49-F238E27FC236}">
-                <a16:creationId xmlns:a16="http://schemas.microsoft.com/office/drawing/2014/main" id="{1770CEFE-F4AB-E88B-685B-4ADC1383EC5A}"/>
+                <a16:creationId xmlns:a16="http://schemas.microsoft.com/office/drawing/2014/main" id="{C18D88DE-715B-8D18-F99F-F1B7425E7B38}"/>
               </a:ext>
             </a:extLst>
           </p:cNvPr>
@@ -5109,7 +5109,7 @@
           <p:cNvPr id="22" name="テキスト ボックス 21">
             <a:extLst>
               <a:ext uri="{FF2B5EF4-FFF2-40B4-BE49-F238E27FC236}">
-                <a16:creationId xmlns:a16="http://schemas.microsoft.com/office/drawing/2014/main" id="{8499C26E-C79C-921D-BAF1-45EA2055745E}"/>
+                <a16:creationId xmlns:a16="http://schemas.microsoft.com/office/drawing/2014/main" id="{62D8C059-33C5-BC23-E503-08581E304391}"/>
               </a:ext>
             </a:extLst>
           </p:cNvPr>
@@ -5299,7 +5299,7 @@
           <p:cNvPr id="23" name="四角形: 角を丸くする 22">
             <a:extLst>
               <a:ext uri="{FF2B5EF4-FFF2-40B4-BE49-F238E27FC236}">
-                <a16:creationId xmlns:a16="http://schemas.microsoft.com/office/drawing/2014/main" id="{7F1A9E70-F78C-F379-8039-8F5CE36049CA}"/>
+                <a16:creationId xmlns:a16="http://schemas.microsoft.com/office/drawing/2014/main" id="{189DE424-46F6-54DB-3015-16C9434CC7F2}"/>
               </a:ext>
             </a:extLst>
           </p:cNvPr>
@@ -5367,7 +5367,7 @@
           <p:cNvPr id="24" name="テキスト ボックス 23">
             <a:extLst>
               <a:ext uri="{FF2B5EF4-FFF2-40B4-BE49-F238E27FC236}">
-                <a16:creationId xmlns:a16="http://schemas.microsoft.com/office/drawing/2014/main" id="{E3C55F37-D6B1-B0D9-44F6-3676B674C815}"/>
+                <a16:creationId xmlns:a16="http://schemas.microsoft.com/office/drawing/2014/main" id="{AC9DF3BE-19A6-A980-676D-94216070499B}"/>
               </a:ext>
             </a:extLst>
           </p:cNvPr>
@@ -5407,7 +5407,7 @@
           <p:cNvPr id="25" name="テキスト ボックス 24">
             <a:extLst>
               <a:ext uri="{FF2B5EF4-FFF2-40B4-BE49-F238E27FC236}">
-                <a16:creationId xmlns:a16="http://schemas.microsoft.com/office/drawing/2014/main" id="{16E7BC51-D982-192B-96ED-DA59112944B1}"/>
+                <a16:creationId xmlns:a16="http://schemas.microsoft.com/office/drawing/2014/main" id="{89B02D41-C2F6-1432-5522-9BBFCB346D17}"/>
               </a:ext>
             </a:extLst>
           </p:cNvPr>
@@ -5447,7 +5447,7 @@
           <p:cNvPr id="26" name="四角形: 角を丸くする 25">
             <a:extLst>
               <a:ext uri="{FF2B5EF4-FFF2-40B4-BE49-F238E27FC236}">
-                <a16:creationId xmlns:a16="http://schemas.microsoft.com/office/drawing/2014/main" id="{CBEBDE97-205D-5A08-2758-D6E2D678A094}"/>
+                <a16:creationId xmlns:a16="http://schemas.microsoft.com/office/drawing/2014/main" id="{62E0BC7A-9D9D-6BA9-D6B2-25E86027A948}"/>
               </a:ext>
             </a:extLst>
           </p:cNvPr>
@@ -5515,7 +5515,7 @@
           <p:cNvPr id="27" name="テキスト ボックス 26">
             <a:extLst>
               <a:ext uri="{FF2B5EF4-FFF2-40B4-BE49-F238E27FC236}">
-                <a16:creationId xmlns:a16="http://schemas.microsoft.com/office/drawing/2014/main" id="{3F112B29-37F7-AD62-CFC6-F492319740D6}"/>
+                <a16:creationId xmlns:a16="http://schemas.microsoft.com/office/drawing/2014/main" id="{AAC4A591-631A-43E8-BB98-7FA57CFE5E7E}"/>
               </a:ext>
             </a:extLst>
           </p:cNvPr>
@@ -5627,7 +5627,7 @@
           <p:cNvPr id="28" name="四角形: 角を丸くする 27">
             <a:extLst>
               <a:ext uri="{FF2B5EF4-FFF2-40B4-BE49-F238E27FC236}">
-                <a16:creationId xmlns:a16="http://schemas.microsoft.com/office/drawing/2014/main" id="{0894CEC3-A686-EEB2-324E-96087FB3BB56}"/>
+                <a16:creationId xmlns:a16="http://schemas.microsoft.com/office/drawing/2014/main" id="{4430216A-3D42-19FA-8BCE-50B9D6E4B04A}"/>
               </a:ext>
             </a:extLst>
           </p:cNvPr>
@@ -5695,7 +5695,7 @@
           <p:cNvPr id="29" name="テキスト ボックス 28">
             <a:extLst>
               <a:ext uri="{FF2B5EF4-FFF2-40B4-BE49-F238E27FC236}">
-                <a16:creationId xmlns:a16="http://schemas.microsoft.com/office/drawing/2014/main" id="{BCDFDB66-950C-F85B-926A-BE26BE681CC4}"/>
+                <a16:creationId xmlns:a16="http://schemas.microsoft.com/office/drawing/2014/main" id="{0BB54F9E-E084-F1C3-863E-952E32380820}"/>
               </a:ext>
             </a:extLst>
           </p:cNvPr>
@@ -5740,7 +5740,7 @@
     </p:spTree>
     <p:extLst>
       <p:ext uri="{BB962C8B-B14F-4D97-AF65-F5344CB8AC3E}">
-        <p14:creationId xmlns:p14="http://schemas.microsoft.com/office/powerpoint/2010/main" val="3676857303"/>
+        <p14:creationId xmlns:p14="http://schemas.microsoft.com/office/powerpoint/2010/main" val="1636380064"/>
       </p:ext>
     </p:extLst>
   </p:cSld>
@@ -5780,7 +5780,7 @@
           <p:cNvPr id="2" name="四角形: 角を丸くする 1">
             <a:extLst>
               <a:ext uri="{FF2B5EF4-FFF2-40B4-BE49-F238E27FC236}">
-                <a16:creationId xmlns:a16="http://schemas.microsoft.com/office/drawing/2014/main" id="{B177FCE8-638D-DCB8-95B2-2D4AB8969809}"/>
+                <a16:creationId xmlns:a16="http://schemas.microsoft.com/office/drawing/2014/main" id="{5E8C53C0-31A8-3654-22ED-0F2467073979}"/>
               </a:ext>
             </a:extLst>
           </p:cNvPr>
@@ -5848,7 +5848,7 @@
           <p:cNvPr id="3" name="テキスト ボックス 2">
             <a:extLst>
               <a:ext uri="{FF2B5EF4-FFF2-40B4-BE49-F238E27FC236}">
-                <a16:creationId xmlns:a16="http://schemas.microsoft.com/office/drawing/2014/main" id="{D29D0DCE-9ED5-DBF8-DF0B-09D241BD3EE3}"/>
+                <a16:creationId xmlns:a16="http://schemas.microsoft.com/office/drawing/2014/main" id="{036A56C0-EECC-FB92-0384-FC9B30FB8490}"/>
               </a:ext>
             </a:extLst>
           </p:cNvPr>
@@ -5888,7 +5888,7 @@
           <p:cNvPr id="4" name="四角形: 角を丸くする 3">
             <a:extLst>
               <a:ext uri="{FF2B5EF4-FFF2-40B4-BE49-F238E27FC236}">
-                <a16:creationId xmlns:a16="http://schemas.microsoft.com/office/drawing/2014/main" id="{43CC04F6-02B7-F0CB-CD16-E0CB4CAC00A1}"/>
+                <a16:creationId xmlns:a16="http://schemas.microsoft.com/office/drawing/2014/main" id="{A5F78F35-FF4C-6A18-867B-A82081344345}"/>
               </a:ext>
             </a:extLst>
           </p:cNvPr>
@@ -5956,7 +5956,7 @@
           <p:cNvPr id="5" name="テキスト ボックス 4">
             <a:extLst>
               <a:ext uri="{FF2B5EF4-FFF2-40B4-BE49-F238E27FC236}">
-                <a16:creationId xmlns:a16="http://schemas.microsoft.com/office/drawing/2014/main" id="{E2757105-9297-CD41-2315-CEB5B913CCAF}"/>
+                <a16:creationId xmlns:a16="http://schemas.microsoft.com/office/drawing/2014/main" id="{DBE71759-4188-57E0-5050-D524A42FF117}"/>
               </a:ext>
             </a:extLst>
           </p:cNvPr>
@@ -5996,7 +5996,7 @@
           <p:cNvPr id="6" name="テキスト ボックス 5">
             <a:extLst>
               <a:ext uri="{FF2B5EF4-FFF2-40B4-BE49-F238E27FC236}">
-                <a16:creationId xmlns:a16="http://schemas.microsoft.com/office/drawing/2014/main" id="{3223BC1A-61D0-81BC-5173-CB64E1855AAD}"/>
+                <a16:creationId xmlns:a16="http://schemas.microsoft.com/office/drawing/2014/main" id="{9C9FD34C-8F4C-045D-71A9-935829AE3BCE}"/>
               </a:ext>
             </a:extLst>
           </p:cNvPr>
@@ -6183,7 +6183,7 @@
           <p:cNvPr id="7" name="四角形: 角を丸くする 6">
             <a:extLst>
               <a:ext uri="{FF2B5EF4-FFF2-40B4-BE49-F238E27FC236}">
-                <a16:creationId xmlns:a16="http://schemas.microsoft.com/office/drawing/2014/main" id="{6E14072B-1DB3-C7C9-5601-B3A3CC7788AD}"/>
+                <a16:creationId xmlns:a16="http://schemas.microsoft.com/office/drawing/2014/main" id="{559A27AF-CC80-DE50-59B3-D42C3135644A}"/>
               </a:ext>
             </a:extLst>
           </p:cNvPr>
@@ -6251,7 +6251,7 @@
           <p:cNvPr id="8" name="テキスト ボックス 7">
             <a:extLst>
               <a:ext uri="{FF2B5EF4-FFF2-40B4-BE49-F238E27FC236}">
-                <a16:creationId xmlns:a16="http://schemas.microsoft.com/office/drawing/2014/main" id="{78D7AEFC-5A94-72DF-D9FA-F03716A6C118}"/>
+                <a16:creationId xmlns:a16="http://schemas.microsoft.com/office/drawing/2014/main" id="{91CD884C-08B2-2723-4301-0605E49A4B88}"/>
               </a:ext>
             </a:extLst>
           </p:cNvPr>
@@ -6291,7 +6291,7 @@
           <p:cNvPr id="9" name="テキスト ボックス 8">
             <a:extLst>
               <a:ext uri="{FF2B5EF4-FFF2-40B4-BE49-F238E27FC236}">
-                <a16:creationId xmlns:a16="http://schemas.microsoft.com/office/drawing/2014/main" id="{73A7139D-3E82-0B0A-8B6C-8B8FBEDDBBD8}"/>
+                <a16:creationId xmlns:a16="http://schemas.microsoft.com/office/drawing/2014/main" id="{58C8F741-9BC9-1966-F874-7E2AE26FC71E}"/>
               </a:ext>
             </a:extLst>
           </p:cNvPr>
@@ -6463,7 +6463,7 @@
           <p:cNvPr id="10" name="四角形: 角を丸くする 9">
             <a:extLst>
               <a:ext uri="{FF2B5EF4-FFF2-40B4-BE49-F238E27FC236}">
-                <a16:creationId xmlns:a16="http://schemas.microsoft.com/office/drawing/2014/main" id="{C1D662DE-5544-4C7E-9D8C-F7A68EEBF63E}"/>
+                <a16:creationId xmlns:a16="http://schemas.microsoft.com/office/drawing/2014/main" id="{AC5E742A-3626-EF0B-E1D5-D4C8EC52FF15}"/>
               </a:ext>
             </a:extLst>
           </p:cNvPr>
@@ -6531,7 +6531,7 @@
           <p:cNvPr id="11" name="テキスト ボックス 10">
             <a:extLst>
               <a:ext uri="{FF2B5EF4-FFF2-40B4-BE49-F238E27FC236}">
-                <a16:creationId xmlns:a16="http://schemas.microsoft.com/office/drawing/2014/main" id="{363396B0-C329-45A0-D94F-F63645D3DE16}"/>
+                <a16:creationId xmlns:a16="http://schemas.microsoft.com/office/drawing/2014/main" id="{3A7CAD68-7D84-8E4C-BBCB-CDEA4AE809D8}"/>
               </a:ext>
             </a:extLst>
           </p:cNvPr>
@@ -6571,7 +6571,7 @@
           <p:cNvPr id="12" name="テキスト ボックス 11">
             <a:extLst>
               <a:ext uri="{FF2B5EF4-FFF2-40B4-BE49-F238E27FC236}">
-                <a16:creationId xmlns:a16="http://schemas.microsoft.com/office/drawing/2014/main" id="{A357915C-4620-C048-461A-B4F1DC0CC59D}"/>
+                <a16:creationId xmlns:a16="http://schemas.microsoft.com/office/drawing/2014/main" id="{D3F8B3BA-3A4D-2BC9-F286-1CBA29D4047B}"/>
               </a:ext>
             </a:extLst>
           </p:cNvPr>
@@ -6698,7 +6698,7 @@
           <p:cNvPr id="13" name="四角形: 角を丸くする 12">
             <a:extLst>
               <a:ext uri="{FF2B5EF4-FFF2-40B4-BE49-F238E27FC236}">
-                <a16:creationId xmlns:a16="http://schemas.microsoft.com/office/drawing/2014/main" id="{A9DF609D-5C03-BA1E-447C-FCE4F91C0B28}"/>
+                <a16:creationId xmlns:a16="http://schemas.microsoft.com/office/drawing/2014/main" id="{E07D02DA-F2B2-E3B9-9992-12079D6F2D25}"/>
               </a:ext>
             </a:extLst>
           </p:cNvPr>
@@ -6766,7 +6766,7 @@
           <p:cNvPr id="14" name="テキスト ボックス 13">
             <a:extLst>
               <a:ext uri="{FF2B5EF4-FFF2-40B4-BE49-F238E27FC236}">
-                <a16:creationId xmlns:a16="http://schemas.microsoft.com/office/drawing/2014/main" id="{83EF8BA3-5F75-647A-BDC0-D93BBE898C16}"/>
+                <a16:creationId xmlns:a16="http://schemas.microsoft.com/office/drawing/2014/main" id="{2C7C7536-0824-AB10-9154-77ACEA1DFDBF}"/>
               </a:ext>
             </a:extLst>
           </p:cNvPr>
@@ -6806,7 +6806,7 @@
           <p:cNvPr id="15" name="テキスト ボックス 14">
             <a:extLst>
               <a:ext uri="{FF2B5EF4-FFF2-40B4-BE49-F238E27FC236}">
-                <a16:creationId xmlns:a16="http://schemas.microsoft.com/office/drawing/2014/main" id="{A747FDFA-8491-9DFF-ACD6-7B827E7A3D2D}"/>
+                <a16:creationId xmlns:a16="http://schemas.microsoft.com/office/drawing/2014/main" id="{55C61505-A7C6-ED8F-B7CD-78E29BB3FE65}"/>
               </a:ext>
             </a:extLst>
           </p:cNvPr>
@@ -6886,7 +6886,7 @@
           <p:cNvPr id="16" name="四角形: 角を丸くする 15">
             <a:extLst>
               <a:ext uri="{FF2B5EF4-FFF2-40B4-BE49-F238E27FC236}">
-                <a16:creationId xmlns:a16="http://schemas.microsoft.com/office/drawing/2014/main" id="{6919CC5D-73E9-9AA3-980B-F6046A979835}"/>
+                <a16:creationId xmlns:a16="http://schemas.microsoft.com/office/drawing/2014/main" id="{FB8E0436-4C38-CE80-633E-9421F010C33D}"/>
               </a:ext>
             </a:extLst>
           </p:cNvPr>
@@ -6954,7 +6954,7 @@
           <p:cNvPr id="17" name="テキスト ボックス 16">
             <a:extLst>
               <a:ext uri="{FF2B5EF4-FFF2-40B4-BE49-F238E27FC236}">
-                <a16:creationId xmlns:a16="http://schemas.microsoft.com/office/drawing/2014/main" id="{AA61CB37-F4A3-56D3-FE17-9A314E6676A6}"/>
+                <a16:creationId xmlns:a16="http://schemas.microsoft.com/office/drawing/2014/main" id="{AD70C502-2490-EB2D-1A37-D538A3099657}"/>
               </a:ext>
             </a:extLst>
           </p:cNvPr>
@@ -7048,7 +7048,7 @@
           <p:cNvPr id="18" name="テキスト ボックス 17">
             <a:extLst>
               <a:ext uri="{FF2B5EF4-FFF2-40B4-BE49-F238E27FC236}">
-                <a16:creationId xmlns:a16="http://schemas.microsoft.com/office/drawing/2014/main" id="{9BD65622-CA58-3328-28C2-734CFFB6ED8F}"/>
+                <a16:creationId xmlns:a16="http://schemas.microsoft.com/office/drawing/2014/main" id="{EEDC5A74-E8C8-6130-EC9A-F31C56BE2062}"/>
               </a:ext>
             </a:extLst>
           </p:cNvPr>
@@ -7157,7 +7157,7 @@
           <p:cNvPr id="19" name="テキスト ボックス 18">
             <a:extLst>
               <a:ext uri="{FF2B5EF4-FFF2-40B4-BE49-F238E27FC236}">
-                <a16:creationId xmlns:a16="http://schemas.microsoft.com/office/drawing/2014/main" id="{DAD26417-4758-D470-9308-F53170E6B1E2}"/>
+                <a16:creationId xmlns:a16="http://schemas.microsoft.com/office/drawing/2014/main" id="{41444F86-073B-9BA5-B6C8-A46C5A5297A9}"/>
               </a:ext>
             </a:extLst>
           </p:cNvPr>
@@ -7197,7 +7197,7 @@
           <p:cNvPr id="20" name="四角形: 角を丸くする 19">
             <a:extLst>
               <a:ext uri="{FF2B5EF4-FFF2-40B4-BE49-F238E27FC236}">
-                <a16:creationId xmlns:a16="http://schemas.microsoft.com/office/drawing/2014/main" id="{306C2BDC-70C7-C811-EE59-0477C89BB2BA}"/>
+                <a16:creationId xmlns:a16="http://schemas.microsoft.com/office/drawing/2014/main" id="{C9FFB1CB-638E-D22A-83BF-E00693C2DF1B}"/>
               </a:ext>
             </a:extLst>
           </p:cNvPr>
@@ -7265,7 +7265,7 @@
           <p:cNvPr id="21" name="テキスト ボックス 20">
             <a:extLst>
               <a:ext uri="{FF2B5EF4-FFF2-40B4-BE49-F238E27FC236}">
-                <a16:creationId xmlns:a16="http://schemas.microsoft.com/office/drawing/2014/main" id="{EB01DFD7-C7DB-46A9-489A-75FA48991099}"/>
+                <a16:creationId xmlns:a16="http://schemas.microsoft.com/office/drawing/2014/main" id="{F58EEF37-1F1E-E822-0979-CE4440E52015}"/>
               </a:ext>
             </a:extLst>
           </p:cNvPr>
@@ -7310,7 +7310,7 @@
     </p:spTree>
     <p:extLst>
       <p:ext uri="{BB962C8B-B14F-4D97-AF65-F5344CB8AC3E}">
-        <p14:creationId xmlns:p14="http://schemas.microsoft.com/office/powerpoint/2010/main" val="1217402742"/>
+        <p14:creationId xmlns:p14="http://schemas.microsoft.com/office/powerpoint/2010/main" val="4027721195"/>
       </p:ext>
     </p:extLst>
   </p:cSld>
@@ -7350,7 +7350,7 @@
           <p:cNvPr id="2" name="テキスト ボックス 1">
             <a:extLst>
               <a:ext uri="{FF2B5EF4-FFF2-40B4-BE49-F238E27FC236}">
-                <a16:creationId xmlns:a16="http://schemas.microsoft.com/office/drawing/2014/main" id="{37EAE6C3-E7A3-C697-5C2C-4EDCE746FC7F}"/>
+                <a16:creationId xmlns:a16="http://schemas.microsoft.com/office/drawing/2014/main" id="{2138B0E0-802B-5DE1-CDD5-332E0A0909C4}"/>
               </a:ext>
             </a:extLst>
           </p:cNvPr>
@@ -7390,7 +7390,7 @@
           <p:cNvPr id="3" name="正方形/長方形 2">
             <a:extLst>
               <a:ext uri="{FF2B5EF4-FFF2-40B4-BE49-F238E27FC236}">
-                <a16:creationId xmlns:a16="http://schemas.microsoft.com/office/drawing/2014/main" id="{08111D74-8205-D8B3-8BCF-035A696A78C4}"/>
+                <a16:creationId xmlns:a16="http://schemas.microsoft.com/office/drawing/2014/main" id="{C46ED4CF-F143-9630-9343-BA22E6B77999}"/>
               </a:ext>
             </a:extLst>
           </p:cNvPr>
@@ -7458,7 +7458,7 @@
           <p:cNvPr id="4" name="テキスト ボックス 3">
             <a:extLst>
               <a:ext uri="{FF2B5EF4-FFF2-40B4-BE49-F238E27FC236}">
-                <a16:creationId xmlns:a16="http://schemas.microsoft.com/office/drawing/2014/main" id="{331E70CC-907D-4B1D-23E5-D5499FD2278A}"/>
+                <a16:creationId xmlns:a16="http://schemas.microsoft.com/office/drawing/2014/main" id="{14CCE7A6-1C74-08EE-C4BE-F9BD12460E6B}"/>
               </a:ext>
             </a:extLst>
           </p:cNvPr>
@@ -7499,7 +7499,7 @@
           <p:cNvPr id="5" name="正方形/長方形 4">
             <a:extLst>
               <a:ext uri="{FF2B5EF4-FFF2-40B4-BE49-F238E27FC236}">
-                <a16:creationId xmlns:a16="http://schemas.microsoft.com/office/drawing/2014/main" id="{BCA65605-F245-02A1-57AE-4867D400EAA1}"/>
+                <a16:creationId xmlns:a16="http://schemas.microsoft.com/office/drawing/2014/main" id="{B9F2719E-E086-E6FE-D0C3-428842198955}"/>
               </a:ext>
             </a:extLst>
           </p:cNvPr>
@@ -7567,7 +7567,7 @@
           <p:cNvPr id="6" name="テキスト ボックス 5">
             <a:extLst>
               <a:ext uri="{FF2B5EF4-FFF2-40B4-BE49-F238E27FC236}">
-                <a16:creationId xmlns:a16="http://schemas.microsoft.com/office/drawing/2014/main" id="{68417E6C-147C-E5C3-33CA-955C9466B9E3}"/>
+                <a16:creationId xmlns:a16="http://schemas.microsoft.com/office/drawing/2014/main" id="{B2310A82-AED1-B8E6-337D-3CB6854B7A93}"/>
               </a:ext>
             </a:extLst>
           </p:cNvPr>
@@ -7598,7 +7598,7 @@
                 </a:solidFill>
                 <a:latin typeface="Meiryo" panose="020B0604030504040204" pitchFamily="50" charset="-128"/>
               </a:rPr>
-              <a:t>北高校</a:t>
+              <a:t>名古屋西</a:t>
             </a:r>
           </a:p>
         </p:txBody>
@@ -7608,7 +7608,7 @@
           <p:cNvPr id="7" name="正方形/長方形 6">
             <a:extLst>
               <a:ext uri="{FF2B5EF4-FFF2-40B4-BE49-F238E27FC236}">
-                <a16:creationId xmlns:a16="http://schemas.microsoft.com/office/drawing/2014/main" id="{1BABAE73-B4F3-7607-154D-B621722FA8B3}"/>
+                <a16:creationId xmlns:a16="http://schemas.microsoft.com/office/drawing/2014/main" id="{E1116438-E499-EE05-EB4B-49898CB87304}"/>
               </a:ext>
             </a:extLst>
           </p:cNvPr>
@@ -7676,7 +7676,7 @@
           <p:cNvPr id="8" name="テキスト ボックス 7">
             <a:extLst>
               <a:ext uri="{FF2B5EF4-FFF2-40B4-BE49-F238E27FC236}">
-                <a16:creationId xmlns:a16="http://schemas.microsoft.com/office/drawing/2014/main" id="{3D00B5F3-0D86-E98F-33FD-57163C571F8A}"/>
+                <a16:creationId xmlns:a16="http://schemas.microsoft.com/office/drawing/2014/main" id="{7338FE6A-467E-BA5B-0094-BE5595CA358D}"/>
               </a:ext>
             </a:extLst>
           </p:cNvPr>
@@ -7717,7 +7717,7 @@
           <p:cNvPr id="9" name="正方形/長方形 8">
             <a:extLst>
               <a:ext uri="{FF2B5EF4-FFF2-40B4-BE49-F238E27FC236}">
-                <a16:creationId xmlns:a16="http://schemas.microsoft.com/office/drawing/2014/main" id="{B820B168-297F-3B1F-F953-3BB828D2B304}"/>
+                <a16:creationId xmlns:a16="http://schemas.microsoft.com/office/drawing/2014/main" id="{D569DDDE-A9DA-87A3-DAF3-8FCB843E98B9}"/>
               </a:ext>
             </a:extLst>
           </p:cNvPr>
@@ -7785,7 +7785,7 @@
           <p:cNvPr id="10" name="テキスト ボックス 9">
             <a:extLst>
               <a:ext uri="{FF2B5EF4-FFF2-40B4-BE49-F238E27FC236}">
-                <a16:creationId xmlns:a16="http://schemas.microsoft.com/office/drawing/2014/main" id="{D8541955-7A0D-7CC8-3B84-D1EE908F2EBB}"/>
+                <a16:creationId xmlns:a16="http://schemas.microsoft.com/office/drawing/2014/main" id="{6C5C8E50-BAC9-639B-0890-EC9BF9E3EEE1}"/>
               </a:ext>
             </a:extLst>
           </p:cNvPr>
@@ -7826,7 +7826,7 @@
           <p:cNvPr id="11" name="正方形/長方形 10">
             <a:extLst>
               <a:ext uri="{FF2B5EF4-FFF2-40B4-BE49-F238E27FC236}">
-                <a16:creationId xmlns:a16="http://schemas.microsoft.com/office/drawing/2014/main" id="{E3A2CCC3-61B4-CE61-F56B-1358351E3725}"/>
+                <a16:creationId xmlns:a16="http://schemas.microsoft.com/office/drawing/2014/main" id="{996A3FF8-5251-B646-9334-CDB5FBEC135A}"/>
               </a:ext>
             </a:extLst>
           </p:cNvPr>
@@ -7894,7 +7894,7 @@
           <p:cNvPr id="12" name="テキスト ボックス 11">
             <a:extLst>
               <a:ext uri="{FF2B5EF4-FFF2-40B4-BE49-F238E27FC236}">
-                <a16:creationId xmlns:a16="http://schemas.microsoft.com/office/drawing/2014/main" id="{1AEE2ED4-A04A-C95A-14FE-D5DE099913F5}"/>
+                <a16:creationId xmlns:a16="http://schemas.microsoft.com/office/drawing/2014/main" id="{945D315D-CE7E-EEBD-285D-E19A9A7CC597}"/>
               </a:ext>
             </a:extLst>
           </p:cNvPr>
@@ -7935,7 +7935,7 @@
           <p:cNvPr id="13" name="正方形/長方形 12">
             <a:extLst>
               <a:ext uri="{FF2B5EF4-FFF2-40B4-BE49-F238E27FC236}">
-                <a16:creationId xmlns:a16="http://schemas.microsoft.com/office/drawing/2014/main" id="{42E667CB-6EAB-2490-9C41-69F19FB9E7D9}"/>
+                <a16:creationId xmlns:a16="http://schemas.microsoft.com/office/drawing/2014/main" id="{E64CC4FB-2D10-B846-27F3-1C5612BD130F}"/>
               </a:ext>
             </a:extLst>
           </p:cNvPr>
@@ -7989,7 +7989,7 @@
           <p:cNvPr id="14" name="テキスト ボックス 13">
             <a:extLst>
               <a:ext uri="{FF2B5EF4-FFF2-40B4-BE49-F238E27FC236}">
-                <a16:creationId xmlns:a16="http://schemas.microsoft.com/office/drawing/2014/main" id="{E8ACB443-8DC6-0546-7594-46DBCBF158F3}"/>
+                <a16:creationId xmlns:a16="http://schemas.microsoft.com/office/drawing/2014/main" id="{1B4B7502-A9AD-4F4C-84D9-1B4ADA1A70B5}"/>
               </a:ext>
             </a:extLst>
           </p:cNvPr>
@@ -8029,7 +8029,7 @@
           <p:cNvPr id="15" name="正方形/長方形 14">
             <a:extLst>
               <a:ext uri="{FF2B5EF4-FFF2-40B4-BE49-F238E27FC236}">
-                <a16:creationId xmlns:a16="http://schemas.microsoft.com/office/drawing/2014/main" id="{2C2EE7CE-270C-299B-09C3-044D969D0A5D}"/>
+                <a16:creationId xmlns:a16="http://schemas.microsoft.com/office/drawing/2014/main" id="{54B5F8BD-D5D6-C211-DD3F-EF24BA222399}"/>
               </a:ext>
             </a:extLst>
           </p:cNvPr>
@@ -8083,7 +8083,7 @@
           <p:cNvPr id="16" name="テキスト ボックス 15">
             <a:extLst>
               <a:ext uri="{FF2B5EF4-FFF2-40B4-BE49-F238E27FC236}">
-                <a16:creationId xmlns:a16="http://schemas.microsoft.com/office/drawing/2014/main" id="{DCFF89EF-6D40-45E0-781A-3C86536BB421}"/>
+                <a16:creationId xmlns:a16="http://schemas.microsoft.com/office/drawing/2014/main" id="{21F28E5A-DCA4-B261-3B42-ED52C6449BB2}"/>
               </a:ext>
             </a:extLst>
           </p:cNvPr>
@@ -8114,7 +8114,7 @@
                 </a:solidFill>
                 <a:latin typeface="Meiryo" panose="020B0604030504040204" pitchFamily="50" charset="-128"/>
               </a:rPr>
-              <a:t>50</a:t>
+              <a:t>60</a:t>
             </a:r>
             <a:endParaRPr kumimoji="1" lang="ja-JP" altLang="en-US" sz="1400" b="1">
               <a:solidFill>
@@ -8130,7 +8130,7 @@
           <p:cNvPr id="17" name="正方形/長方形 16">
             <a:extLst>
               <a:ext uri="{FF2B5EF4-FFF2-40B4-BE49-F238E27FC236}">
-                <a16:creationId xmlns:a16="http://schemas.microsoft.com/office/drawing/2014/main" id="{A5D6BACB-3400-DD4B-D3A0-E0E5C2039696}"/>
+                <a16:creationId xmlns:a16="http://schemas.microsoft.com/office/drawing/2014/main" id="{60406D15-2A1C-97A0-EAFE-08F379A5F3E6}"/>
               </a:ext>
             </a:extLst>
           </p:cNvPr>
@@ -8184,7 +8184,7 @@
           <p:cNvPr id="18" name="テキスト ボックス 17">
             <a:extLst>
               <a:ext uri="{FF2B5EF4-FFF2-40B4-BE49-F238E27FC236}">
-                <a16:creationId xmlns:a16="http://schemas.microsoft.com/office/drawing/2014/main" id="{AB4BB37E-D011-B884-48C4-2D294E071086}"/>
+                <a16:creationId xmlns:a16="http://schemas.microsoft.com/office/drawing/2014/main" id="{CD659C87-0B12-1CCA-B6D7-FB8DD3118512}"/>
               </a:ext>
             </a:extLst>
           </p:cNvPr>
@@ -8231,7 +8231,7 @@
           <p:cNvPr id="19" name="正方形/長方形 18">
             <a:extLst>
               <a:ext uri="{FF2B5EF4-FFF2-40B4-BE49-F238E27FC236}">
-                <a16:creationId xmlns:a16="http://schemas.microsoft.com/office/drawing/2014/main" id="{BE82246A-6DE3-34DB-0943-552AFC32FB4D}"/>
+                <a16:creationId xmlns:a16="http://schemas.microsoft.com/office/drawing/2014/main" id="{DEAF10B4-6C09-F135-70CF-285FF6301D6A}"/>
               </a:ext>
             </a:extLst>
           </p:cNvPr>
@@ -8285,7 +8285,7 @@
           <p:cNvPr id="20" name="テキスト ボックス 19">
             <a:extLst>
               <a:ext uri="{FF2B5EF4-FFF2-40B4-BE49-F238E27FC236}">
-                <a16:creationId xmlns:a16="http://schemas.microsoft.com/office/drawing/2014/main" id="{996A5A03-9FCB-B52D-834E-3E48905C3ECD}"/>
+                <a16:creationId xmlns:a16="http://schemas.microsoft.com/office/drawing/2014/main" id="{2A989F24-8837-CCF8-181E-8866F6046429}"/>
               </a:ext>
             </a:extLst>
           </p:cNvPr>
@@ -8332,7 +8332,7 @@
           <p:cNvPr id="21" name="正方形/長方形 20">
             <a:extLst>
               <a:ext uri="{FF2B5EF4-FFF2-40B4-BE49-F238E27FC236}">
-                <a16:creationId xmlns:a16="http://schemas.microsoft.com/office/drawing/2014/main" id="{3C37DF42-FD7D-4C41-322B-A0E17663530D}"/>
+                <a16:creationId xmlns:a16="http://schemas.microsoft.com/office/drawing/2014/main" id="{9A147987-67F5-B575-1AC3-41A739B9C590}"/>
               </a:ext>
             </a:extLst>
           </p:cNvPr>
@@ -8386,7 +8386,7 @@
           <p:cNvPr id="22" name="テキスト ボックス 21">
             <a:extLst>
               <a:ext uri="{FF2B5EF4-FFF2-40B4-BE49-F238E27FC236}">
-                <a16:creationId xmlns:a16="http://schemas.microsoft.com/office/drawing/2014/main" id="{C4AC7F6A-D906-DAA0-21C8-91921607401F}"/>
+                <a16:creationId xmlns:a16="http://schemas.microsoft.com/office/drawing/2014/main" id="{D4565E69-0540-6BDC-5C60-DB62F6AA35A8}"/>
               </a:ext>
             </a:extLst>
           </p:cNvPr>
@@ -8433,7 +8433,7 @@
           <p:cNvPr id="23" name="正方形/長方形 22">
             <a:extLst>
               <a:ext uri="{FF2B5EF4-FFF2-40B4-BE49-F238E27FC236}">
-                <a16:creationId xmlns:a16="http://schemas.microsoft.com/office/drawing/2014/main" id="{DD6547AD-FE41-124D-55B5-53BB4F707E54}"/>
+                <a16:creationId xmlns:a16="http://schemas.microsoft.com/office/drawing/2014/main" id="{0FC0B81C-AF6E-1BEE-F6BC-B21E1DAC64BD}"/>
               </a:ext>
             </a:extLst>
           </p:cNvPr>
@@ -8487,7 +8487,7 @@
           <p:cNvPr id="24" name="テキスト ボックス 23">
             <a:extLst>
               <a:ext uri="{FF2B5EF4-FFF2-40B4-BE49-F238E27FC236}">
-                <a16:creationId xmlns:a16="http://schemas.microsoft.com/office/drawing/2014/main" id="{D8CE31E8-602D-B4B0-B2E0-2D420FE3FAEA}"/>
+                <a16:creationId xmlns:a16="http://schemas.microsoft.com/office/drawing/2014/main" id="{1A8D7E34-B387-5E10-FF87-01F5939891FA}"/>
               </a:ext>
             </a:extLst>
           </p:cNvPr>
@@ -8527,7 +8527,7 @@
           <p:cNvPr id="25" name="正方形/長方形 24">
             <a:extLst>
               <a:ext uri="{FF2B5EF4-FFF2-40B4-BE49-F238E27FC236}">
-                <a16:creationId xmlns:a16="http://schemas.microsoft.com/office/drawing/2014/main" id="{BFC5BC3F-0DD1-C3E5-94F7-5F6B6E5320D8}"/>
+                <a16:creationId xmlns:a16="http://schemas.microsoft.com/office/drawing/2014/main" id="{D0CD9C06-3DEA-0057-7E3A-23993C970256}"/>
               </a:ext>
             </a:extLst>
           </p:cNvPr>
@@ -8581,7 +8581,7 @@
           <p:cNvPr id="26" name="テキスト ボックス 25">
             <a:extLst>
               <a:ext uri="{FF2B5EF4-FFF2-40B4-BE49-F238E27FC236}">
-                <a16:creationId xmlns:a16="http://schemas.microsoft.com/office/drawing/2014/main" id="{E4FA788C-C19D-8324-3E82-C2B56ECDCFA5}"/>
+                <a16:creationId xmlns:a16="http://schemas.microsoft.com/office/drawing/2014/main" id="{1F392143-47F5-CDFD-D19E-FBB51A223C13}"/>
               </a:ext>
             </a:extLst>
           </p:cNvPr>
@@ -8612,7 +8612,25 @@
                 </a:solidFill>
                 <a:latin typeface="Meiryo" panose="020B0604030504040204" pitchFamily="50" charset="-128"/>
               </a:rPr>
-              <a:t>音楽部 全国級</a:t>
+              <a:t>陸上 国体</a:t>
+            </a:r>
+            <a:r>
+              <a:rPr kumimoji="1" lang="en-US" altLang="ja-JP" sz="1100">
+                <a:solidFill>
+                  <a:srgbClr val="222B45"/>
+                </a:solidFill>
+                <a:latin typeface="Meiryo" panose="020B0604030504040204" pitchFamily="50" charset="-128"/>
+              </a:rPr>
+              <a:t>4</a:t>
+            </a:r>
+            <a:r>
+              <a:rPr kumimoji="1" lang="ja-JP" altLang="en-US" sz="1100">
+                <a:solidFill>
+                  <a:srgbClr val="222B45"/>
+                </a:solidFill>
+                <a:latin typeface="Meiryo" panose="020B0604030504040204" pitchFamily="50" charset="-128"/>
+              </a:rPr>
+              <a:t>位</a:t>
             </a:r>
           </a:p>
         </p:txBody>
@@ -8622,7 +8640,7 @@
           <p:cNvPr id="27" name="正方形/長方形 26">
             <a:extLst>
               <a:ext uri="{FF2B5EF4-FFF2-40B4-BE49-F238E27FC236}">
-                <a16:creationId xmlns:a16="http://schemas.microsoft.com/office/drawing/2014/main" id="{C1288C14-35D4-3D58-9EB9-F79189E9F32C}"/>
+                <a16:creationId xmlns:a16="http://schemas.microsoft.com/office/drawing/2014/main" id="{38A67B51-CD3E-A4A0-BEAB-88AD6390699D}"/>
               </a:ext>
             </a:extLst>
           </p:cNvPr>
@@ -8676,7 +8694,7 @@
           <p:cNvPr id="28" name="テキスト ボックス 27">
             <a:extLst>
               <a:ext uri="{FF2B5EF4-FFF2-40B4-BE49-F238E27FC236}">
-                <a16:creationId xmlns:a16="http://schemas.microsoft.com/office/drawing/2014/main" id="{2B5B7A2B-9C3D-1DA5-2249-82D8C582B71E}"/>
+                <a16:creationId xmlns:a16="http://schemas.microsoft.com/office/drawing/2014/main" id="{627FEA55-D043-667C-EF19-C5D76D686F2F}"/>
               </a:ext>
             </a:extLst>
           </p:cNvPr>
@@ -8717,7 +8735,7 @@
           <p:cNvPr id="29" name="正方形/長方形 28">
             <a:extLst>
               <a:ext uri="{FF2B5EF4-FFF2-40B4-BE49-F238E27FC236}">
-                <a16:creationId xmlns:a16="http://schemas.microsoft.com/office/drawing/2014/main" id="{9B59B451-CC40-542B-FD85-BB2F8ACE371F}"/>
+                <a16:creationId xmlns:a16="http://schemas.microsoft.com/office/drawing/2014/main" id="{589F39AA-201C-2872-92AA-4697EC5907FC}"/>
               </a:ext>
             </a:extLst>
           </p:cNvPr>
@@ -8771,7 +8789,7 @@
           <p:cNvPr id="30" name="テキスト ボックス 29">
             <a:extLst>
               <a:ext uri="{FF2B5EF4-FFF2-40B4-BE49-F238E27FC236}">
-                <a16:creationId xmlns:a16="http://schemas.microsoft.com/office/drawing/2014/main" id="{4DBBBA27-1B7D-927F-BD87-3BE64C36C4C4}"/>
+                <a16:creationId xmlns:a16="http://schemas.microsoft.com/office/drawing/2014/main" id="{DD0D215E-34D6-4FA1-E7C2-B34301D5902D}"/>
               </a:ext>
             </a:extLst>
           </p:cNvPr>
@@ -8812,7 +8830,7 @@
           <p:cNvPr id="31" name="正方形/長方形 30">
             <a:extLst>
               <a:ext uri="{FF2B5EF4-FFF2-40B4-BE49-F238E27FC236}">
-                <a16:creationId xmlns:a16="http://schemas.microsoft.com/office/drawing/2014/main" id="{CB2279AC-D1DB-39F7-A229-C8767E496EBE}"/>
+                <a16:creationId xmlns:a16="http://schemas.microsoft.com/office/drawing/2014/main" id="{70DD3211-7361-86D5-D558-FD709B5FA0C4}"/>
               </a:ext>
             </a:extLst>
           </p:cNvPr>
@@ -8866,7 +8884,7 @@
           <p:cNvPr id="32" name="テキスト ボックス 31">
             <a:extLst>
               <a:ext uri="{FF2B5EF4-FFF2-40B4-BE49-F238E27FC236}">
-                <a16:creationId xmlns:a16="http://schemas.microsoft.com/office/drawing/2014/main" id="{A17AD86C-F456-FF81-A4BF-B574F87F70DA}"/>
+                <a16:creationId xmlns:a16="http://schemas.microsoft.com/office/drawing/2014/main" id="{D858E6BF-129C-DFC2-0ED7-72B35397D7FC}"/>
               </a:ext>
             </a:extLst>
           </p:cNvPr>
@@ -8907,7 +8925,7 @@
           <p:cNvPr id="33" name="正方形/長方形 32">
             <a:extLst>
               <a:ext uri="{FF2B5EF4-FFF2-40B4-BE49-F238E27FC236}">
-                <a16:creationId xmlns:a16="http://schemas.microsoft.com/office/drawing/2014/main" id="{225B5DB2-1C6F-9FD7-5312-DD187333A013}"/>
+                <a16:creationId xmlns:a16="http://schemas.microsoft.com/office/drawing/2014/main" id="{71B80619-1F0A-C7D6-F6C2-039C20969F81}"/>
               </a:ext>
             </a:extLst>
           </p:cNvPr>
@@ -8961,7 +8979,7 @@
           <p:cNvPr id="34" name="テキスト ボックス 33">
             <a:extLst>
               <a:ext uri="{FF2B5EF4-FFF2-40B4-BE49-F238E27FC236}">
-                <a16:creationId xmlns:a16="http://schemas.microsoft.com/office/drawing/2014/main" id="{66B6AFCD-3EFB-D1D0-836F-6E6DF3C4BD4C}"/>
+                <a16:creationId xmlns:a16="http://schemas.microsoft.com/office/drawing/2014/main" id="{4AD357F8-F5B6-8EA3-F6C1-B54AED298F7A}"/>
               </a:ext>
             </a:extLst>
           </p:cNvPr>
@@ -9001,7 +9019,7 @@
           <p:cNvPr id="35" name="正方形/長方形 34">
             <a:extLst>
               <a:ext uri="{FF2B5EF4-FFF2-40B4-BE49-F238E27FC236}">
-                <a16:creationId xmlns:a16="http://schemas.microsoft.com/office/drawing/2014/main" id="{FDE6B669-505E-EF8E-7FA4-706555BAE2C8}"/>
+                <a16:creationId xmlns:a16="http://schemas.microsoft.com/office/drawing/2014/main" id="{759F6A5A-3794-9256-AE3C-21E23DCD5303}"/>
               </a:ext>
             </a:extLst>
           </p:cNvPr>
@@ -9055,7 +9073,7 @@
           <p:cNvPr id="36" name="テキスト ボックス 35">
             <a:extLst>
               <a:ext uri="{FF2B5EF4-FFF2-40B4-BE49-F238E27FC236}">
-                <a16:creationId xmlns:a16="http://schemas.microsoft.com/office/drawing/2014/main" id="{19FB6159-D410-626A-0E0C-5AB2CF47F528}"/>
+                <a16:creationId xmlns:a16="http://schemas.microsoft.com/office/drawing/2014/main" id="{6F865FA3-7CC7-FC93-E879-FF69CA8679A7}"/>
               </a:ext>
             </a:extLst>
           </p:cNvPr>
@@ -9095,7 +9113,7 @@
                 </a:solidFill>
                 <a:latin typeface="Meiryo" panose="020B0604030504040204" pitchFamily="50" charset="-128"/>
               </a:rPr>
-              <a:t>2.9</a:t>
+              <a:t>3.7</a:t>
             </a:r>
             <a:endParaRPr kumimoji="1" lang="ja-JP" altLang="en-US" sz="1100">
               <a:solidFill>
@@ -9111,7 +9129,7 @@
           <p:cNvPr id="37" name="正方形/長方形 36">
             <a:extLst>
               <a:ext uri="{FF2B5EF4-FFF2-40B4-BE49-F238E27FC236}">
-                <a16:creationId xmlns:a16="http://schemas.microsoft.com/office/drawing/2014/main" id="{6621802D-C880-0C14-FC54-E935073BF096}"/>
+                <a16:creationId xmlns:a16="http://schemas.microsoft.com/office/drawing/2014/main" id="{C5E34DE9-EC63-7999-B2DF-C5BB449F4A9A}"/>
               </a:ext>
             </a:extLst>
           </p:cNvPr>
@@ -9165,7 +9183,7 @@
           <p:cNvPr id="38" name="テキスト ボックス 37">
             <a:extLst>
               <a:ext uri="{FF2B5EF4-FFF2-40B4-BE49-F238E27FC236}">
-                <a16:creationId xmlns:a16="http://schemas.microsoft.com/office/drawing/2014/main" id="{16A61954-8EB5-DEF7-94ED-70DE1E1A2F17}"/>
+                <a16:creationId xmlns:a16="http://schemas.microsoft.com/office/drawing/2014/main" id="{73EEDA49-1F91-5237-0A55-FAEE334DA5EA}"/>
               </a:ext>
             </a:extLst>
           </p:cNvPr>
@@ -9221,7 +9239,7 @@
           <p:cNvPr id="39" name="正方形/長方形 38">
             <a:extLst>
               <a:ext uri="{FF2B5EF4-FFF2-40B4-BE49-F238E27FC236}">
-                <a16:creationId xmlns:a16="http://schemas.microsoft.com/office/drawing/2014/main" id="{F160A615-B31E-DB42-192E-C367D032837C}"/>
+                <a16:creationId xmlns:a16="http://schemas.microsoft.com/office/drawing/2014/main" id="{A7F25D8E-317E-B8B4-8E4D-ABB9F3C0D791}"/>
               </a:ext>
             </a:extLst>
           </p:cNvPr>
@@ -9275,7 +9293,7 @@
           <p:cNvPr id="40" name="テキスト ボックス 39">
             <a:extLst>
               <a:ext uri="{FF2B5EF4-FFF2-40B4-BE49-F238E27FC236}">
-                <a16:creationId xmlns:a16="http://schemas.microsoft.com/office/drawing/2014/main" id="{A6D4F71B-6C4F-6B97-ACD7-77E39C7892BD}"/>
+                <a16:creationId xmlns:a16="http://schemas.microsoft.com/office/drawing/2014/main" id="{14334727-6CA9-44C4-56CB-0BF225ECA00E}"/>
               </a:ext>
             </a:extLst>
           </p:cNvPr>
@@ -9322,7 +9340,7 @@
           <p:cNvPr id="41" name="正方形/長方形 40">
             <a:extLst>
               <a:ext uri="{FF2B5EF4-FFF2-40B4-BE49-F238E27FC236}">
-                <a16:creationId xmlns:a16="http://schemas.microsoft.com/office/drawing/2014/main" id="{F4A6A5E9-873A-269C-E4F5-8A690E28FE0D}"/>
+                <a16:creationId xmlns:a16="http://schemas.microsoft.com/office/drawing/2014/main" id="{7DA2C1FE-E09B-7AB2-BB00-081DDE138DEC}"/>
               </a:ext>
             </a:extLst>
           </p:cNvPr>
@@ -9376,7 +9394,7 @@
           <p:cNvPr id="42" name="テキスト ボックス 41">
             <a:extLst>
               <a:ext uri="{FF2B5EF4-FFF2-40B4-BE49-F238E27FC236}">
-                <a16:creationId xmlns:a16="http://schemas.microsoft.com/office/drawing/2014/main" id="{25F60587-2AE3-0F5A-A40F-E9029A7677EB}"/>
+                <a16:creationId xmlns:a16="http://schemas.microsoft.com/office/drawing/2014/main" id="{3146227F-6351-39F2-F54A-1473630231FE}"/>
               </a:ext>
             </a:extLst>
           </p:cNvPr>
@@ -9432,7 +9450,7 @@
           <p:cNvPr id="43" name="正方形/長方形 42">
             <a:extLst>
               <a:ext uri="{FF2B5EF4-FFF2-40B4-BE49-F238E27FC236}">
-                <a16:creationId xmlns:a16="http://schemas.microsoft.com/office/drawing/2014/main" id="{58B71CCC-59E6-B3FA-420F-175EFC207C4A}"/>
+                <a16:creationId xmlns:a16="http://schemas.microsoft.com/office/drawing/2014/main" id="{226DA444-35E9-26AD-F571-DA0BD285FD9C}"/>
               </a:ext>
             </a:extLst>
           </p:cNvPr>
@@ -9486,7 +9504,7 @@
           <p:cNvPr id="44" name="テキスト ボックス 43">
             <a:extLst>
               <a:ext uri="{FF2B5EF4-FFF2-40B4-BE49-F238E27FC236}">
-                <a16:creationId xmlns:a16="http://schemas.microsoft.com/office/drawing/2014/main" id="{24679A47-FDD9-C6CB-1618-5383287EB4D9}"/>
+                <a16:creationId xmlns:a16="http://schemas.microsoft.com/office/drawing/2014/main" id="{CCD02C98-6D47-EE84-724E-DA1676B8EE5E}"/>
               </a:ext>
             </a:extLst>
           </p:cNvPr>
@@ -9526,7 +9544,7 @@
           <p:cNvPr id="45" name="正方形/長方形 44">
             <a:extLst>
               <a:ext uri="{FF2B5EF4-FFF2-40B4-BE49-F238E27FC236}">
-                <a16:creationId xmlns:a16="http://schemas.microsoft.com/office/drawing/2014/main" id="{661C4533-CD2A-A93E-090B-DDCD8C93467C}"/>
+                <a16:creationId xmlns:a16="http://schemas.microsoft.com/office/drawing/2014/main" id="{FB449E83-CC16-4E40-32B7-7AE220FD6177}"/>
               </a:ext>
             </a:extLst>
           </p:cNvPr>
@@ -9580,7 +9598,7 @@
           <p:cNvPr id="46" name="テキスト ボックス 45">
             <a:extLst>
               <a:ext uri="{FF2B5EF4-FFF2-40B4-BE49-F238E27FC236}">
-                <a16:creationId xmlns:a16="http://schemas.microsoft.com/office/drawing/2014/main" id="{6317D395-EC9B-BD04-5F11-832C0945FA29}"/>
+                <a16:creationId xmlns:a16="http://schemas.microsoft.com/office/drawing/2014/main" id="{98929438-2A80-A6D6-E053-3E45A76927CF}"/>
               </a:ext>
             </a:extLst>
           </p:cNvPr>
@@ -9611,7 +9629,7 @@
                 </a:solidFill>
                 <a:latin typeface="Meiryo" panose="020B0604030504040204" pitchFamily="50" charset="-128"/>
               </a:rPr>
-              <a:t>◎北区</a:t>
+              <a:t>〇浄心</a:t>
             </a:r>
           </a:p>
         </p:txBody>
@@ -9621,7 +9639,7 @@
           <p:cNvPr id="47" name="正方形/長方形 46">
             <a:extLst>
               <a:ext uri="{FF2B5EF4-FFF2-40B4-BE49-F238E27FC236}">
-                <a16:creationId xmlns:a16="http://schemas.microsoft.com/office/drawing/2014/main" id="{E59C48B9-3969-2C57-3DDC-CD69C55CB0C7}"/>
+                <a16:creationId xmlns:a16="http://schemas.microsoft.com/office/drawing/2014/main" id="{2B1E307E-D1B6-C9B9-11D0-077FB9345436}"/>
               </a:ext>
             </a:extLst>
           </p:cNvPr>
@@ -9675,7 +9693,7 @@
           <p:cNvPr id="48" name="テキスト ボックス 47">
             <a:extLst>
               <a:ext uri="{FF2B5EF4-FFF2-40B4-BE49-F238E27FC236}">
-                <a16:creationId xmlns:a16="http://schemas.microsoft.com/office/drawing/2014/main" id="{223B8F89-7956-E3CF-1ABD-C3C7F617F3A5}"/>
+                <a16:creationId xmlns:a16="http://schemas.microsoft.com/office/drawing/2014/main" id="{DAF4E283-D6F1-9101-4F6B-D4CEA5B84745}"/>
               </a:ext>
             </a:extLst>
           </p:cNvPr>
@@ -9716,7 +9734,7 @@
           <p:cNvPr id="49" name="正方形/長方形 48">
             <a:extLst>
               <a:ext uri="{FF2B5EF4-FFF2-40B4-BE49-F238E27FC236}">
-                <a16:creationId xmlns:a16="http://schemas.microsoft.com/office/drawing/2014/main" id="{BD8F6612-3E7B-5309-C842-F592EB94055F}"/>
+                <a16:creationId xmlns:a16="http://schemas.microsoft.com/office/drawing/2014/main" id="{F1ACFA3A-487A-D583-D4F7-1DA5E8C7B44B}"/>
               </a:ext>
             </a:extLst>
           </p:cNvPr>
@@ -9770,7 +9788,7 @@
           <p:cNvPr id="50" name="テキスト ボックス 49">
             <a:extLst>
               <a:ext uri="{FF2B5EF4-FFF2-40B4-BE49-F238E27FC236}">
-                <a16:creationId xmlns:a16="http://schemas.microsoft.com/office/drawing/2014/main" id="{B4301CC3-AF70-A678-4116-A66477716F5D}"/>
+                <a16:creationId xmlns:a16="http://schemas.microsoft.com/office/drawing/2014/main" id="{9CF397CA-459B-E201-10BE-01A783D6F5A3}"/>
               </a:ext>
             </a:extLst>
           </p:cNvPr>
@@ -9811,7 +9829,7 @@
           <p:cNvPr id="51" name="正方形/長方形 50">
             <a:extLst>
               <a:ext uri="{FF2B5EF4-FFF2-40B4-BE49-F238E27FC236}">
-                <a16:creationId xmlns:a16="http://schemas.microsoft.com/office/drawing/2014/main" id="{AD4BA5CF-8818-16DD-9964-3D43F9F4B6C1}"/>
+                <a16:creationId xmlns:a16="http://schemas.microsoft.com/office/drawing/2014/main" id="{B52F18CA-0043-EC00-70D6-A02FAE3B40C2}"/>
               </a:ext>
             </a:extLst>
           </p:cNvPr>
@@ -9865,7 +9883,7 @@
           <p:cNvPr id="52" name="テキスト ボックス 51">
             <a:extLst>
               <a:ext uri="{FF2B5EF4-FFF2-40B4-BE49-F238E27FC236}">
-                <a16:creationId xmlns:a16="http://schemas.microsoft.com/office/drawing/2014/main" id="{EF753DC8-AFF4-B6FE-969D-229C64304D60}"/>
+                <a16:creationId xmlns:a16="http://schemas.microsoft.com/office/drawing/2014/main" id="{0B77CD76-9E45-96C6-A41D-56CA9C42EEC5}"/>
               </a:ext>
             </a:extLst>
           </p:cNvPr>
@@ -9906,7 +9924,7 @@
           <p:cNvPr id="53" name="正方形/長方形 52">
             <a:extLst>
               <a:ext uri="{FF2B5EF4-FFF2-40B4-BE49-F238E27FC236}">
-                <a16:creationId xmlns:a16="http://schemas.microsoft.com/office/drawing/2014/main" id="{01C2CF00-3412-8B8F-C89F-CB97CDE53F62}"/>
+                <a16:creationId xmlns:a16="http://schemas.microsoft.com/office/drawing/2014/main" id="{48647291-20DB-EF21-3358-64807A23A540}"/>
               </a:ext>
             </a:extLst>
           </p:cNvPr>
@@ -9960,7 +9978,7 @@
           <p:cNvPr id="54" name="テキスト ボックス 53">
             <a:extLst>
               <a:ext uri="{FF2B5EF4-FFF2-40B4-BE49-F238E27FC236}">
-                <a16:creationId xmlns:a16="http://schemas.microsoft.com/office/drawing/2014/main" id="{824E660A-2FF1-A0B4-07DD-550BCBCDDB29}"/>
+                <a16:creationId xmlns:a16="http://schemas.microsoft.com/office/drawing/2014/main" id="{D7CE028E-28A9-3C10-BE14-B428C897E35D}"/>
               </a:ext>
             </a:extLst>
           </p:cNvPr>
@@ -10000,7 +10018,7 @@
           <p:cNvPr id="55" name="正方形/長方形 54">
             <a:extLst>
               <a:ext uri="{FF2B5EF4-FFF2-40B4-BE49-F238E27FC236}">
-                <a16:creationId xmlns:a16="http://schemas.microsoft.com/office/drawing/2014/main" id="{57C2110D-E346-B557-4211-A1162C89108D}"/>
+                <a16:creationId xmlns:a16="http://schemas.microsoft.com/office/drawing/2014/main" id="{2DD1EFBB-5DD4-D676-1DE9-2172930A1AD3}"/>
               </a:ext>
             </a:extLst>
           </p:cNvPr>
@@ -10054,7 +10072,7 @@
           <p:cNvPr id="56" name="テキスト ボックス 55">
             <a:extLst>
               <a:ext uri="{FF2B5EF4-FFF2-40B4-BE49-F238E27FC236}">
-                <a16:creationId xmlns:a16="http://schemas.microsoft.com/office/drawing/2014/main" id="{0ABCB3A9-A9F9-F216-423E-98A637A6FBFF}"/>
+                <a16:creationId xmlns:a16="http://schemas.microsoft.com/office/drawing/2014/main" id="{7138B2FA-20EB-9A12-8F60-DAFEE77C1371}"/>
               </a:ext>
             </a:extLst>
           </p:cNvPr>
@@ -10085,7 +10103,7 @@
                 </a:solidFill>
                 <a:latin typeface="Meiryo" panose="020B0604030504040204" pitchFamily="50" charset="-128"/>
               </a:rPr>
-              <a:t>国際理解</a:t>
+              <a:t>評判◎・国公立</a:t>
             </a:r>
           </a:p>
         </p:txBody>
@@ -10095,7 +10113,7 @@
           <p:cNvPr id="57" name="正方形/長方形 56">
             <a:extLst>
               <a:ext uri="{FF2B5EF4-FFF2-40B4-BE49-F238E27FC236}">
-                <a16:creationId xmlns:a16="http://schemas.microsoft.com/office/drawing/2014/main" id="{2A43BCFE-DFA0-E85C-5B6C-D59405052D45}"/>
+                <a16:creationId xmlns:a16="http://schemas.microsoft.com/office/drawing/2014/main" id="{232FE04A-696E-D29B-32FE-B350513A4214}"/>
               </a:ext>
             </a:extLst>
           </p:cNvPr>
@@ -10149,7 +10167,7 @@
           <p:cNvPr id="58" name="テキスト ボックス 57">
             <a:extLst>
               <a:ext uri="{FF2B5EF4-FFF2-40B4-BE49-F238E27FC236}">
-                <a16:creationId xmlns:a16="http://schemas.microsoft.com/office/drawing/2014/main" id="{EE877CEF-9FF5-A0BB-8C92-7E94DFFCCD87}"/>
+                <a16:creationId xmlns:a16="http://schemas.microsoft.com/office/drawing/2014/main" id="{11DB422E-9984-CAA2-CE04-71E719C564BA}"/>
               </a:ext>
             </a:extLst>
           </p:cNvPr>
@@ -10190,7 +10208,7 @@
           <p:cNvPr id="59" name="正方形/長方形 58">
             <a:extLst>
               <a:ext uri="{FF2B5EF4-FFF2-40B4-BE49-F238E27FC236}">
-                <a16:creationId xmlns:a16="http://schemas.microsoft.com/office/drawing/2014/main" id="{0ECAA868-670E-C83E-BAA7-7F707CE194E7}"/>
+                <a16:creationId xmlns:a16="http://schemas.microsoft.com/office/drawing/2014/main" id="{72B3A384-94B7-2354-8898-208710C2E7B0}"/>
               </a:ext>
             </a:extLst>
           </p:cNvPr>
@@ -10244,7 +10262,7 @@
           <p:cNvPr id="60" name="テキスト ボックス 59">
             <a:extLst>
               <a:ext uri="{FF2B5EF4-FFF2-40B4-BE49-F238E27FC236}">
-                <a16:creationId xmlns:a16="http://schemas.microsoft.com/office/drawing/2014/main" id="{96D0B238-31CA-C29C-C27A-2EC3A611E04C}"/>
+                <a16:creationId xmlns:a16="http://schemas.microsoft.com/office/drawing/2014/main" id="{705EF89B-98C0-AB3C-DE79-DCA4753CB4A9}"/>
               </a:ext>
             </a:extLst>
           </p:cNvPr>
@@ -10285,7 +10303,7 @@
           <p:cNvPr id="61" name="正方形/長方形 60">
             <a:extLst>
               <a:ext uri="{FF2B5EF4-FFF2-40B4-BE49-F238E27FC236}">
-                <a16:creationId xmlns:a16="http://schemas.microsoft.com/office/drawing/2014/main" id="{805A68DA-2737-B914-F719-7E809A169A9C}"/>
+                <a16:creationId xmlns:a16="http://schemas.microsoft.com/office/drawing/2014/main" id="{0A444786-C74B-756E-7A61-F1200BD6C60A}"/>
               </a:ext>
             </a:extLst>
           </p:cNvPr>
@@ -10339,7 +10357,7 @@
           <p:cNvPr id="62" name="テキスト ボックス 61">
             <a:extLst>
               <a:ext uri="{FF2B5EF4-FFF2-40B4-BE49-F238E27FC236}">
-                <a16:creationId xmlns:a16="http://schemas.microsoft.com/office/drawing/2014/main" id="{26F82650-7167-E6A6-D8C5-F20B62734620}"/>
+                <a16:creationId xmlns:a16="http://schemas.microsoft.com/office/drawing/2014/main" id="{DC3E97D6-562D-99CF-E9A4-5D60183F1324}"/>
               </a:ext>
             </a:extLst>
           </p:cNvPr>
@@ -10378,7 +10396,7 @@
     </p:spTree>
     <p:extLst>
       <p:ext uri="{BB962C8B-B14F-4D97-AF65-F5344CB8AC3E}">
-        <p14:creationId xmlns:p14="http://schemas.microsoft.com/office/powerpoint/2010/main" val="2403881895"/>
+        <p14:creationId xmlns:p14="http://schemas.microsoft.com/office/powerpoint/2010/main" val="2890714225"/>
       </p:ext>
     </p:extLst>
   </p:cSld>
@@ -10418,7 +10436,7 @@
           <p:cNvPr id="2" name="テキスト ボックス 1">
             <a:extLst>
               <a:ext uri="{FF2B5EF4-FFF2-40B4-BE49-F238E27FC236}">
-                <a16:creationId xmlns:a16="http://schemas.microsoft.com/office/drawing/2014/main" id="{7B891A96-9FB5-B76D-A141-A2D09CF07BC1}"/>
+                <a16:creationId xmlns:a16="http://schemas.microsoft.com/office/drawing/2014/main" id="{4820BE23-7903-3971-D65A-0393C7B88C07}"/>
               </a:ext>
             </a:extLst>
           </p:cNvPr>
@@ -10458,7 +10476,7 @@
           <p:cNvPr id="3" name="四角形: 角を丸くする 2">
             <a:extLst>
               <a:ext uri="{FF2B5EF4-FFF2-40B4-BE49-F238E27FC236}">
-                <a16:creationId xmlns:a16="http://schemas.microsoft.com/office/drawing/2014/main" id="{72E225CD-1AE7-3C96-4E72-0E4298832306}"/>
+                <a16:creationId xmlns:a16="http://schemas.microsoft.com/office/drawing/2014/main" id="{4B3CE5E6-84A1-A2D7-7E4D-AFC5CD1485C5}"/>
               </a:ext>
             </a:extLst>
           </p:cNvPr>
@@ -10526,7 +10544,7 @@
           <p:cNvPr id="4" name="楕円 3">
             <a:extLst>
               <a:ext uri="{FF2B5EF4-FFF2-40B4-BE49-F238E27FC236}">
-                <a16:creationId xmlns:a16="http://schemas.microsoft.com/office/drawing/2014/main" id="{8068FC9D-0DCB-5A05-75A9-01C5FFB1901D}"/>
+                <a16:creationId xmlns:a16="http://schemas.microsoft.com/office/drawing/2014/main" id="{CD5A08C8-9916-B041-831B-524B732CF17E}"/>
               </a:ext>
             </a:extLst>
           </p:cNvPr>
@@ -10594,7 +10612,7 @@
           <p:cNvPr id="5" name="テキスト ボックス 4">
             <a:extLst>
               <a:ext uri="{FF2B5EF4-FFF2-40B4-BE49-F238E27FC236}">
-                <a16:creationId xmlns:a16="http://schemas.microsoft.com/office/drawing/2014/main" id="{ED743D37-3500-551E-F1EA-3D26A0AC7CCD}"/>
+                <a16:creationId xmlns:a16="http://schemas.microsoft.com/office/drawing/2014/main" id="{2BEA5205-2E18-2BDC-54AE-6D39E6E5C033}"/>
               </a:ext>
             </a:extLst>
           </p:cNvPr>
@@ -10641,7 +10659,7 @@
           <p:cNvPr id="6" name="テキスト ボックス 5">
             <a:extLst>
               <a:ext uri="{FF2B5EF4-FFF2-40B4-BE49-F238E27FC236}">
-                <a16:creationId xmlns:a16="http://schemas.microsoft.com/office/drawing/2014/main" id="{4F0B27EC-CAD0-033A-7C4B-A02B6C9AA1DE}"/>
+                <a16:creationId xmlns:a16="http://schemas.microsoft.com/office/drawing/2014/main" id="{8D96C6F8-8D53-BF49-FCD5-28C75717EC58}"/>
               </a:ext>
             </a:extLst>
           </p:cNvPr>
@@ -10681,7 +10699,7 @@
           <p:cNvPr id="7" name="テキスト ボックス 6">
             <a:extLst>
               <a:ext uri="{FF2B5EF4-FFF2-40B4-BE49-F238E27FC236}">
-                <a16:creationId xmlns:a16="http://schemas.microsoft.com/office/drawing/2014/main" id="{9A20AD60-1483-AF28-365C-42FAAE2F089C}"/>
+                <a16:creationId xmlns:a16="http://schemas.microsoft.com/office/drawing/2014/main" id="{FD8AD4E9-34AD-BA31-18C1-D3E4A515E4DA}"/>
               </a:ext>
             </a:extLst>
           </p:cNvPr>
@@ -10739,7 +10757,7 @@
           <p:cNvPr id="8" name="四角形: 角を丸くする 7">
             <a:extLst>
               <a:ext uri="{FF2B5EF4-FFF2-40B4-BE49-F238E27FC236}">
-                <a16:creationId xmlns:a16="http://schemas.microsoft.com/office/drawing/2014/main" id="{41996828-5D33-5AAB-6BD3-3302F6132AE2}"/>
+                <a16:creationId xmlns:a16="http://schemas.microsoft.com/office/drawing/2014/main" id="{F2F161AE-BF92-C091-1657-CC10854F2619}"/>
               </a:ext>
             </a:extLst>
           </p:cNvPr>
@@ -10807,7 +10825,7 @@
           <p:cNvPr id="9" name="楕円 8">
             <a:extLst>
               <a:ext uri="{FF2B5EF4-FFF2-40B4-BE49-F238E27FC236}">
-                <a16:creationId xmlns:a16="http://schemas.microsoft.com/office/drawing/2014/main" id="{25D5F6C3-A29C-C7B9-5205-F815569E8117}"/>
+                <a16:creationId xmlns:a16="http://schemas.microsoft.com/office/drawing/2014/main" id="{71BE726A-D81D-FFB0-80F6-0E9B4D7C21D5}"/>
               </a:ext>
             </a:extLst>
           </p:cNvPr>
@@ -10875,7 +10893,7 @@
           <p:cNvPr id="10" name="テキスト ボックス 9">
             <a:extLst>
               <a:ext uri="{FF2B5EF4-FFF2-40B4-BE49-F238E27FC236}">
-                <a16:creationId xmlns:a16="http://schemas.microsoft.com/office/drawing/2014/main" id="{ECA4549B-F99F-42EE-BC34-429726D6353E}"/>
+                <a16:creationId xmlns:a16="http://schemas.microsoft.com/office/drawing/2014/main" id="{1ABDE89B-9D27-CB6C-7778-469DE2B28062}"/>
               </a:ext>
             </a:extLst>
           </p:cNvPr>
@@ -10922,7 +10940,7 @@
           <p:cNvPr id="11" name="テキスト ボックス 10">
             <a:extLst>
               <a:ext uri="{FF2B5EF4-FFF2-40B4-BE49-F238E27FC236}">
-                <a16:creationId xmlns:a16="http://schemas.microsoft.com/office/drawing/2014/main" id="{0E4D92BF-36CD-F904-D325-1FAE00CC0210}"/>
+                <a16:creationId xmlns:a16="http://schemas.microsoft.com/office/drawing/2014/main" id="{99691784-65A8-5C92-C761-09A7136FFE7F}"/>
               </a:ext>
             </a:extLst>
           </p:cNvPr>
@@ -10962,7 +10980,7 @@
           <p:cNvPr id="12" name="テキスト ボックス 11">
             <a:extLst>
               <a:ext uri="{FF2B5EF4-FFF2-40B4-BE49-F238E27FC236}">
-                <a16:creationId xmlns:a16="http://schemas.microsoft.com/office/drawing/2014/main" id="{6ABB395A-87C5-C1D5-616C-C515DAB377EF}"/>
+                <a16:creationId xmlns:a16="http://schemas.microsoft.com/office/drawing/2014/main" id="{819E908F-EC1D-B372-6F3B-7B34A820A8E0}"/>
               </a:ext>
             </a:extLst>
           </p:cNvPr>
@@ -11002,7 +11020,7 @@
           <p:cNvPr id="13" name="四角形: 角を丸くする 12">
             <a:extLst>
               <a:ext uri="{FF2B5EF4-FFF2-40B4-BE49-F238E27FC236}">
-                <a16:creationId xmlns:a16="http://schemas.microsoft.com/office/drawing/2014/main" id="{9E8D8237-A569-7DB0-9EA6-DBE34D9C42B6}"/>
+                <a16:creationId xmlns:a16="http://schemas.microsoft.com/office/drawing/2014/main" id="{208C3E03-9D39-F359-95EA-2A8E2483D155}"/>
               </a:ext>
             </a:extLst>
           </p:cNvPr>
@@ -11070,7 +11088,7 @@
           <p:cNvPr id="14" name="楕円 13">
             <a:extLst>
               <a:ext uri="{FF2B5EF4-FFF2-40B4-BE49-F238E27FC236}">
-                <a16:creationId xmlns:a16="http://schemas.microsoft.com/office/drawing/2014/main" id="{F4BBDEBA-DDA0-158E-E36C-8D962508AEC6}"/>
+                <a16:creationId xmlns:a16="http://schemas.microsoft.com/office/drawing/2014/main" id="{5899286C-3388-00C4-688C-1F9324B3E4E4}"/>
               </a:ext>
             </a:extLst>
           </p:cNvPr>
@@ -11138,7 +11156,7 @@
           <p:cNvPr id="15" name="テキスト ボックス 14">
             <a:extLst>
               <a:ext uri="{FF2B5EF4-FFF2-40B4-BE49-F238E27FC236}">
-                <a16:creationId xmlns:a16="http://schemas.microsoft.com/office/drawing/2014/main" id="{83F792A7-87D6-A09E-8CC7-F84701272A8C}"/>
+                <a16:creationId xmlns:a16="http://schemas.microsoft.com/office/drawing/2014/main" id="{7188C51A-FD3C-18B0-67B0-762DD171E8F5}"/>
               </a:ext>
             </a:extLst>
           </p:cNvPr>
@@ -11185,7 +11203,7 @@
           <p:cNvPr id="16" name="テキスト ボックス 15">
             <a:extLst>
               <a:ext uri="{FF2B5EF4-FFF2-40B4-BE49-F238E27FC236}">
-                <a16:creationId xmlns:a16="http://schemas.microsoft.com/office/drawing/2014/main" id="{EA6F46F4-0263-5F92-FACD-AADF2DF49675}"/>
+                <a16:creationId xmlns:a16="http://schemas.microsoft.com/office/drawing/2014/main" id="{1C708A5A-D6B9-6808-9199-DDD71F076BF0}"/>
               </a:ext>
             </a:extLst>
           </p:cNvPr>
@@ -11225,7 +11243,7 @@
           <p:cNvPr id="17" name="テキスト ボックス 16">
             <a:extLst>
               <a:ext uri="{FF2B5EF4-FFF2-40B4-BE49-F238E27FC236}">
-                <a16:creationId xmlns:a16="http://schemas.microsoft.com/office/drawing/2014/main" id="{1D925066-97B4-5C45-D97A-86CB755B5159}"/>
+                <a16:creationId xmlns:a16="http://schemas.microsoft.com/office/drawing/2014/main" id="{B389223C-D5EC-42E8-1E7C-6A52AE000745}"/>
               </a:ext>
             </a:extLst>
           </p:cNvPr>
@@ -11337,7 +11355,7 @@
           <p:cNvPr id="18" name="四角形: 角を丸くする 17">
             <a:extLst>
               <a:ext uri="{FF2B5EF4-FFF2-40B4-BE49-F238E27FC236}">
-                <a16:creationId xmlns:a16="http://schemas.microsoft.com/office/drawing/2014/main" id="{C48390FF-75DF-8DD2-02BE-7F61B6E77188}"/>
+                <a16:creationId xmlns:a16="http://schemas.microsoft.com/office/drawing/2014/main" id="{548C1B14-1E04-A1A8-CE3B-2807A3F24A3A}"/>
               </a:ext>
             </a:extLst>
           </p:cNvPr>
@@ -11405,7 +11423,7 @@
           <p:cNvPr id="19" name="楕円 18">
             <a:extLst>
               <a:ext uri="{FF2B5EF4-FFF2-40B4-BE49-F238E27FC236}">
-                <a16:creationId xmlns:a16="http://schemas.microsoft.com/office/drawing/2014/main" id="{CF64793E-BDB1-B21B-4A31-05857EDE832C}"/>
+                <a16:creationId xmlns:a16="http://schemas.microsoft.com/office/drawing/2014/main" id="{CFD261A6-F53F-8D3A-79AC-C38695A37C44}"/>
               </a:ext>
             </a:extLst>
           </p:cNvPr>
@@ -11473,7 +11491,7 @@
           <p:cNvPr id="20" name="テキスト ボックス 19">
             <a:extLst>
               <a:ext uri="{FF2B5EF4-FFF2-40B4-BE49-F238E27FC236}">
-                <a16:creationId xmlns:a16="http://schemas.microsoft.com/office/drawing/2014/main" id="{BA342C2D-C599-B384-687E-D5CCDD0F14FC}"/>
+                <a16:creationId xmlns:a16="http://schemas.microsoft.com/office/drawing/2014/main" id="{118843F5-8210-D71E-A636-9760C5779C89}"/>
               </a:ext>
             </a:extLst>
           </p:cNvPr>
@@ -11520,7 +11538,7 @@
           <p:cNvPr id="21" name="テキスト ボックス 20">
             <a:extLst>
               <a:ext uri="{FF2B5EF4-FFF2-40B4-BE49-F238E27FC236}">
-                <a16:creationId xmlns:a16="http://schemas.microsoft.com/office/drawing/2014/main" id="{743107E4-21E4-8763-CB65-972436C6C42E}"/>
+                <a16:creationId xmlns:a16="http://schemas.microsoft.com/office/drawing/2014/main" id="{D7AE3526-CA94-802B-7F4E-3D9AAFD0E821}"/>
               </a:ext>
             </a:extLst>
           </p:cNvPr>
@@ -11560,7 +11578,7 @@
           <p:cNvPr id="22" name="テキスト ボックス 21">
             <a:extLst>
               <a:ext uri="{FF2B5EF4-FFF2-40B4-BE49-F238E27FC236}">
-                <a16:creationId xmlns:a16="http://schemas.microsoft.com/office/drawing/2014/main" id="{048C4AE9-BDF4-AE55-89E4-285FA5ED8217}"/>
+                <a16:creationId xmlns:a16="http://schemas.microsoft.com/office/drawing/2014/main" id="{F0BEA21F-3102-E44D-97EF-8D60DBA75454}"/>
               </a:ext>
             </a:extLst>
           </p:cNvPr>
@@ -11600,7 +11618,7 @@
           <p:cNvPr id="23" name="テキスト ボックス 22">
             <a:extLst>
               <a:ext uri="{FF2B5EF4-FFF2-40B4-BE49-F238E27FC236}">
-                <a16:creationId xmlns:a16="http://schemas.microsoft.com/office/drawing/2014/main" id="{65C39BD8-6FBD-8935-D5EF-211A942D8CF8}"/>
+                <a16:creationId xmlns:a16="http://schemas.microsoft.com/office/drawing/2014/main" id="{705A6621-B3D5-EFF0-E8DD-C6F2C81C91E7}"/>
               </a:ext>
             </a:extLst>
           </p:cNvPr>
@@ -11630,7 +11648,7 @@
                 </a:solidFill>
                 <a:latin typeface="Meiryo" panose="020B0604030504040204" pitchFamily="50" charset="-128"/>
               </a:rPr>
-              <a:t>五郎より：まずは地元</a:t>
+              <a:t>五郎より：評判の高い</a:t>
             </a:r>
             <a:r>
               <a:rPr kumimoji="1" lang="en-US" altLang="ja-JP" sz="1400">
@@ -11648,7 +11666,7 @@
                 </a:solidFill>
                 <a:latin typeface="Meiryo" panose="020B0604030504040204" pitchFamily="50" charset="-128"/>
               </a:rPr>
-              <a:t>北高校</a:t>
+              <a:t>名古屋西</a:t>
             </a:r>
             <a:r>
               <a:rPr kumimoji="1" lang="en-US" altLang="ja-JP" sz="1400">
@@ -11657,7 +11675,7 @@
                 </a:solidFill>
                 <a:latin typeface="Meiryo" panose="020B0604030504040204" pitchFamily="50" charset="-128"/>
               </a:rPr>
-              <a:t>』(8/4</a:t>
+              <a:t>』『</a:t>
             </a:r>
             <a:r>
               <a:rPr kumimoji="1" lang="ja-JP" altLang="en-US" sz="1400">
@@ -11666,7 +11684,7 @@
                 </a:solidFill>
                 <a:latin typeface="Meiryo" panose="020B0604030504040204" pitchFamily="50" charset="-128"/>
               </a:rPr>
-              <a:t>説明会・</a:t>
+              <a:t>春日井南</a:t>
             </a:r>
             <a:r>
               <a:rPr kumimoji="1" lang="en-US" altLang="ja-JP" sz="1400">
@@ -11675,7 +11693,7 @@
                 </a:solidFill>
                 <a:latin typeface="Meiryo" panose="020B0604030504040204" pitchFamily="50" charset="-128"/>
               </a:rPr>
-              <a:t>10/10</a:t>
+              <a:t>』</a:t>
             </a:r>
             <a:r>
               <a:rPr kumimoji="1" lang="ja-JP" altLang="en-US" sz="1400">
@@ -11684,7 +11702,7 @@
                 </a:solidFill>
                 <a:latin typeface="Meiryo" panose="020B0604030504040204" pitchFamily="50" charset="-128"/>
               </a:rPr>
-              <a:t>見学会</a:t>
+              <a:t>の見学会から。名西は偏差値</a:t>
             </a:r>
             <a:r>
               <a:rPr kumimoji="1" lang="en-US" altLang="ja-JP" sz="1400">
@@ -11693,7 +11711,7 @@
                 </a:solidFill>
                 <a:latin typeface="Meiryo" panose="020B0604030504040204" pitchFamily="50" charset="-128"/>
               </a:rPr>
-              <a:t>)</a:t>
+              <a:t>60</a:t>
             </a:r>
             <a:r>
               <a:rPr kumimoji="1" lang="ja-JP" altLang="en-US" sz="1400">
@@ -11702,7 +11720,7 @@
                 </a:solidFill>
                 <a:latin typeface="Meiryo" panose="020B0604030504040204" pitchFamily="50" charset="-128"/>
               </a:rPr>
-              <a:t>から。気になる順に一緒に動きましょう。応援しています。</a:t>
+              <a:t>と高めなので早めの対策を。応援しています。</a:t>
             </a:r>
           </a:p>
         </p:txBody>
@@ -11710,7 +11728,7 @@
     </p:spTree>
     <p:extLst>
       <p:ext uri="{BB962C8B-B14F-4D97-AF65-F5344CB8AC3E}">
-        <p14:creationId xmlns:p14="http://schemas.microsoft.com/office/powerpoint/2010/main" val="1676760163"/>
+        <p14:creationId xmlns:p14="http://schemas.microsoft.com/office/powerpoint/2010/main" val="991321439"/>
       </p:ext>
     </p:extLst>
   </p:cSld>
@@ -11750,7 +11768,7 @@
           <p:cNvPr id="2" name="テキスト ボックス 1">
             <a:extLst>
               <a:ext uri="{FF2B5EF4-FFF2-40B4-BE49-F238E27FC236}">
-                <a16:creationId xmlns:a16="http://schemas.microsoft.com/office/drawing/2014/main" id="{FD682A8F-05A6-47C0-A85D-51E27091E831}"/>
+                <a16:creationId xmlns:a16="http://schemas.microsoft.com/office/drawing/2014/main" id="{17122F38-FD7A-F139-3F33-0181DC35E5CE}"/>
               </a:ext>
             </a:extLst>
           </p:cNvPr>
@@ -11808,7 +11826,7 @@
           <p:cNvPr id="3" name="四角形: 角を丸くする 2">
             <a:extLst>
               <a:ext uri="{FF2B5EF4-FFF2-40B4-BE49-F238E27FC236}">
-                <a16:creationId xmlns:a16="http://schemas.microsoft.com/office/drawing/2014/main" id="{7D516226-17B4-367F-FC35-5EB2AE04E870}"/>
+                <a16:creationId xmlns:a16="http://schemas.microsoft.com/office/drawing/2014/main" id="{A44F17A6-05AA-1206-0CB8-B00A9082BD60}"/>
               </a:ext>
             </a:extLst>
           </p:cNvPr>
@@ -11862,7 +11880,7 @@
           <p:cNvPr id="4" name="楕円 3">
             <a:extLst>
               <a:ext uri="{FF2B5EF4-FFF2-40B4-BE49-F238E27FC236}">
-                <a16:creationId xmlns:a16="http://schemas.microsoft.com/office/drawing/2014/main" id="{20A9D86B-B042-6D50-69B3-9381F5E2383E}"/>
+                <a16:creationId xmlns:a16="http://schemas.microsoft.com/office/drawing/2014/main" id="{0C7E07B0-7E0B-F5ED-B19B-54B2B832B923}"/>
               </a:ext>
             </a:extLst>
           </p:cNvPr>
@@ -11930,7 +11948,7 @@
           <p:cNvPr id="5" name="テキスト ボックス 4">
             <a:extLst>
               <a:ext uri="{FF2B5EF4-FFF2-40B4-BE49-F238E27FC236}">
-                <a16:creationId xmlns:a16="http://schemas.microsoft.com/office/drawing/2014/main" id="{A18F9A60-D17B-5D2A-4800-C41C630CDDE8}"/>
+                <a16:creationId xmlns:a16="http://schemas.microsoft.com/office/drawing/2014/main" id="{6A0BD453-01AB-E748-92C5-03ECBA6DA553}"/>
               </a:ext>
             </a:extLst>
           </p:cNvPr>
@@ -11977,7 +11995,7 @@
           <p:cNvPr id="6" name="テキスト ボックス 5">
             <a:extLst>
               <a:ext uri="{FF2B5EF4-FFF2-40B4-BE49-F238E27FC236}">
-                <a16:creationId xmlns:a16="http://schemas.microsoft.com/office/drawing/2014/main" id="{AF3AF57B-F3F6-4070-72E4-F23720692FD1}"/>
+                <a16:creationId xmlns:a16="http://schemas.microsoft.com/office/drawing/2014/main" id="{903D2A01-CF37-66B8-6D9E-CA90F4BA2BAA}"/>
               </a:ext>
             </a:extLst>
           </p:cNvPr>
@@ -12017,7 +12035,7 @@
           <p:cNvPr id="7" name="テキスト ボックス 6">
             <a:extLst>
               <a:ext uri="{FF2B5EF4-FFF2-40B4-BE49-F238E27FC236}">
-                <a16:creationId xmlns:a16="http://schemas.microsoft.com/office/drawing/2014/main" id="{79CD2E5E-5CC9-C01F-BA88-0EE6BAB05BC6}"/>
+                <a16:creationId xmlns:a16="http://schemas.microsoft.com/office/drawing/2014/main" id="{868F472A-76DB-1F2E-841A-F46C0A46E7FE}"/>
               </a:ext>
             </a:extLst>
           </p:cNvPr>
@@ -12057,7 +12075,7 @@
           <p:cNvPr id="8" name="四角形: 角を丸くする 7">
             <a:extLst>
               <a:ext uri="{FF2B5EF4-FFF2-40B4-BE49-F238E27FC236}">
-                <a16:creationId xmlns:a16="http://schemas.microsoft.com/office/drawing/2014/main" id="{75E066F4-9A34-6FC2-DF08-DD2679813F94}"/>
+                <a16:creationId xmlns:a16="http://schemas.microsoft.com/office/drawing/2014/main" id="{FB3A016D-E1B6-F6A0-FBFF-D34A199EF443}"/>
               </a:ext>
             </a:extLst>
           </p:cNvPr>
@@ -12111,7 +12129,7 @@
           <p:cNvPr id="9" name="楕円 8">
             <a:extLst>
               <a:ext uri="{FF2B5EF4-FFF2-40B4-BE49-F238E27FC236}">
-                <a16:creationId xmlns:a16="http://schemas.microsoft.com/office/drawing/2014/main" id="{53B9684F-617C-D58A-76A7-0D7BCA772B42}"/>
+                <a16:creationId xmlns:a16="http://schemas.microsoft.com/office/drawing/2014/main" id="{C5678059-B75A-8C0C-0828-CC6FA87AD93F}"/>
               </a:ext>
             </a:extLst>
           </p:cNvPr>
@@ -12179,7 +12197,7 @@
           <p:cNvPr id="10" name="テキスト ボックス 9">
             <a:extLst>
               <a:ext uri="{FF2B5EF4-FFF2-40B4-BE49-F238E27FC236}">
-                <a16:creationId xmlns:a16="http://schemas.microsoft.com/office/drawing/2014/main" id="{BE7FFB30-C748-5F54-9115-A3E39ED3BA57}"/>
+                <a16:creationId xmlns:a16="http://schemas.microsoft.com/office/drawing/2014/main" id="{4717D403-710D-A331-BD2F-D6F59A57D32E}"/>
               </a:ext>
             </a:extLst>
           </p:cNvPr>
@@ -12226,7 +12244,7 @@
           <p:cNvPr id="11" name="テキスト ボックス 10">
             <a:extLst>
               <a:ext uri="{FF2B5EF4-FFF2-40B4-BE49-F238E27FC236}">
-                <a16:creationId xmlns:a16="http://schemas.microsoft.com/office/drawing/2014/main" id="{55942947-59CD-B8CF-D12D-4DCD461A74F9}"/>
+                <a16:creationId xmlns:a16="http://schemas.microsoft.com/office/drawing/2014/main" id="{D0B6ED21-B48F-FF81-CDB3-A899E907A41D}"/>
               </a:ext>
             </a:extLst>
           </p:cNvPr>
@@ -12266,7 +12284,7 @@
           <p:cNvPr id="12" name="テキスト ボックス 11">
             <a:extLst>
               <a:ext uri="{FF2B5EF4-FFF2-40B4-BE49-F238E27FC236}">
-                <a16:creationId xmlns:a16="http://schemas.microsoft.com/office/drawing/2014/main" id="{B06B8EDC-E079-9F7B-AC92-425C560D8681}"/>
+                <a16:creationId xmlns:a16="http://schemas.microsoft.com/office/drawing/2014/main" id="{2EB0F491-F9A2-8EF5-0D58-F7BA04C167CC}"/>
               </a:ext>
             </a:extLst>
           </p:cNvPr>
@@ -12306,7 +12324,7 @@
           <p:cNvPr id="13" name="四角形: 角を丸くする 12">
             <a:extLst>
               <a:ext uri="{FF2B5EF4-FFF2-40B4-BE49-F238E27FC236}">
-                <a16:creationId xmlns:a16="http://schemas.microsoft.com/office/drawing/2014/main" id="{957AF21A-EC2F-F3B0-4FE1-0B2E6C5B7C77}"/>
+                <a16:creationId xmlns:a16="http://schemas.microsoft.com/office/drawing/2014/main" id="{3B720F09-2869-910D-AB48-BDA3B3F144AA}"/>
               </a:ext>
             </a:extLst>
           </p:cNvPr>
@@ -12360,7 +12378,7 @@
           <p:cNvPr id="14" name="楕円 13">
             <a:extLst>
               <a:ext uri="{FF2B5EF4-FFF2-40B4-BE49-F238E27FC236}">
-                <a16:creationId xmlns:a16="http://schemas.microsoft.com/office/drawing/2014/main" id="{3BB52447-0B7E-FE9A-F304-7C51316E35EE}"/>
+                <a16:creationId xmlns:a16="http://schemas.microsoft.com/office/drawing/2014/main" id="{F3948B16-32EA-8378-CCE3-7D2DD1731017}"/>
               </a:ext>
             </a:extLst>
           </p:cNvPr>
@@ -12428,7 +12446,7 @@
           <p:cNvPr id="15" name="テキスト ボックス 14">
             <a:extLst>
               <a:ext uri="{FF2B5EF4-FFF2-40B4-BE49-F238E27FC236}">
-                <a16:creationId xmlns:a16="http://schemas.microsoft.com/office/drawing/2014/main" id="{05032D62-DFCC-8B30-BAAA-8B22FC9F9679}"/>
+                <a16:creationId xmlns:a16="http://schemas.microsoft.com/office/drawing/2014/main" id="{F9E4ABB2-0448-FD5F-5C3A-A3B0989D77E5}"/>
               </a:ext>
             </a:extLst>
           </p:cNvPr>
@@ -12475,7 +12493,7 @@
           <p:cNvPr id="16" name="テキスト ボックス 15">
             <a:extLst>
               <a:ext uri="{FF2B5EF4-FFF2-40B4-BE49-F238E27FC236}">
-                <a16:creationId xmlns:a16="http://schemas.microsoft.com/office/drawing/2014/main" id="{28A72EF5-942F-092A-5D96-3E027C8B0F9B}"/>
+                <a16:creationId xmlns:a16="http://schemas.microsoft.com/office/drawing/2014/main" id="{5B92861A-E0C7-313C-DDE5-6417EF72F98D}"/>
               </a:ext>
             </a:extLst>
           </p:cNvPr>
@@ -12525,6 +12543,21 @@
               </a:rPr>
               <a:t>前後</a:t>
             </a:r>
+            <a:r>
+              <a:rPr kumimoji="1" lang="en-US" altLang="ja-JP" sz="1700" b="1">
+                <a:solidFill>
+                  <a:srgbClr val="1E2761"/>
+                </a:solidFill>
+                <a:latin typeface="Meiryo" panose="020B0604030504040204" pitchFamily="50" charset="-128"/>
+              </a:rPr>
+              <a:t>〜</a:t>
+            </a:r>
+            <a:endParaRPr kumimoji="1" lang="ja-JP" altLang="en-US" sz="1700" b="1">
+              <a:solidFill>
+                <a:srgbClr val="1E2761"/>
+              </a:solidFill>
+              <a:latin typeface="Meiryo" panose="020B0604030504040204" pitchFamily="50" charset="-128"/>
+            </a:endParaRPr>
           </a:p>
         </p:txBody>
       </p:sp>
@@ -12533,7 +12566,7 @@
           <p:cNvPr id="17" name="テキスト ボックス 16">
             <a:extLst>
               <a:ext uri="{FF2B5EF4-FFF2-40B4-BE49-F238E27FC236}">
-                <a16:creationId xmlns:a16="http://schemas.microsoft.com/office/drawing/2014/main" id="{55E4BD4E-6A93-7B30-4E38-FFCBA2CC4E45}"/>
+                <a16:creationId xmlns:a16="http://schemas.microsoft.com/office/drawing/2014/main" id="{2BF73359-567B-403C-E5BC-26FC76E34AC8}"/>
               </a:ext>
             </a:extLst>
           </p:cNvPr>
@@ -12573,7 +12606,7 @@
           <p:cNvPr id="18" name="四角形: 角を丸くする 17">
             <a:extLst>
               <a:ext uri="{FF2B5EF4-FFF2-40B4-BE49-F238E27FC236}">
-                <a16:creationId xmlns:a16="http://schemas.microsoft.com/office/drawing/2014/main" id="{24C6D5BC-1F5B-2A51-775D-01B8D6EBC740}"/>
+                <a16:creationId xmlns:a16="http://schemas.microsoft.com/office/drawing/2014/main" id="{0E97BB39-8DAF-3D77-315D-1DB736B1D426}"/>
               </a:ext>
             </a:extLst>
           </p:cNvPr>
@@ -12627,7 +12660,7 @@
           <p:cNvPr id="19" name="楕円 18">
             <a:extLst>
               <a:ext uri="{FF2B5EF4-FFF2-40B4-BE49-F238E27FC236}">
-                <a16:creationId xmlns:a16="http://schemas.microsoft.com/office/drawing/2014/main" id="{86B79981-050D-871A-0852-476D8DC46E0F}"/>
+                <a16:creationId xmlns:a16="http://schemas.microsoft.com/office/drawing/2014/main" id="{F68B2FAB-B7A6-5319-13E6-730DA6DFC6AC}"/>
               </a:ext>
             </a:extLst>
           </p:cNvPr>
@@ -12695,7 +12728,7 @@
           <p:cNvPr id="20" name="テキスト ボックス 19">
             <a:extLst>
               <a:ext uri="{FF2B5EF4-FFF2-40B4-BE49-F238E27FC236}">
-                <a16:creationId xmlns:a16="http://schemas.microsoft.com/office/drawing/2014/main" id="{89E00EDA-5021-5528-E9AD-6F86DFFC4AE7}"/>
+                <a16:creationId xmlns:a16="http://schemas.microsoft.com/office/drawing/2014/main" id="{2DEA55D3-9348-5E25-4EE3-7856A6849D9C}"/>
               </a:ext>
             </a:extLst>
           </p:cNvPr>
@@ -12742,7 +12775,7 @@
           <p:cNvPr id="21" name="テキスト ボックス 20">
             <a:extLst>
               <a:ext uri="{FF2B5EF4-FFF2-40B4-BE49-F238E27FC236}">
-                <a16:creationId xmlns:a16="http://schemas.microsoft.com/office/drawing/2014/main" id="{B6E7189F-1E91-1DC3-912E-B65FBD5EAE9E}"/>
+                <a16:creationId xmlns:a16="http://schemas.microsoft.com/office/drawing/2014/main" id="{F7C07846-6282-75E9-280F-9F89413F12F1}"/>
               </a:ext>
             </a:extLst>
           </p:cNvPr>
@@ -12782,7 +12815,7 @@
           <p:cNvPr id="22" name="テキスト ボックス 21">
             <a:extLst>
               <a:ext uri="{FF2B5EF4-FFF2-40B4-BE49-F238E27FC236}">
-                <a16:creationId xmlns:a16="http://schemas.microsoft.com/office/drawing/2014/main" id="{C0F22251-5ECF-5FA7-F0AC-3B16C3CE53CC}"/>
+                <a16:creationId xmlns:a16="http://schemas.microsoft.com/office/drawing/2014/main" id="{CF9325D5-6F9B-D1A3-EA03-AAF9778D5720}"/>
               </a:ext>
             </a:extLst>
           </p:cNvPr>
@@ -12822,7 +12855,7 @@
           <p:cNvPr id="23" name="四角形: 角を丸くする 22">
             <a:extLst>
               <a:ext uri="{FF2B5EF4-FFF2-40B4-BE49-F238E27FC236}">
-                <a16:creationId xmlns:a16="http://schemas.microsoft.com/office/drawing/2014/main" id="{3AD80D4D-EE4D-0053-1D06-7FF2967A785B}"/>
+                <a16:creationId xmlns:a16="http://schemas.microsoft.com/office/drawing/2014/main" id="{62FBFC65-7468-B1B7-944D-BC16F6413BDB}"/>
               </a:ext>
             </a:extLst>
           </p:cNvPr>
@@ -12876,7 +12909,7 @@
           <p:cNvPr id="24" name="楕円 23">
             <a:extLst>
               <a:ext uri="{FF2B5EF4-FFF2-40B4-BE49-F238E27FC236}">
-                <a16:creationId xmlns:a16="http://schemas.microsoft.com/office/drawing/2014/main" id="{98445930-C289-3A9D-9B5C-0CF3496AC428}"/>
+                <a16:creationId xmlns:a16="http://schemas.microsoft.com/office/drawing/2014/main" id="{2D96C116-F47C-ACB7-7D0E-ED6B67B55EBB}"/>
               </a:ext>
             </a:extLst>
           </p:cNvPr>
@@ -12944,7 +12977,7 @@
           <p:cNvPr id="25" name="テキスト ボックス 24">
             <a:extLst>
               <a:ext uri="{FF2B5EF4-FFF2-40B4-BE49-F238E27FC236}">
-                <a16:creationId xmlns:a16="http://schemas.microsoft.com/office/drawing/2014/main" id="{5BBE0AE6-A6FA-7642-99F8-CDD97070E9C2}"/>
+                <a16:creationId xmlns:a16="http://schemas.microsoft.com/office/drawing/2014/main" id="{07380C3B-A281-1227-138A-A730158E38FB}"/>
               </a:ext>
             </a:extLst>
           </p:cNvPr>
@@ -12991,7 +13024,7 @@
           <p:cNvPr id="26" name="テキスト ボックス 25">
             <a:extLst>
               <a:ext uri="{FF2B5EF4-FFF2-40B4-BE49-F238E27FC236}">
-                <a16:creationId xmlns:a16="http://schemas.microsoft.com/office/drawing/2014/main" id="{4FBFDD18-371A-7E3A-EAF9-4D3ABCF08B3D}"/>
+                <a16:creationId xmlns:a16="http://schemas.microsoft.com/office/drawing/2014/main" id="{BAC4D2C1-EBF9-7E0B-E180-A0411CA12CBA}"/>
               </a:ext>
             </a:extLst>
           </p:cNvPr>
@@ -13031,7 +13064,7 @@
           <p:cNvPr id="27" name="テキスト ボックス 26">
             <a:extLst>
               <a:ext uri="{FF2B5EF4-FFF2-40B4-BE49-F238E27FC236}">
-                <a16:creationId xmlns:a16="http://schemas.microsoft.com/office/drawing/2014/main" id="{31C60AF1-3EBC-CF19-0202-90DEA264585E}"/>
+                <a16:creationId xmlns:a16="http://schemas.microsoft.com/office/drawing/2014/main" id="{00E3A489-5768-994D-833F-C550C4F3622A}"/>
               </a:ext>
             </a:extLst>
           </p:cNvPr>
@@ -13071,7 +13104,7 @@
           <p:cNvPr id="28" name="四角形: 角を丸くする 27">
             <a:extLst>
               <a:ext uri="{FF2B5EF4-FFF2-40B4-BE49-F238E27FC236}">
-                <a16:creationId xmlns:a16="http://schemas.microsoft.com/office/drawing/2014/main" id="{16804B78-B844-34D2-D181-2D130959B77C}"/>
+                <a16:creationId xmlns:a16="http://schemas.microsoft.com/office/drawing/2014/main" id="{60DE682E-B87F-C6B3-EE64-1CF3C59DDB7A}"/>
               </a:ext>
             </a:extLst>
           </p:cNvPr>
@@ -13125,7 +13158,7 @@
           <p:cNvPr id="29" name="楕円 28">
             <a:extLst>
               <a:ext uri="{FF2B5EF4-FFF2-40B4-BE49-F238E27FC236}">
-                <a16:creationId xmlns:a16="http://schemas.microsoft.com/office/drawing/2014/main" id="{57F4E031-8F5F-6882-AD5E-0F6B55FC18DE}"/>
+                <a16:creationId xmlns:a16="http://schemas.microsoft.com/office/drawing/2014/main" id="{013F6A1D-C7A3-8AAB-F167-148CC39DE5B0}"/>
               </a:ext>
             </a:extLst>
           </p:cNvPr>
@@ -13193,7 +13226,7 @@
           <p:cNvPr id="30" name="テキスト ボックス 29">
             <a:extLst>
               <a:ext uri="{FF2B5EF4-FFF2-40B4-BE49-F238E27FC236}">
-                <a16:creationId xmlns:a16="http://schemas.microsoft.com/office/drawing/2014/main" id="{68F0146B-F0B3-6E8A-505E-D0DEBE4617F8}"/>
+                <a16:creationId xmlns:a16="http://schemas.microsoft.com/office/drawing/2014/main" id="{CFC1A453-3F33-4BED-9936-C5D51C1C6BD0}"/>
               </a:ext>
             </a:extLst>
           </p:cNvPr>
@@ -13240,7 +13273,7 @@
           <p:cNvPr id="31" name="テキスト ボックス 30">
             <a:extLst>
               <a:ext uri="{FF2B5EF4-FFF2-40B4-BE49-F238E27FC236}">
-                <a16:creationId xmlns:a16="http://schemas.microsoft.com/office/drawing/2014/main" id="{F10944C8-EEF8-B0E0-E846-452D66730A6A}"/>
+                <a16:creationId xmlns:a16="http://schemas.microsoft.com/office/drawing/2014/main" id="{A6FADF9E-F29C-0CD4-7276-1FD7AFF2E6A8}"/>
               </a:ext>
             </a:extLst>
           </p:cNvPr>
@@ -13280,7 +13313,7 @@
           <p:cNvPr id="32" name="テキスト ボックス 31">
             <a:extLst>
               <a:ext uri="{FF2B5EF4-FFF2-40B4-BE49-F238E27FC236}">
-                <a16:creationId xmlns:a16="http://schemas.microsoft.com/office/drawing/2014/main" id="{A4661B91-D88B-5884-8F75-8492273C02AD}"/>
+                <a16:creationId xmlns:a16="http://schemas.microsoft.com/office/drawing/2014/main" id="{A1CA14B3-41A7-33E9-CC91-E233322C79FA}"/>
               </a:ext>
             </a:extLst>
           </p:cNvPr>
@@ -13356,7 +13389,7 @@
           <p:cNvPr id="33" name="四角形: 角を丸くする 32">
             <a:extLst>
               <a:ext uri="{FF2B5EF4-FFF2-40B4-BE49-F238E27FC236}">
-                <a16:creationId xmlns:a16="http://schemas.microsoft.com/office/drawing/2014/main" id="{479F7CA9-B3DB-3B05-87E3-7653EA451147}"/>
+                <a16:creationId xmlns:a16="http://schemas.microsoft.com/office/drawing/2014/main" id="{55FED967-A7C7-42F1-1FAC-654814A5CFC4}"/>
               </a:ext>
             </a:extLst>
           </p:cNvPr>
@@ -13424,7 +13457,7 @@
           <p:cNvPr id="34" name="テキスト ボックス 33">
             <a:extLst>
               <a:ext uri="{FF2B5EF4-FFF2-40B4-BE49-F238E27FC236}">
-                <a16:creationId xmlns:a16="http://schemas.microsoft.com/office/drawing/2014/main" id="{457C0C77-4495-C821-4CA7-DC9D27310570}"/>
+                <a16:creationId xmlns:a16="http://schemas.microsoft.com/office/drawing/2014/main" id="{2A265091-F893-86DA-5E53-7AA57AC36A2F}"/>
               </a:ext>
             </a:extLst>
           </p:cNvPr>
@@ -13536,7 +13569,7 @@
           <p:cNvPr id="35" name="テキスト ボックス 34">
             <a:extLst>
               <a:ext uri="{FF2B5EF4-FFF2-40B4-BE49-F238E27FC236}">
-                <a16:creationId xmlns:a16="http://schemas.microsoft.com/office/drawing/2014/main" id="{3A67D0CE-65CA-1ECD-49DF-7875D266594A}"/>
+                <a16:creationId xmlns:a16="http://schemas.microsoft.com/office/drawing/2014/main" id="{1CDBFF45-2FF0-F3EB-3562-75B911F408E7}"/>
               </a:ext>
             </a:extLst>
           </p:cNvPr>
@@ -13647,7 +13680,7 @@
                 </a:solidFill>
                 <a:latin typeface="Meiryo" panose="020B0604030504040204" pitchFamily="50" charset="-128"/>
               </a:rPr>
-              <a:t>。偏差値・評判・日程は</a:t>
+              <a:t>。名古屋西は偏差値</a:t>
             </a:r>
             <a:r>
               <a:rPr kumimoji="1" lang="en-US" altLang="ja-JP" sz="1200">
@@ -13656,7 +13689,7 @@
                 </a:solidFill>
                 <a:latin typeface="Meiryo" panose="020B0604030504040204" pitchFamily="50" charset="-128"/>
               </a:rPr>
-              <a:t>2026</a:t>
+              <a:t>60</a:t>
             </a:r>
             <a:r>
               <a:rPr kumimoji="1" lang="ja-JP" altLang="en-US" sz="1200">
@@ -13665,25 +13698,7 @@
                 </a:solidFill>
                 <a:latin typeface="Meiryo" panose="020B0604030504040204" pitchFamily="50" charset="-128"/>
               </a:rPr>
-              <a:t>年</a:t>
-            </a:r>
-            <a:r>
-              <a:rPr kumimoji="1" lang="en-US" altLang="ja-JP" sz="1200">
-                <a:solidFill>
-                  <a:srgbClr val="6B7280"/>
-                </a:solidFill>
-                <a:latin typeface="Meiryo" panose="020B0604030504040204" pitchFamily="50" charset="-128"/>
-              </a:rPr>
-              <a:t>6</a:t>
-            </a:r>
-            <a:r>
-              <a:rPr kumimoji="1" lang="ja-JP" altLang="en-US" sz="1200">
-                <a:solidFill>
-                  <a:srgbClr val="6B7280"/>
-                </a:solidFill>
-                <a:latin typeface="Meiryo" panose="020B0604030504040204" pitchFamily="50" charset="-128"/>
-              </a:rPr>
-              <a:t>月時点の目安。最新は各校公式で確認を。</a:t>
+              <a:t>と高めの上位校。最新は各校公式で確認を。</a:t>
             </a:r>
           </a:p>
         </p:txBody>
@@ -13691,7 +13706,7 @@
     </p:spTree>
     <p:extLst>
       <p:ext uri="{BB962C8B-B14F-4D97-AF65-F5344CB8AC3E}">
-        <p14:creationId xmlns:p14="http://schemas.microsoft.com/office/powerpoint/2010/main" val="2032291542"/>
+        <p14:creationId xmlns:p14="http://schemas.microsoft.com/office/powerpoint/2010/main" val="2990272224"/>
       </p:ext>
     </p:extLst>
   </p:cSld>
@@ -13731,7 +13746,7 @@
           <p:cNvPr id="2" name="テキスト ボックス 1">
             <a:extLst>
               <a:ext uri="{FF2B5EF4-FFF2-40B4-BE49-F238E27FC236}">
-                <a16:creationId xmlns:a16="http://schemas.microsoft.com/office/drawing/2014/main" id="{F17A8F0B-CD45-7789-2070-D39287B83A60}"/>
+                <a16:creationId xmlns:a16="http://schemas.microsoft.com/office/drawing/2014/main" id="{CB1D1B1F-7C82-0930-286F-FD4CF9DA0C85}"/>
               </a:ext>
             </a:extLst>
           </p:cNvPr>
@@ -13789,7 +13804,7 @@
           <p:cNvPr id="3" name="正方形/長方形 2">
             <a:extLst>
               <a:ext uri="{FF2B5EF4-FFF2-40B4-BE49-F238E27FC236}">
-                <a16:creationId xmlns:a16="http://schemas.microsoft.com/office/drawing/2014/main" id="{6D795B8E-38A3-6F7B-C18D-3FAAEEF634C9}"/>
+                <a16:creationId xmlns:a16="http://schemas.microsoft.com/office/drawing/2014/main" id="{7A1F76AF-F8C4-0667-D993-5EE21B32953F}"/>
               </a:ext>
             </a:extLst>
           </p:cNvPr>
@@ -13857,7 +13872,7 @@
           <p:cNvPr id="4" name="テキスト ボックス 3">
             <a:extLst>
               <a:ext uri="{FF2B5EF4-FFF2-40B4-BE49-F238E27FC236}">
-                <a16:creationId xmlns:a16="http://schemas.microsoft.com/office/drawing/2014/main" id="{585FC73F-0996-B6B8-F9A7-22257334C064}"/>
+                <a16:creationId xmlns:a16="http://schemas.microsoft.com/office/drawing/2014/main" id="{2FAEF669-B1F3-9B83-FB9C-E62DB9AC8589}"/>
               </a:ext>
             </a:extLst>
           </p:cNvPr>
@@ -13898,7 +13913,7 @@
           <p:cNvPr id="5" name="正方形/長方形 4">
             <a:extLst>
               <a:ext uri="{FF2B5EF4-FFF2-40B4-BE49-F238E27FC236}">
-                <a16:creationId xmlns:a16="http://schemas.microsoft.com/office/drawing/2014/main" id="{7C636206-7EFA-5655-4A15-A565C7C131A4}"/>
+                <a16:creationId xmlns:a16="http://schemas.microsoft.com/office/drawing/2014/main" id="{9C5FCB15-6269-AAD3-0DCA-04DFF4510C49}"/>
               </a:ext>
             </a:extLst>
           </p:cNvPr>
@@ -13966,7 +13981,7 @@
           <p:cNvPr id="6" name="テキスト ボックス 5">
             <a:extLst>
               <a:ext uri="{FF2B5EF4-FFF2-40B4-BE49-F238E27FC236}">
-                <a16:creationId xmlns:a16="http://schemas.microsoft.com/office/drawing/2014/main" id="{70C83065-5E16-2B30-19DB-DB8F1A14FA6D}"/>
+                <a16:creationId xmlns:a16="http://schemas.microsoft.com/office/drawing/2014/main" id="{1EB689CB-7127-2C3D-4A6B-39C654F992C4}"/>
               </a:ext>
             </a:extLst>
           </p:cNvPr>
@@ -14007,7 +14022,7 @@
           <p:cNvPr id="7" name="正方形/長方形 6">
             <a:extLst>
               <a:ext uri="{FF2B5EF4-FFF2-40B4-BE49-F238E27FC236}">
-                <a16:creationId xmlns:a16="http://schemas.microsoft.com/office/drawing/2014/main" id="{98001BFF-EB33-8189-36DB-EC0489A9B2A7}"/>
+                <a16:creationId xmlns:a16="http://schemas.microsoft.com/office/drawing/2014/main" id="{30A10371-BB0C-BA73-F1C5-8EA4EADF0B3A}"/>
               </a:ext>
             </a:extLst>
           </p:cNvPr>
@@ -14075,7 +14090,7 @@
           <p:cNvPr id="8" name="テキスト ボックス 7">
             <a:extLst>
               <a:ext uri="{FF2B5EF4-FFF2-40B4-BE49-F238E27FC236}">
-                <a16:creationId xmlns:a16="http://schemas.microsoft.com/office/drawing/2014/main" id="{E005DA08-522A-A392-7AF8-8ACE5D816D4A}"/>
+                <a16:creationId xmlns:a16="http://schemas.microsoft.com/office/drawing/2014/main" id="{B89F753A-8F22-AEA4-71A3-9C99FF38E61E}"/>
               </a:ext>
             </a:extLst>
           </p:cNvPr>
@@ -14116,7 +14131,7 @@
           <p:cNvPr id="9" name="正方形/長方形 8">
             <a:extLst>
               <a:ext uri="{FF2B5EF4-FFF2-40B4-BE49-F238E27FC236}">
-                <a16:creationId xmlns:a16="http://schemas.microsoft.com/office/drawing/2014/main" id="{4530EC37-5130-CFDF-728A-7963EF666668}"/>
+                <a16:creationId xmlns:a16="http://schemas.microsoft.com/office/drawing/2014/main" id="{124E8C1F-8731-A1B2-E513-D5FF2490078B}"/>
               </a:ext>
             </a:extLst>
           </p:cNvPr>
@@ -14184,7 +14199,7 @@
           <p:cNvPr id="10" name="テキスト ボックス 9">
             <a:extLst>
               <a:ext uri="{FF2B5EF4-FFF2-40B4-BE49-F238E27FC236}">
-                <a16:creationId xmlns:a16="http://schemas.microsoft.com/office/drawing/2014/main" id="{AD8CAB6E-2A94-EBFB-7546-88B72DEF533F}"/>
+                <a16:creationId xmlns:a16="http://schemas.microsoft.com/office/drawing/2014/main" id="{C3F4DC90-9FE7-9D88-5DEC-CFAE4152C90B}"/>
               </a:ext>
             </a:extLst>
           </p:cNvPr>
@@ -14225,7 +14240,7 @@
           <p:cNvPr id="11" name="正方形/長方形 10">
             <a:extLst>
               <a:ext uri="{FF2B5EF4-FFF2-40B4-BE49-F238E27FC236}">
-                <a16:creationId xmlns:a16="http://schemas.microsoft.com/office/drawing/2014/main" id="{6AD974FB-79EC-129E-FDDD-D6FC89AF493C}"/>
+                <a16:creationId xmlns:a16="http://schemas.microsoft.com/office/drawing/2014/main" id="{316BCB16-E4CC-FB3C-8B82-A4ABB5C177E9}"/>
               </a:ext>
             </a:extLst>
           </p:cNvPr>
@@ -14293,7 +14308,7 @@
           <p:cNvPr id="12" name="テキスト ボックス 11">
             <a:extLst>
               <a:ext uri="{FF2B5EF4-FFF2-40B4-BE49-F238E27FC236}">
-                <a16:creationId xmlns:a16="http://schemas.microsoft.com/office/drawing/2014/main" id="{740E07C5-D225-01DB-0C92-A75C325E2CBB}"/>
+                <a16:creationId xmlns:a16="http://schemas.microsoft.com/office/drawing/2014/main" id="{33AD2BA5-129F-9A29-4827-4C167CF49001}"/>
               </a:ext>
             </a:extLst>
           </p:cNvPr>
@@ -14334,7 +14349,7 @@
           <p:cNvPr id="13" name="正方形/長方形 12">
             <a:extLst>
               <a:ext uri="{FF2B5EF4-FFF2-40B4-BE49-F238E27FC236}">
-                <a16:creationId xmlns:a16="http://schemas.microsoft.com/office/drawing/2014/main" id="{B08BB1E8-AC49-5062-1293-C6ADBE73390C}"/>
+                <a16:creationId xmlns:a16="http://schemas.microsoft.com/office/drawing/2014/main" id="{D66D0E98-B9AD-F6D6-9496-A083DEAAA14D}"/>
               </a:ext>
             </a:extLst>
           </p:cNvPr>
@@ -14402,7 +14417,7 @@
           <p:cNvPr id="14" name="テキスト ボックス 13">
             <a:extLst>
               <a:ext uri="{FF2B5EF4-FFF2-40B4-BE49-F238E27FC236}">
-                <a16:creationId xmlns:a16="http://schemas.microsoft.com/office/drawing/2014/main" id="{A1BA9791-CF32-B52A-3812-9687D0A4D41C}"/>
+                <a16:creationId xmlns:a16="http://schemas.microsoft.com/office/drawing/2014/main" id="{647A7E5F-6F95-B8F4-1DF3-DC2A8BFFBA4D}"/>
               </a:ext>
             </a:extLst>
           </p:cNvPr>
@@ -14443,7 +14458,7 @@
           <p:cNvPr id="15" name="正方形/長方形 14">
             <a:extLst>
               <a:ext uri="{FF2B5EF4-FFF2-40B4-BE49-F238E27FC236}">
-                <a16:creationId xmlns:a16="http://schemas.microsoft.com/office/drawing/2014/main" id="{6A92ECEC-B644-8A83-B189-7E194D66B76A}"/>
+                <a16:creationId xmlns:a16="http://schemas.microsoft.com/office/drawing/2014/main" id="{7A761268-5472-2EB7-3F82-7B1504352CB0}"/>
               </a:ext>
             </a:extLst>
           </p:cNvPr>
@@ -14497,7 +14512,7 @@
           <p:cNvPr id="16" name="楕円 15">
             <a:extLst>
               <a:ext uri="{FF2B5EF4-FFF2-40B4-BE49-F238E27FC236}">
-                <a16:creationId xmlns:a16="http://schemas.microsoft.com/office/drawing/2014/main" id="{7C9C4610-7D35-A69C-7B5D-AB9191F652BC}"/>
+                <a16:creationId xmlns:a16="http://schemas.microsoft.com/office/drawing/2014/main" id="{979CDE71-E80F-DCF2-7C12-874470D2F678}"/>
               </a:ext>
             </a:extLst>
           </p:cNvPr>
@@ -14565,7 +14580,7 @@
           <p:cNvPr id="17" name="テキスト ボックス 16">
             <a:extLst>
               <a:ext uri="{FF2B5EF4-FFF2-40B4-BE49-F238E27FC236}">
-                <a16:creationId xmlns:a16="http://schemas.microsoft.com/office/drawing/2014/main" id="{4E95D345-E15C-AB4B-F9A0-B546652AEAEF}"/>
+                <a16:creationId xmlns:a16="http://schemas.microsoft.com/office/drawing/2014/main" id="{BE876B71-33F4-B908-275C-CA1535E52BE8}"/>
               </a:ext>
             </a:extLst>
           </p:cNvPr>
@@ -14589,14 +14604,20 @@
           <a:lstStyle/>
           <a:p>
             <a:r>
-              <a:rPr kumimoji="1" lang="ja-JP" altLang="en-US" sz="1200" b="1">
+              <a:rPr kumimoji="1" lang="zh-TW" altLang="en-US" sz="1200" b="1">
                 <a:solidFill>
                   <a:srgbClr val="1E2761"/>
                 </a:solidFill>
                 <a:latin typeface="Meiryo" panose="020B0604030504040204" pitchFamily="50" charset="-128"/>
               </a:rPr>
-              <a:t>名古屋市立 北高校</a:t>
-            </a:r>
+              <a:t>愛知県立 名古屋西</a:t>
+            </a:r>
+            <a:endParaRPr kumimoji="1" lang="ja-JP" altLang="en-US" sz="1200" b="1">
+              <a:solidFill>
+                <a:srgbClr val="1E2761"/>
+              </a:solidFill>
+              <a:latin typeface="Meiryo" panose="020B0604030504040204" pitchFamily="50" charset="-128"/>
+            </a:endParaRPr>
           </a:p>
         </p:txBody>
       </p:sp>
@@ -14605,7 +14626,7 @@
           <p:cNvPr id="18" name="正方形/長方形 17">
             <a:extLst>
               <a:ext uri="{FF2B5EF4-FFF2-40B4-BE49-F238E27FC236}">
-                <a16:creationId xmlns:a16="http://schemas.microsoft.com/office/drawing/2014/main" id="{5CA87321-C4CC-2A54-C13D-655566A68652}"/>
+                <a16:creationId xmlns:a16="http://schemas.microsoft.com/office/drawing/2014/main" id="{F980319D-589E-C7EB-42B3-F9610F8B4C78}"/>
               </a:ext>
             </a:extLst>
           </p:cNvPr>
@@ -14659,7 +14680,7 @@
           <p:cNvPr id="19" name="テキスト ボックス 18">
             <a:extLst>
               <a:ext uri="{FF2B5EF4-FFF2-40B4-BE49-F238E27FC236}">
-                <a16:creationId xmlns:a16="http://schemas.microsoft.com/office/drawing/2014/main" id="{9CF54816-C6C8-2FD7-05A3-32F289C74A90}"/>
+                <a16:creationId xmlns:a16="http://schemas.microsoft.com/office/drawing/2014/main" id="{4B414309-9899-20FE-F5A6-6DB8FD2B8686}"/>
               </a:ext>
             </a:extLst>
           </p:cNvPr>
@@ -14690,7 +14711,7 @@
                 </a:solidFill>
                 <a:latin typeface="Meiryo" panose="020B0604030504040204" pitchFamily="50" charset="-128"/>
               </a:rPr>
-              <a:t>北区</a:t>
+              <a:t>西区</a:t>
             </a:r>
           </a:p>
         </p:txBody>
@@ -14700,7 +14721,7 @@
           <p:cNvPr id="20" name="正方形/長方形 19">
             <a:extLst>
               <a:ext uri="{FF2B5EF4-FFF2-40B4-BE49-F238E27FC236}">
-                <a16:creationId xmlns:a16="http://schemas.microsoft.com/office/drawing/2014/main" id="{F41298A6-EB0C-42D2-45D7-59B7FFDAA762}"/>
+                <a16:creationId xmlns:a16="http://schemas.microsoft.com/office/drawing/2014/main" id="{FD9E6ED1-0E5F-454E-9C29-46EFA5DDA3A7}"/>
               </a:ext>
             </a:extLst>
           </p:cNvPr>
@@ -14754,7 +14775,7 @@
           <p:cNvPr id="21" name="テキスト ボックス 20">
             <a:extLst>
               <a:ext uri="{FF2B5EF4-FFF2-40B4-BE49-F238E27FC236}">
-                <a16:creationId xmlns:a16="http://schemas.microsoft.com/office/drawing/2014/main" id="{50FBFE61-2D10-5FB1-C900-9072E938573F}"/>
+                <a16:creationId xmlns:a16="http://schemas.microsoft.com/office/drawing/2014/main" id="{3197E222-4D84-B559-23BE-DA520C61364D}"/>
               </a:ext>
             </a:extLst>
           </p:cNvPr>
@@ -14785,7 +14806,7 @@
                 </a:solidFill>
                 <a:latin typeface="Meiryo" panose="020B0604030504040204" pitchFamily="50" charset="-128"/>
               </a:rPr>
-              <a:t>50</a:t>
+              <a:t>60</a:t>
             </a:r>
             <a:endParaRPr kumimoji="1" lang="ja-JP" altLang="en-US" sz="1500" b="1">
               <a:solidFill>
@@ -14801,7 +14822,7 @@
           <p:cNvPr id="22" name="正方形/長方形 21">
             <a:extLst>
               <a:ext uri="{FF2B5EF4-FFF2-40B4-BE49-F238E27FC236}">
-                <a16:creationId xmlns:a16="http://schemas.microsoft.com/office/drawing/2014/main" id="{403E4F1F-AA0C-AE90-74A5-BDB348224EEF}"/>
+                <a16:creationId xmlns:a16="http://schemas.microsoft.com/office/drawing/2014/main" id="{C8EEA3B1-2B21-59FC-F2E5-DFD749495399}"/>
               </a:ext>
             </a:extLst>
           </p:cNvPr>
@@ -14855,7 +14876,7 @@
           <p:cNvPr id="23" name="テキスト ボックス 22">
             <a:extLst>
               <a:ext uri="{FF2B5EF4-FFF2-40B4-BE49-F238E27FC236}">
-                <a16:creationId xmlns:a16="http://schemas.microsoft.com/office/drawing/2014/main" id="{65171C2A-DCBB-7A3C-7C88-859CA0EAEE49}"/>
+                <a16:creationId xmlns:a16="http://schemas.microsoft.com/office/drawing/2014/main" id="{F056660E-4D23-FB4C-9AD1-A8FBB9DFB677}"/>
               </a:ext>
             </a:extLst>
           </p:cNvPr>
@@ -14886,7 +14907,7 @@
                 </a:solidFill>
                 <a:latin typeface="Meiryo" panose="020B0604030504040204" pitchFamily="50" charset="-128"/>
               </a:rPr>
-              <a:t>音楽全国</a:t>
+              <a:t>陸上 国体</a:t>
             </a:r>
           </a:p>
         </p:txBody>
@@ -14896,7 +14917,7 @@
           <p:cNvPr id="24" name="正方形/長方形 23">
             <a:extLst>
               <a:ext uri="{FF2B5EF4-FFF2-40B4-BE49-F238E27FC236}">
-                <a16:creationId xmlns:a16="http://schemas.microsoft.com/office/drawing/2014/main" id="{C459D3DD-7ED6-D62C-A293-71CAB69F5B03}"/>
+                <a16:creationId xmlns:a16="http://schemas.microsoft.com/office/drawing/2014/main" id="{7D022FE8-6216-AE3F-F2FF-BD318DB0524A}"/>
               </a:ext>
             </a:extLst>
           </p:cNvPr>
@@ -14950,7 +14971,7 @@
           <p:cNvPr id="25" name="テキスト ボックス 24">
             <a:extLst>
               <a:ext uri="{FF2B5EF4-FFF2-40B4-BE49-F238E27FC236}">
-                <a16:creationId xmlns:a16="http://schemas.microsoft.com/office/drawing/2014/main" id="{7EED5E6A-1CCA-57F8-FA40-F5A370A8C89D}"/>
+                <a16:creationId xmlns:a16="http://schemas.microsoft.com/office/drawing/2014/main" id="{D4080804-8982-ED88-D17F-36A2E5037B2C}"/>
               </a:ext>
             </a:extLst>
           </p:cNvPr>
@@ -14981,7 +15002,7 @@
                 </a:solidFill>
                 <a:latin typeface="Meiryo" panose="020B0604030504040204" pitchFamily="50" charset="-128"/>
               </a:rPr>
-              <a:t>2.9</a:t>
+              <a:t>3.7</a:t>
             </a:r>
             <a:endParaRPr kumimoji="1" lang="ja-JP" altLang="en-US" sz="1200">
               <a:solidFill>
@@ -14997,7 +15018,7 @@
           <p:cNvPr id="26" name="正方形/長方形 25">
             <a:extLst>
               <a:ext uri="{FF2B5EF4-FFF2-40B4-BE49-F238E27FC236}">
-                <a16:creationId xmlns:a16="http://schemas.microsoft.com/office/drawing/2014/main" id="{906BCDE7-B671-49EB-DCBB-EE264B726467}"/>
+                <a16:creationId xmlns:a16="http://schemas.microsoft.com/office/drawing/2014/main" id="{DADF69A6-B6DB-AA69-049A-BCCB0594CFCA}"/>
               </a:ext>
             </a:extLst>
           </p:cNvPr>
@@ -15051,7 +15072,7 @@
           <p:cNvPr id="27" name="テキスト ボックス 26">
             <a:extLst>
               <a:ext uri="{FF2B5EF4-FFF2-40B4-BE49-F238E27FC236}">
-                <a16:creationId xmlns:a16="http://schemas.microsoft.com/office/drawing/2014/main" id="{E57FD6FD-C6CB-9A0E-41C6-2A0B2A3ED2ED}"/>
+                <a16:creationId xmlns:a16="http://schemas.microsoft.com/office/drawing/2014/main" id="{6B459CBC-0071-6792-4F30-707006D42654}"/>
               </a:ext>
             </a:extLst>
           </p:cNvPr>
@@ -15082,7 +15103,7 @@
                 </a:solidFill>
                 <a:latin typeface="Meiryo" panose="020B0604030504040204" pitchFamily="50" charset="-128"/>
               </a:rPr>
-              <a:t>◎北区</a:t>
+              <a:t>〇浄心</a:t>
             </a:r>
           </a:p>
         </p:txBody>
@@ -15092,7 +15113,7 @@
           <p:cNvPr id="28" name="正方形/長方形 27">
             <a:extLst>
               <a:ext uri="{FF2B5EF4-FFF2-40B4-BE49-F238E27FC236}">
-                <a16:creationId xmlns:a16="http://schemas.microsoft.com/office/drawing/2014/main" id="{D837ED82-3061-912C-C6B1-8DF6AED240E4}"/>
+                <a16:creationId xmlns:a16="http://schemas.microsoft.com/office/drawing/2014/main" id="{7F0FB7C9-EAB8-C19D-9439-24EF082174E8}"/>
               </a:ext>
             </a:extLst>
           </p:cNvPr>
@@ -15146,7 +15167,7 @@
           <p:cNvPr id="29" name="楕円 28">
             <a:extLst>
               <a:ext uri="{FF2B5EF4-FFF2-40B4-BE49-F238E27FC236}">
-                <a16:creationId xmlns:a16="http://schemas.microsoft.com/office/drawing/2014/main" id="{7A067FA3-64D3-882A-51A4-FDFB25488273}"/>
+                <a16:creationId xmlns:a16="http://schemas.microsoft.com/office/drawing/2014/main" id="{4371F1A5-E02E-5804-E349-3163645DE865}"/>
               </a:ext>
             </a:extLst>
           </p:cNvPr>
@@ -15214,7 +15235,7 @@
           <p:cNvPr id="30" name="テキスト ボックス 29">
             <a:extLst>
               <a:ext uri="{FF2B5EF4-FFF2-40B4-BE49-F238E27FC236}">
-                <a16:creationId xmlns:a16="http://schemas.microsoft.com/office/drawing/2014/main" id="{6B085F81-7D15-7491-C9A2-1EF491AE662F}"/>
+                <a16:creationId xmlns:a16="http://schemas.microsoft.com/office/drawing/2014/main" id="{4CDDA243-5142-BEBF-D5AD-750BF707CEAE}"/>
               </a:ext>
             </a:extLst>
           </p:cNvPr>
@@ -15254,7 +15275,7 @@
           <p:cNvPr id="31" name="正方形/長方形 30">
             <a:extLst>
               <a:ext uri="{FF2B5EF4-FFF2-40B4-BE49-F238E27FC236}">
-                <a16:creationId xmlns:a16="http://schemas.microsoft.com/office/drawing/2014/main" id="{C13C5882-1CD9-E59C-101F-0EFF4AEEB10D}"/>
+                <a16:creationId xmlns:a16="http://schemas.microsoft.com/office/drawing/2014/main" id="{EC902DED-BD43-E879-D84D-22CCA0D0944C}"/>
               </a:ext>
             </a:extLst>
           </p:cNvPr>
@@ -15308,7 +15329,7 @@
           <p:cNvPr id="32" name="テキスト ボックス 31">
             <a:extLst>
               <a:ext uri="{FF2B5EF4-FFF2-40B4-BE49-F238E27FC236}">
-                <a16:creationId xmlns:a16="http://schemas.microsoft.com/office/drawing/2014/main" id="{A860961B-4CBD-91F5-B06F-CCD91C30C571}"/>
+                <a16:creationId xmlns:a16="http://schemas.microsoft.com/office/drawing/2014/main" id="{C6050CE2-AFBD-DF34-1103-95BA4D6F80C0}"/>
               </a:ext>
             </a:extLst>
           </p:cNvPr>
@@ -15349,7 +15370,7 @@
           <p:cNvPr id="33" name="正方形/長方形 32">
             <a:extLst>
               <a:ext uri="{FF2B5EF4-FFF2-40B4-BE49-F238E27FC236}">
-                <a16:creationId xmlns:a16="http://schemas.microsoft.com/office/drawing/2014/main" id="{016C14C4-1E22-8437-2219-18E0A4C8CEA8}"/>
+                <a16:creationId xmlns:a16="http://schemas.microsoft.com/office/drawing/2014/main" id="{A8C7CC94-8BA8-58F8-5F57-C899657FF011}"/>
               </a:ext>
             </a:extLst>
           </p:cNvPr>
@@ -15403,7 +15424,7 @@
           <p:cNvPr id="34" name="テキスト ボックス 33">
             <a:extLst>
               <a:ext uri="{FF2B5EF4-FFF2-40B4-BE49-F238E27FC236}">
-                <a16:creationId xmlns:a16="http://schemas.microsoft.com/office/drawing/2014/main" id="{B88C8412-F63C-AE81-3516-F6FB23295F43}"/>
+                <a16:creationId xmlns:a16="http://schemas.microsoft.com/office/drawing/2014/main" id="{4DBAB77A-492D-AACE-F5FE-7010999A828B}"/>
               </a:ext>
             </a:extLst>
           </p:cNvPr>
@@ -15450,7 +15471,7 @@
           <p:cNvPr id="35" name="正方形/長方形 34">
             <a:extLst>
               <a:ext uri="{FF2B5EF4-FFF2-40B4-BE49-F238E27FC236}">
-                <a16:creationId xmlns:a16="http://schemas.microsoft.com/office/drawing/2014/main" id="{65F16219-CECE-B5B5-4B36-E0F1F1CA3F18}"/>
+                <a16:creationId xmlns:a16="http://schemas.microsoft.com/office/drawing/2014/main" id="{DF8D3966-8973-6344-9CA1-2DE5DBCCD314}"/>
               </a:ext>
             </a:extLst>
           </p:cNvPr>
@@ -15504,7 +15525,7 @@
           <p:cNvPr id="36" name="テキスト ボックス 35">
             <a:extLst>
               <a:ext uri="{FF2B5EF4-FFF2-40B4-BE49-F238E27FC236}">
-                <a16:creationId xmlns:a16="http://schemas.microsoft.com/office/drawing/2014/main" id="{4CB0A532-75C0-78B2-E5E6-F4ED27AEF07D}"/>
+                <a16:creationId xmlns:a16="http://schemas.microsoft.com/office/drawing/2014/main" id="{ACCAD7F7-D597-AC64-1BE1-848DD57F9E62}"/>
               </a:ext>
             </a:extLst>
           </p:cNvPr>
@@ -15545,7 +15566,7 @@
           <p:cNvPr id="37" name="正方形/長方形 36">
             <a:extLst>
               <a:ext uri="{FF2B5EF4-FFF2-40B4-BE49-F238E27FC236}">
-                <a16:creationId xmlns:a16="http://schemas.microsoft.com/office/drawing/2014/main" id="{92CF15D1-47A2-4BD0-554C-756DBB5EB727}"/>
+                <a16:creationId xmlns:a16="http://schemas.microsoft.com/office/drawing/2014/main" id="{A6148556-1175-A321-514A-89C2C538D5B9}"/>
               </a:ext>
             </a:extLst>
           </p:cNvPr>
@@ -15599,7 +15620,7 @@
           <p:cNvPr id="38" name="テキスト ボックス 37">
             <a:extLst>
               <a:ext uri="{FF2B5EF4-FFF2-40B4-BE49-F238E27FC236}">
-                <a16:creationId xmlns:a16="http://schemas.microsoft.com/office/drawing/2014/main" id="{CC798E53-CB8B-1628-DDC7-5D6A453BB361}"/>
+                <a16:creationId xmlns:a16="http://schemas.microsoft.com/office/drawing/2014/main" id="{30EC3E37-05D8-5E80-8DB0-495F6E6DE0B1}"/>
               </a:ext>
             </a:extLst>
           </p:cNvPr>
@@ -15646,7 +15667,7 @@
           <p:cNvPr id="39" name="正方形/長方形 38">
             <a:extLst>
               <a:ext uri="{FF2B5EF4-FFF2-40B4-BE49-F238E27FC236}">
-                <a16:creationId xmlns:a16="http://schemas.microsoft.com/office/drawing/2014/main" id="{2874EB1E-7A20-7175-C0C9-B339EC3416D3}"/>
+                <a16:creationId xmlns:a16="http://schemas.microsoft.com/office/drawing/2014/main" id="{65AB4D56-41C4-EB94-6ED8-23D1B8726666}"/>
               </a:ext>
             </a:extLst>
           </p:cNvPr>
@@ -15700,7 +15721,7 @@
           <p:cNvPr id="40" name="テキスト ボックス 39">
             <a:extLst>
               <a:ext uri="{FF2B5EF4-FFF2-40B4-BE49-F238E27FC236}">
-                <a16:creationId xmlns:a16="http://schemas.microsoft.com/office/drawing/2014/main" id="{EB3F80E6-214E-E5B2-E3C5-2209A2F600A7}"/>
+                <a16:creationId xmlns:a16="http://schemas.microsoft.com/office/drawing/2014/main" id="{4A8028CD-849E-8235-EC20-95985AFD1A92}"/>
               </a:ext>
             </a:extLst>
           </p:cNvPr>
@@ -15741,7 +15762,7 @@
           <p:cNvPr id="41" name="正方形/長方形 40">
             <a:extLst>
               <a:ext uri="{FF2B5EF4-FFF2-40B4-BE49-F238E27FC236}">
-                <a16:creationId xmlns:a16="http://schemas.microsoft.com/office/drawing/2014/main" id="{F611A08C-C7B0-F2F2-3B37-CC6B12E7C433}"/>
+                <a16:creationId xmlns:a16="http://schemas.microsoft.com/office/drawing/2014/main" id="{2DE77A7F-90CB-C667-30D0-E898FEA7FAFF}"/>
               </a:ext>
             </a:extLst>
           </p:cNvPr>
@@ -15795,7 +15816,7 @@
           <p:cNvPr id="42" name="楕円 41">
             <a:extLst>
               <a:ext uri="{FF2B5EF4-FFF2-40B4-BE49-F238E27FC236}">
-                <a16:creationId xmlns:a16="http://schemas.microsoft.com/office/drawing/2014/main" id="{270C18CB-1763-A3CA-6C0F-AF3CD8871EB8}"/>
+                <a16:creationId xmlns:a16="http://schemas.microsoft.com/office/drawing/2014/main" id="{A319E872-D1CA-B7B8-996C-48CA6CDA360E}"/>
               </a:ext>
             </a:extLst>
           </p:cNvPr>
@@ -15863,7 +15884,7 @@
           <p:cNvPr id="43" name="テキスト ボックス 42">
             <a:extLst>
               <a:ext uri="{FF2B5EF4-FFF2-40B4-BE49-F238E27FC236}">
-                <a16:creationId xmlns:a16="http://schemas.microsoft.com/office/drawing/2014/main" id="{DA3A3B26-64B9-F84E-FB16-9AC4BA7AF7C4}"/>
+                <a16:creationId xmlns:a16="http://schemas.microsoft.com/office/drawing/2014/main" id="{EBA37604-699E-55A1-9157-09A88B0ADDFC}"/>
               </a:ext>
             </a:extLst>
           </p:cNvPr>
@@ -15909,7 +15930,7 @@
           <p:cNvPr id="44" name="正方形/長方形 43">
             <a:extLst>
               <a:ext uri="{FF2B5EF4-FFF2-40B4-BE49-F238E27FC236}">
-                <a16:creationId xmlns:a16="http://schemas.microsoft.com/office/drawing/2014/main" id="{4FDC0C81-F8F9-B6EB-5372-F17ECBC802B6}"/>
+                <a16:creationId xmlns:a16="http://schemas.microsoft.com/office/drawing/2014/main" id="{4A8CE311-F89D-3E69-3C24-875834885DAA}"/>
               </a:ext>
             </a:extLst>
           </p:cNvPr>
@@ -15963,7 +15984,7 @@
           <p:cNvPr id="45" name="テキスト ボックス 44">
             <a:extLst>
               <a:ext uri="{FF2B5EF4-FFF2-40B4-BE49-F238E27FC236}">
-                <a16:creationId xmlns:a16="http://schemas.microsoft.com/office/drawing/2014/main" id="{8F94A9B9-DCFD-C1FE-16E3-2431C5C4B8EE}"/>
+                <a16:creationId xmlns:a16="http://schemas.microsoft.com/office/drawing/2014/main" id="{92842C5B-BAC5-5E6A-4AEB-1E60C81AE087}"/>
               </a:ext>
             </a:extLst>
           </p:cNvPr>
@@ -16004,7 +16025,7 @@
           <p:cNvPr id="46" name="正方形/長方形 45">
             <a:extLst>
               <a:ext uri="{FF2B5EF4-FFF2-40B4-BE49-F238E27FC236}">
-                <a16:creationId xmlns:a16="http://schemas.microsoft.com/office/drawing/2014/main" id="{218F8976-F0BD-7986-1607-F82CBE5F2380}"/>
+                <a16:creationId xmlns:a16="http://schemas.microsoft.com/office/drawing/2014/main" id="{467B1BBD-083D-5833-0FCC-F36DD281FB2E}"/>
               </a:ext>
             </a:extLst>
           </p:cNvPr>
@@ -16058,7 +16079,7 @@
           <p:cNvPr id="47" name="テキスト ボックス 46">
             <a:extLst>
               <a:ext uri="{FF2B5EF4-FFF2-40B4-BE49-F238E27FC236}">
-                <a16:creationId xmlns:a16="http://schemas.microsoft.com/office/drawing/2014/main" id="{D2920966-8E50-BBE3-9E25-A43B0B8E9FBC}"/>
+                <a16:creationId xmlns:a16="http://schemas.microsoft.com/office/drawing/2014/main" id="{AE8A5051-3A42-E2E2-BAD2-CD062F59985E}"/>
               </a:ext>
             </a:extLst>
           </p:cNvPr>
@@ -16105,7 +16126,7 @@
           <p:cNvPr id="48" name="正方形/長方形 47">
             <a:extLst>
               <a:ext uri="{FF2B5EF4-FFF2-40B4-BE49-F238E27FC236}">
-                <a16:creationId xmlns:a16="http://schemas.microsoft.com/office/drawing/2014/main" id="{F1B1D36B-914F-99AD-CC05-38C70F9DB818}"/>
+                <a16:creationId xmlns:a16="http://schemas.microsoft.com/office/drawing/2014/main" id="{68730306-254C-6379-AA0F-B3328702A5EC}"/>
               </a:ext>
             </a:extLst>
           </p:cNvPr>
@@ -16159,7 +16180,7 @@
           <p:cNvPr id="49" name="テキスト ボックス 48">
             <a:extLst>
               <a:ext uri="{FF2B5EF4-FFF2-40B4-BE49-F238E27FC236}">
-                <a16:creationId xmlns:a16="http://schemas.microsoft.com/office/drawing/2014/main" id="{0F60461F-C926-F0A8-2A4F-A1C3C3E452BE}"/>
+                <a16:creationId xmlns:a16="http://schemas.microsoft.com/office/drawing/2014/main" id="{D97FC614-CC41-B7C8-78D9-727790B427EF}"/>
               </a:ext>
             </a:extLst>
           </p:cNvPr>
@@ -16200,7 +16221,7 @@
           <p:cNvPr id="50" name="正方形/長方形 49">
             <a:extLst>
               <a:ext uri="{FF2B5EF4-FFF2-40B4-BE49-F238E27FC236}">
-                <a16:creationId xmlns:a16="http://schemas.microsoft.com/office/drawing/2014/main" id="{1802B67A-992B-622D-C5CA-920AF3511430}"/>
+                <a16:creationId xmlns:a16="http://schemas.microsoft.com/office/drawing/2014/main" id="{E5A60E98-4896-4594-7A09-64FCC6E5DC93}"/>
               </a:ext>
             </a:extLst>
           </p:cNvPr>
@@ -16254,7 +16275,7 @@
           <p:cNvPr id="51" name="テキスト ボックス 50">
             <a:extLst>
               <a:ext uri="{FF2B5EF4-FFF2-40B4-BE49-F238E27FC236}">
-                <a16:creationId xmlns:a16="http://schemas.microsoft.com/office/drawing/2014/main" id="{6EF208A2-2A10-F004-255E-F84E2D85B39B}"/>
+                <a16:creationId xmlns:a16="http://schemas.microsoft.com/office/drawing/2014/main" id="{0AEE7B4F-B723-D310-C06D-03F1D06A883C}"/>
               </a:ext>
             </a:extLst>
           </p:cNvPr>
@@ -16301,7 +16322,7 @@
           <p:cNvPr id="52" name="正方形/長方形 51">
             <a:extLst>
               <a:ext uri="{FF2B5EF4-FFF2-40B4-BE49-F238E27FC236}">
-                <a16:creationId xmlns:a16="http://schemas.microsoft.com/office/drawing/2014/main" id="{95EBE713-72A6-34AA-EC13-6229D57FFB25}"/>
+                <a16:creationId xmlns:a16="http://schemas.microsoft.com/office/drawing/2014/main" id="{58719D56-034E-3C1B-D97B-CA4539113CA5}"/>
               </a:ext>
             </a:extLst>
           </p:cNvPr>
@@ -16355,7 +16376,7 @@
           <p:cNvPr id="53" name="テキスト ボックス 52">
             <a:extLst>
               <a:ext uri="{FF2B5EF4-FFF2-40B4-BE49-F238E27FC236}">
-                <a16:creationId xmlns:a16="http://schemas.microsoft.com/office/drawing/2014/main" id="{5D4B65A1-DEA6-D5A0-C5A2-099B431D7D26}"/>
+                <a16:creationId xmlns:a16="http://schemas.microsoft.com/office/drawing/2014/main" id="{B18D1114-6B7B-ED5E-D736-EBDB23CCA69B}"/>
               </a:ext>
             </a:extLst>
           </p:cNvPr>
@@ -16396,7 +16417,7 @@
           <p:cNvPr id="54" name="正方形/長方形 53">
             <a:extLst>
               <a:ext uri="{FF2B5EF4-FFF2-40B4-BE49-F238E27FC236}">
-                <a16:creationId xmlns:a16="http://schemas.microsoft.com/office/drawing/2014/main" id="{BF8463DF-651C-AFE7-6FA4-4C8285C15879}"/>
+                <a16:creationId xmlns:a16="http://schemas.microsoft.com/office/drawing/2014/main" id="{15E86B27-A267-80E4-0776-4735F0103FDF}"/>
               </a:ext>
             </a:extLst>
           </p:cNvPr>
@@ -16450,7 +16471,7 @@
           <p:cNvPr id="55" name="楕円 54">
             <a:extLst>
               <a:ext uri="{FF2B5EF4-FFF2-40B4-BE49-F238E27FC236}">
-                <a16:creationId xmlns:a16="http://schemas.microsoft.com/office/drawing/2014/main" id="{D4DD36E3-A7DF-DFA3-3EB0-8127265FC15A}"/>
+                <a16:creationId xmlns:a16="http://schemas.microsoft.com/office/drawing/2014/main" id="{ABCBA079-D082-6D84-7BC4-A20A390F4386}"/>
               </a:ext>
             </a:extLst>
           </p:cNvPr>
@@ -16518,7 +16539,7 @@
           <p:cNvPr id="56" name="テキスト ボックス 55">
             <a:extLst>
               <a:ext uri="{FF2B5EF4-FFF2-40B4-BE49-F238E27FC236}">
-                <a16:creationId xmlns:a16="http://schemas.microsoft.com/office/drawing/2014/main" id="{94D60445-8DA5-8681-ECA8-A116A152DDDD}"/>
+                <a16:creationId xmlns:a16="http://schemas.microsoft.com/office/drawing/2014/main" id="{881B3DF9-9B94-E3EC-A2F5-E6DF05A8A8FF}"/>
               </a:ext>
             </a:extLst>
           </p:cNvPr>
@@ -16564,7 +16585,7 @@
           <p:cNvPr id="57" name="正方形/長方形 56">
             <a:extLst>
               <a:ext uri="{FF2B5EF4-FFF2-40B4-BE49-F238E27FC236}">
-                <a16:creationId xmlns:a16="http://schemas.microsoft.com/office/drawing/2014/main" id="{CAFAC87A-AE3F-9D07-F7FC-D32C68C9B61C}"/>
+                <a16:creationId xmlns:a16="http://schemas.microsoft.com/office/drawing/2014/main" id="{1C7BC68C-2C59-35A6-9A32-628D660B0DAF}"/>
               </a:ext>
             </a:extLst>
           </p:cNvPr>
@@ -16618,7 +16639,7 @@
           <p:cNvPr id="58" name="テキスト ボックス 57">
             <a:extLst>
               <a:ext uri="{FF2B5EF4-FFF2-40B4-BE49-F238E27FC236}">
-                <a16:creationId xmlns:a16="http://schemas.microsoft.com/office/drawing/2014/main" id="{6F052F8A-8E7C-4EBB-D179-F0BB7A663378}"/>
+                <a16:creationId xmlns:a16="http://schemas.microsoft.com/office/drawing/2014/main" id="{7DF6FAE1-2BE9-353B-7984-BA0AD6DC1F69}"/>
               </a:ext>
             </a:extLst>
           </p:cNvPr>
@@ -16659,7 +16680,7 @@
           <p:cNvPr id="59" name="正方形/長方形 58">
             <a:extLst>
               <a:ext uri="{FF2B5EF4-FFF2-40B4-BE49-F238E27FC236}">
-                <a16:creationId xmlns:a16="http://schemas.microsoft.com/office/drawing/2014/main" id="{EA795D6D-710B-3760-7AE5-EDB641F59D1B}"/>
+                <a16:creationId xmlns:a16="http://schemas.microsoft.com/office/drawing/2014/main" id="{09EBAC4E-D2F4-55C4-6906-319F453C1989}"/>
               </a:ext>
             </a:extLst>
           </p:cNvPr>
@@ -16713,7 +16734,7 @@
           <p:cNvPr id="60" name="テキスト ボックス 59">
             <a:extLst>
               <a:ext uri="{FF2B5EF4-FFF2-40B4-BE49-F238E27FC236}">
-                <a16:creationId xmlns:a16="http://schemas.microsoft.com/office/drawing/2014/main" id="{BE88E770-7492-B9D1-41AF-32E803DE2ACC}"/>
+                <a16:creationId xmlns:a16="http://schemas.microsoft.com/office/drawing/2014/main" id="{926C1BBE-35B0-4554-0064-DEE962D0D2A7}"/>
               </a:ext>
             </a:extLst>
           </p:cNvPr>
@@ -16760,7 +16781,7 @@
           <p:cNvPr id="61" name="正方形/長方形 60">
             <a:extLst>
               <a:ext uri="{FF2B5EF4-FFF2-40B4-BE49-F238E27FC236}">
-                <a16:creationId xmlns:a16="http://schemas.microsoft.com/office/drawing/2014/main" id="{905A38CF-1425-3ED3-AE00-02D97D82E6DA}"/>
+                <a16:creationId xmlns:a16="http://schemas.microsoft.com/office/drawing/2014/main" id="{5E18831E-5FDF-B9DF-BE03-141139B51386}"/>
               </a:ext>
             </a:extLst>
           </p:cNvPr>
@@ -16814,7 +16835,7 @@
           <p:cNvPr id="62" name="テキスト ボックス 61">
             <a:extLst>
               <a:ext uri="{FF2B5EF4-FFF2-40B4-BE49-F238E27FC236}">
-                <a16:creationId xmlns:a16="http://schemas.microsoft.com/office/drawing/2014/main" id="{EC85C6BE-29DA-9248-573B-A23EFDF5A438}"/>
+                <a16:creationId xmlns:a16="http://schemas.microsoft.com/office/drawing/2014/main" id="{9E9D7720-618F-205A-11F0-77B77EEE1217}"/>
               </a:ext>
             </a:extLst>
           </p:cNvPr>
@@ -16855,7 +16876,7 @@
           <p:cNvPr id="63" name="正方形/長方形 62">
             <a:extLst>
               <a:ext uri="{FF2B5EF4-FFF2-40B4-BE49-F238E27FC236}">
-                <a16:creationId xmlns:a16="http://schemas.microsoft.com/office/drawing/2014/main" id="{BBD8EE76-6CCE-CC30-F493-1EDB52C5FE51}"/>
+                <a16:creationId xmlns:a16="http://schemas.microsoft.com/office/drawing/2014/main" id="{9E848B51-A3F3-E718-1FC7-AE8157F7FBCF}"/>
               </a:ext>
             </a:extLst>
           </p:cNvPr>
@@ -16909,7 +16930,7 @@
           <p:cNvPr id="64" name="テキスト ボックス 63">
             <a:extLst>
               <a:ext uri="{FF2B5EF4-FFF2-40B4-BE49-F238E27FC236}">
-                <a16:creationId xmlns:a16="http://schemas.microsoft.com/office/drawing/2014/main" id="{3BD50671-7490-D305-DBAF-9DAA8F8E81DA}"/>
+                <a16:creationId xmlns:a16="http://schemas.microsoft.com/office/drawing/2014/main" id="{F0AD5121-22B1-05CF-2564-63D439BA59A0}"/>
               </a:ext>
             </a:extLst>
           </p:cNvPr>
@@ -16956,7 +16977,7 @@
           <p:cNvPr id="65" name="正方形/長方形 64">
             <a:extLst>
               <a:ext uri="{FF2B5EF4-FFF2-40B4-BE49-F238E27FC236}">
-                <a16:creationId xmlns:a16="http://schemas.microsoft.com/office/drawing/2014/main" id="{A37268C6-3237-CD2E-56A8-A9BD265343E5}"/>
+                <a16:creationId xmlns:a16="http://schemas.microsoft.com/office/drawing/2014/main" id="{C114CD80-3BC5-0C58-DF3D-62D54A90F824}"/>
               </a:ext>
             </a:extLst>
           </p:cNvPr>
@@ -17010,7 +17031,7 @@
           <p:cNvPr id="66" name="テキスト ボックス 65">
             <a:extLst>
               <a:ext uri="{FF2B5EF4-FFF2-40B4-BE49-F238E27FC236}">
-                <a16:creationId xmlns:a16="http://schemas.microsoft.com/office/drawing/2014/main" id="{652302DB-F4F6-4676-0134-35695D6A46B1}"/>
+                <a16:creationId xmlns:a16="http://schemas.microsoft.com/office/drawing/2014/main" id="{75532524-0E41-BD9D-7747-893DB5A0B4CF}"/>
               </a:ext>
             </a:extLst>
           </p:cNvPr>
@@ -17051,7 +17072,7 @@
           <p:cNvPr id="67" name="テキスト ボックス 66">
             <a:extLst>
               <a:ext uri="{FF2B5EF4-FFF2-40B4-BE49-F238E27FC236}">
-                <a16:creationId xmlns:a16="http://schemas.microsoft.com/office/drawing/2014/main" id="{C7A433FD-BEF3-8733-F1BB-7780B1978F6D}"/>
+                <a16:creationId xmlns:a16="http://schemas.microsoft.com/office/drawing/2014/main" id="{CA0F0BB8-D2E1-0160-6D9D-14BCCC91F7EE}"/>
               </a:ext>
             </a:extLst>
           </p:cNvPr>
@@ -17224,7 +17245,7 @@
     </p:spTree>
     <p:extLst>
       <p:ext uri="{BB962C8B-B14F-4D97-AF65-F5344CB8AC3E}">
-        <p14:creationId xmlns:p14="http://schemas.microsoft.com/office/powerpoint/2010/main" val="3957933585"/>
+        <p14:creationId xmlns:p14="http://schemas.microsoft.com/office/powerpoint/2010/main" val="1736185725"/>
       </p:ext>
     </p:extLst>
   </p:cSld>
@@ -17264,7 +17285,7 @@
           <p:cNvPr id="2" name="四角形: 角を丸くする 1">
             <a:extLst>
               <a:ext uri="{FF2B5EF4-FFF2-40B4-BE49-F238E27FC236}">
-                <a16:creationId xmlns:a16="http://schemas.microsoft.com/office/drawing/2014/main" id="{4811805B-708E-982C-F67B-57E33AFF8EB4}"/>
+                <a16:creationId xmlns:a16="http://schemas.microsoft.com/office/drawing/2014/main" id="{5CC86FF6-5EE1-35A5-5233-2A4D1DCEA712}"/>
               </a:ext>
             </a:extLst>
           </p:cNvPr>
@@ -17332,7 +17353,7 @@
           <p:cNvPr id="3" name="テキスト ボックス 2">
             <a:extLst>
               <a:ext uri="{FF2B5EF4-FFF2-40B4-BE49-F238E27FC236}">
-                <a16:creationId xmlns:a16="http://schemas.microsoft.com/office/drawing/2014/main" id="{002C8C3A-8D44-0E39-6CFB-7C78DF876938}"/>
+                <a16:creationId xmlns:a16="http://schemas.microsoft.com/office/drawing/2014/main" id="{958F2B36-CC25-B345-BBC3-45E98DB767B4}"/>
               </a:ext>
             </a:extLst>
           </p:cNvPr>
@@ -17356,14 +17377,20 @@
           <a:lstStyle/>
           <a:p>
             <a:r>
-              <a:rPr kumimoji="1" lang="ja-JP" altLang="en-US" sz="2000" b="1">
+              <a:rPr kumimoji="1" lang="zh-TW" altLang="en-US" sz="2000" b="1">
                 <a:solidFill>
                   <a:srgbClr val="FFFFFF"/>
                 </a:solidFill>
                 <a:latin typeface="Meiryo" panose="020B0604030504040204" pitchFamily="50" charset="-128"/>
               </a:rPr>
-              <a:t>名古屋市立 北高校　①基本</a:t>
-            </a:r>
+              <a:t>愛知県立 名古屋西高校　①基本</a:t>
+            </a:r>
+            <a:endParaRPr kumimoji="1" lang="ja-JP" altLang="en-US" sz="2000" b="1">
+              <a:solidFill>
+                <a:srgbClr val="FFFFFF"/>
+              </a:solidFill>
+              <a:latin typeface="Meiryo" panose="020B0604030504040204" pitchFamily="50" charset="-128"/>
+            </a:endParaRPr>
           </a:p>
         </p:txBody>
       </p:sp>
@@ -17372,7 +17399,7 @@
           <p:cNvPr id="4" name="テキスト ボックス 3">
             <a:extLst>
               <a:ext uri="{FF2B5EF4-FFF2-40B4-BE49-F238E27FC236}">
-                <a16:creationId xmlns:a16="http://schemas.microsoft.com/office/drawing/2014/main" id="{FE36C018-67AC-E97F-94CE-C9D2FD57065D}"/>
+                <a16:creationId xmlns:a16="http://schemas.microsoft.com/office/drawing/2014/main" id="{0EA73867-9DAF-DAF5-700D-F63CF516E32B}"/>
               </a:ext>
             </a:extLst>
           </p:cNvPr>
@@ -17402,8 +17429,41 @@
                 </a:solidFill>
                 <a:latin typeface="Meiryo" panose="020B0604030504040204" pitchFamily="50" charset="-128"/>
               </a:rPr>
-              <a:t>名古屋市北区如来町／自宅と同じ北区＝最短</a:t>
-            </a:r>
+              <a:t>名古屋市西区天神山町／評判◎の伝統校</a:t>
+            </a:r>
+            <a:r>
+              <a:rPr kumimoji="1" lang="en-US" altLang="ja-JP" sz="1300">
+                <a:solidFill>
+                  <a:srgbClr val="6B7280"/>
+                </a:solidFill>
+                <a:latin typeface="Meiryo" panose="020B0604030504040204" pitchFamily="50" charset="-128"/>
+              </a:rPr>
+              <a:t>(</a:t>
+            </a:r>
+            <a:r>
+              <a:rPr kumimoji="1" lang="ja-JP" altLang="en-US" sz="1300">
+                <a:solidFill>
+                  <a:srgbClr val="6B7280"/>
+                </a:solidFill>
+                <a:latin typeface="Meiryo" panose="020B0604030504040204" pitchFamily="50" charset="-128"/>
+              </a:rPr>
+              <a:t>共学</a:t>
+            </a:r>
+            <a:r>
+              <a:rPr kumimoji="1" lang="en-US" altLang="ja-JP" sz="1300">
+                <a:solidFill>
+                  <a:srgbClr val="6B7280"/>
+                </a:solidFill>
+                <a:latin typeface="Meiryo" panose="020B0604030504040204" pitchFamily="50" charset="-128"/>
+              </a:rPr>
+              <a:t>)</a:t>
+            </a:r>
+            <a:endParaRPr kumimoji="1" lang="ja-JP" altLang="en-US" sz="1300">
+              <a:solidFill>
+                <a:srgbClr val="6B7280"/>
+              </a:solidFill>
+              <a:latin typeface="Meiryo" panose="020B0604030504040204" pitchFamily="50" charset="-128"/>
+            </a:endParaRPr>
           </a:p>
         </p:txBody>
       </p:sp>
@@ -17412,7 +17472,7 @@
           <p:cNvPr id="5" name="四角形: 角を丸くする 4">
             <a:extLst>
               <a:ext uri="{FF2B5EF4-FFF2-40B4-BE49-F238E27FC236}">
-                <a16:creationId xmlns:a16="http://schemas.microsoft.com/office/drawing/2014/main" id="{DA73E27E-C405-9838-BB51-E752E0CCDD3F}"/>
+                <a16:creationId xmlns:a16="http://schemas.microsoft.com/office/drawing/2014/main" id="{507CE401-3D3E-7A5B-7F8D-859BF71FF178}"/>
               </a:ext>
             </a:extLst>
           </p:cNvPr>
@@ -17466,7 +17526,7 @@
           <p:cNvPr id="6" name="テキスト ボックス 5">
             <a:extLst>
               <a:ext uri="{FF2B5EF4-FFF2-40B4-BE49-F238E27FC236}">
-                <a16:creationId xmlns:a16="http://schemas.microsoft.com/office/drawing/2014/main" id="{1EE88595-3A5D-D6C9-58F9-656DF26F17E4}"/>
+                <a16:creationId xmlns:a16="http://schemas.microsoft.com/office/drawing/2014/main" id="{6B80FFB7-200F-BD38-E2AA-68994D2C9E9A}"/>
               </a:ext>
             </a:extLst>
           </p:cNvPr>
@@ -17507,7 +17567,7 @@
           <p:cNvPr id="7" name="テキスト ボックス 6">
             <a:extLst>
               <a:ext uri="{FF2B5EF4-FFF2-40B4-BE49-F238E27FC236}">
-                <a16:creationId xmlns:a16="http://schemas.microsoft.com/office/drawing/2014/main" id="{301B1821-9756-C52E-15C0-7C7706A3D512}"/>
+                <a16:creationId xmlns:a16="http://schemas.microsoft.com/office/drawing/2014/main" id="{15E21898-49D6-3A94-CC97-44143CC6D1FF}"/>
               </a:ext>
             </a:extLst>
           </p:cNvPr>
@@ -17538,7 +17598,7 @@
                 </a:solidFill>
                 <a:latin typeface="Meiryo" panose="020B0604030504040204" pitchFamily="50" charset="-128"/>
               </a:rPr>
-              <a:t>50</a:t>
+              <a:t>60</a:t>
             </a:r>
             <a:endParaRPr kumimoji="1" lang="ja-JP" altLang="en-US" sz="2600" b="1">
               <a:solidFill>
@@ -17554,7 +17614,7 @@
           <p:cNvPr id="8" name="テキスト ボックス 7">
             <a:extLst>
               <a:ext uri="{FF2B5EF4-FFF2-40B4-BE49-F238E27FC236}">
-                <a16:creationId xmlns:a16="http://schemas.microsoft.com/office/drawing/2014/main" id="{F8E7A920-117E-1903-0F5A-45345405CB24}"/>
+                <a16:creationId xmlns:a16="http://schemas.microsoft.com/office/drawing/2014/main" id="{EC026625-2FE2-E8B3-0C83-542F9132B211}"/>
               </a:ext>
             </a:extLst>
           </p:cNvPr>
@@ -17579,65 +17639,14 @@
           <a:p>
             <a:pPr algn="ctr"/>
             <a:r>
-              <a:rPr kumimoji="1" lang="zh-TW" altLang="en-US" sz="1000">
+              <a:rPr kumimoji="1" lang="ja-JP" altLang="en-US" sz="1000">
                 <a:solidFill>
                   <a:srgbClr val="6B7280"/>
                 </a:solidFill>
                 <a:latin typeface="Meiryo" panose="020B0604030504040204" pitchFamily="50" charset="-128"/>
               </a:rPr>
-              <a:t>普通科</a:t>
-            </a:r>
-            <a:r>
-              <a:rPr kumimoji="1" lang="en-US" altLang="zh-TW" sz="1000">
-                <a:solidFill>
-                  <a:srgbClr val="6B7280"/>
-                </a:solidFill>
-                <a:latin typeface="Meiryo" panose="020B0604030504040204" pitchFamily="50" charset="-128"/>
-              </a:rPr>
-              <a:t>(</a:t>
-            </a:r>
-            <a:r>
-              <a:rPr kumimoji="1" lang="zh-TW" altLang="en-US" sz="1000">
-                <a:solidFill>
-                  <a:srgbClr val="6B7280"/>
-                </a:solidFill>
-                <a:latin typeface="Meiryo" panose="020B0604030504040204" pitchFamily="50" charset="-128"/>
-              </a:rPr>
-              <a:t>特進</a:t>
-            </a:r>
-            <a:r>
-              <a:rPr kumimoji="1" lang="en-US" altLang="zh-TW" sz="1000">
-                <a:solidFill>
-                  <a:srgbClr val="6B7280"/>
-                </a:solidFill>
-                <a:latin typeface="Meiryo" panose="020B0604030504040204" pitchFamily="50" charset="-128"/>
-              </a:rPr>
-              <a:t>/</a:t>
-            </a:r>
-            <a:r>
-              <a:rPr kumimoji="1" lang="zh-TW" altLang="en-US" sz="1000">
-                <a:solidFill>
-                  <a:srgbClr val="6B7280"/>
-                </a:solidFill>
-                <a:latin typeface="Meiryo" panose="020B0604030504040204" pitchFamily="50" charset="-128"/>
-              </a:rPr>
-              <a:t>国際理解</a:t>
-            </a:r>
-            <a:r>
-              <a:rPr kumimoji="1" lang="en-US" altLang="zh-TW" sz="1000">
-                <a:solidFill>
-                  <a:srgbClr val="6B7280"/>
-                </a:solidFill>
-                <a:latin typeface="Meiryo" panose="020B0604030504040204" pitchFamily="50" charset="-128"/>
-              </a:rPr>
-              <a:t>)</a:t>
-            </a:r>
-            <a:endParaRPr kumimoji="1" lang="ja-JP" altLang="en-US" sz="1000">
-              <a:solidFill>
-                <a:srgbClr val="6B7280"/>
-              </a:solidFill>
-              <a:latin typeface="Meiryo" panose="020B0604030504040204" pitchFamily="50" charset="-128"/>
-            </a:endParaRPr>
+              <a:t>普通科＋創造表現コース</a:t>
+            </a:r>
           </a:p>
         </p:txBody>
       </p:sp>
@@ -17646,7 +17655,7 @@
           <p:cNvPr id="9" name="四角形: 角を丸くする 8">
             <a:extLst>
               <a:ext uri="{FF2B5EF4-FFF2-40B4-BE49-F238E27FC236}">
-                <a16:creationId xmlns:a16="http://schemas.microsoft.com/office/drawing/2014/main" id="{3068BDA6-0818-0D63-C7B7-B602DA79EB0E}"/>
+                <a16:creationId xmlns:a16="http://schemas.microsoft.com/office/drawing/2014/main" id="{5782A14C-F9FB-BB9B-59CB-A8885FCAF494}"/>
               </a:ext>
             </a:extLst>
           </p:cNvPr>
@@ -17714,7 +17723,7 @@
           <p:cNvPr id="10" name="テキスト ボックス 9">
             <a:extLst>
               <a:ext uri="{FF2B5EF4-FFF2-40B4-BE49-F238E27FC236}">
-                <a16:creationId xmlns:a16="http://schemas.microsoft.com/office/drawing/2014/main" id="{25163242-4CEB-15D0-28F7-BE4FD51CA4EC}"/>
+                <a16:creationId xmlns:a16="http://schemas.microsoft.com/office/drawing/2014/main" id="{E1AC0A8D-2FF3-824D-F841-6C8776457D76}"/>
               </a:ext>
             </a:extLst>
           </p:cNvPr>
@@ -17745,7 +17754,7 @@
                 </a:solidFill>
                 <a:latin typeface="Meiryo" panose="020B0604030504040204" pitchFamily="50" charset="-128"/>
               </a:rPr>
-              <a:t>国際理解コースあり</a:t>
+              <a:t>評判◎・国公立に強い</a:t>
             </a:r>
           </a:p>
         </p:txBody>
@@ -17755,7 +17764,7 @@
           <p:cNvPr id="12" name="図 11">
             <a:extLst>
               <a:ext uri="{FF2B5EF4-FFF2-40B4-BE49-F238E27FC236}">
-                <a16:creationId xmlns:a16="http://schemas.microsoft.com/office/drawing/2014/main" id="{6BB051CD-F7D1-21F8-F6E0-4EC1648312FB}"/>
+                <a16:creationId xmlns:a16="http://schemas.microsoft.com/office/drawing/2014/main" id="{E32C166A-BF3A-3B30-DBC0-34834FB877AC}"/>
               </a:ext>
             </a:extLst>
           </p:cNvPr>
@@ -17778,8 +17787,8 @@
         </p:blipFill>
         <p:spPr>
           <a:xfrm>
-            <a:off x="8712200" y="1831975"/>
-            <a:ext cx="2971800" cy="2228850"/>
+            <a:off x="9080500" y="1828800"/>
+            <a:ext cx="2235200" cy="2235200"/>
           </a:xfrm>
           <a:prstGeom prst="rect">
             <a:avLst/>
@@ -17796,7 +17805,7 @@
           <p:cNvPr id="13" name="テキスト ボックス 12">
             <a:extLst>
               <a:ext uri="{FF2B5EF4-FFF2-40B4-BE49-F238E27FC236}">
-                <a16:creationId xmlns:a16="http://schemas.microsoft.com/office/drawing/2014/main" id="{92307D3C-424A-F07F-63EF-D82E34E3E97F}"/>
+                <a16:creationId xmlns:a16="http://schemas.microsoft.com/office/drawing/2014/main" id="{C7CD789C-8359-5EB2-5269-5EDE84298716}"/>
               </a:ext>
             </a:extLst>
           </p:cNvPr>
@@ -17806,7 +17815,7 @@
         <p:spPr>
           <a:xfrm>
             <a:off x="8712200" y="4089400"/>
-            <a:ext cx="2971800" cy="164148"/>
+            <a:ext cx="2971800" cy="302647"/>
           </a:xfrm>
           <a:prstGeom prst="rect">
             <a:avLst/>
@@ -17821,47 +17830,14 @@
           <a:p>
             <a:pPr algn="ctr"/>
             <a:r>
-              <a:rPr kumimoji="1" lang="zh-CN" altLang="en-US" sz="900">
+              <a:rPr kumimoji="1" lang="ja-JP" altLang="en-US" sz="900">
                 <a:solidFill>
                   <a:srgbClr val="6B7280"/>
                 </a:solidFill>
                 <a:latin typeface="Meiryo" panose="020B0604030504040204" pitchFamily="50" charset="-128"/>
               </a:rPr>
-              <a:t>制服（参考写真）出典：</a:t>
-            </a:r>
-            <a:r>
-              <a:rPr kumimoji="1" lang="en-US" altLang="zh-CN" sz="900">
-                <a:solidFill>
-                  <a:srgbClr val="6B7280"/>
-                </a:solidFill>
-                <a:latin typeface="Meiryo" panose="020B0604030504040204" pitchFamily="50" charset="-128"/>
-              </a:rPr>
-              <a:t>A-</a:t>
-            </a:r>
-            <a:r>
-              <a:rPr kumimoji="1" lang="zh-CN" altLang="en-US" sz="900">
-                <a:solidFill>
-                  <a:srgbClr val="6B7280"/>
-                </a:solidFill>
-                <a:latin typeface="Meiryo" panose="020B0604030504040204" pitchFamily="50" charset="-128"/>
-              </a:rPr>
-              <a:t>制服店</a:t>
-            </a:r>
-            <a:r>
-              <a:rPr kumimoji="1" lang="en-US" altLang="zh-CN" sz="900">
-                <a:solidFill>
-                  <a:srgbClr val="6B7280"/>
-                </a:solidFill>
-                <a:latin typeface="Meiryo" panose="020B0604030504040204" pitchFamily="50" charset="-128"/>
-              </a:rPr>
-              <a:t>.com</a:t>
-            </a:r>
-            <a:endParaRPr kumimoji="1" lang="ja-JP" altLang="en-US" sz="900">
-              <a:solidFill>
-                <a:srgbClr val="6B7280"/>
-              </a:solidFill>
-              <a:latin typeface="Meiryo" panose="020B0604030504040204" pitchFamily="50" charset="-128"/>
-            </a:endParaRPr>
+              <a:t>制服＝黒リボンのセーラー服（参考写真）出典：制服市場</a:t>
+            </a:r>
           </a:p>
         </p:txBody>
       </p:sp>
@@ -17870,7 +17846,7 @@
           <p:cNvPr id="14" name="四角形: 角を丸くする 13">
             <a:extLst>
               <a:ext uri="{FF2B5EF4-FFF2-40B4-BE49-F238E27FC236}">
-                <a16:creationId xmlns:a16="http://schemas.microsoft.com/office/drawing/2014/main" id="{D6B7D808-C71A-4393-9B80-62A79ADD7921}"/>
+                <a16:creationId xmlns:a16="http://schemas.microsoft.com/office/drawing/2014/main" id="{D11A1226-F628-82AF-E356-D6D493A4B255}"/>
               </a:ext>
             </a:extLst>
           </p:cNvPr>
@@ -17938,7 +17914,7 @@
           <p:cNvPr id="15" name="テキスト ボックス 14">
             <a:extLst>
               <a:ext uri="{FF2B5EF4-FFF2-40B4-BE49-F238E27FC236}">
-                <a16:creationId xmlns:a16="http://schemas.microsoft.com/office/drawing/2014/main" id="{95070FF8-C94F-3DB7-0F64-5DF1DED0FF46}"/>
+                <a16:creationId xmlns:a16="http://schemas.microsoft.com/office/drawing/2014/main" id="{274C7482-937C-58CC-5C50-676C7DA127C8}"/>
               </a:ext>
             </a:extLst>
           </p:cNvPr>
@@ -17978,7 +17954,7 @@
           <p:cNvPr id="16" name="テキスト ボックス 15">
             <a:extLst>
               <a:ext uri="{FF2B5EF4-FFF2-40B4-BE49-F238E27FC236}">
-                <a16:creationId xmlns:a16="http://schemas.microsoft.com/office/drawing/2014/main" id="{C8F321ED-8FBD-F54F-161E-359109589453}"/>
+                <a16:creationId xmlns:a16="http://schemas.microsoft.com/office/drawing/2014/main" id="{C76B82A6-53C6-585B-205B-91DBAA9012FF}"/>
               </a:ext>
             </a:extLst>
           </p:cNvPr>
@@ -18008,7 +17984,7 @@
                 </a:solidFill>
                 <a:latin typeface="Meiryo" panose="020B0604030504040204" pitchFamily="50" charset="-128"/>
               </a:rPr>
-              <a:t>普通科。</a:t>
+              <a:t>普通科＋創造表現コース</a:t>
             </a:r>
             <a:r>
               <a:rPr kumimoji="1" lang="en-US" altLang="ja-JP" sz="1200">
@@ -18017,7 +17993,7 @@
                 </a:solidFill>
                 <a:latin typeface="Meiryo" panose="020B0604030504040204" pitchFamily="50" charset="-128"/>
               </a:rPr>
-              <a:t>2</a:t>
+              <a:t>(</a:t>
             </a:r>
             <a:r>
               <a:rPr kumimoji="1" lang="ja-JP" altLang="en-US" sz="1200">
@@ -18026,7 +18002,43 @@
                 </a:solidFill>
                 <a:latin typeface="Meiryo" panose="020B0604030504040204" pitchFamily="50" charset="-128"/>
               </a:rPr>
-              <a:t>年から特進コース／国際理解コース。国際理解は英語・留学プログラムが充実</a:t>
+              <a:t>演劇・ダンス・表現を学ぶ</a:t>
+            </a:r>
+            <a:r>
+              <a:rPr kumimoji="1" lang="en-US" altLang="ja-JP" sz="1200">
+                <a:solidFill>
+                  <a:srgbClr val="222B45"/>
+                </a:solidFill>
+                <a:latin typeface="Meiryo" panose="020B0604030504040204" pitchFamily="50" charset="-128"/>
+              </a:rPr>
+              <a:t>)</a:t>
+            </a:r>
+            <a:r>
+              <a:rPr kumimoji="1" lang="ja-JP" altLang="en-US" sz="1200">
+                <a:solidFill>
+                  <a:srgbClr val="222B45"/>
+                </a:solidFill>
+                <a:latin typeface="Meiryo" panose="020B0604030504040204" pitchFamily="50" charset="-128"/>
+              </a:rPr>
+              <a:t>。</a:t>
+            </a:r>
+            <a:r>
+              <a:rPr kumimoji="1" lang="en-US" altLang="ja-JP" sz="1200">
+                <a:solidFill>
+                  <a:srgbClr val="222B45"/>
+                </a:solidFill>
+                <a:latin typeface="Meiryo" panose="020B0604030504040204" pitchFamily="50" charset="-128"/>
+              </a:rPr>
+              <a:t>1915</a:t>
+            </a:r>
+            <a:r>
+              <a:rPr kumimoji="1" lang="ja-JP" altLang="en-US" sz="1200">
+                <a:solidFill>
+                  <a:srgbClr val="222B45"/>
+                </a:solidFill>
+                <a:latin typeface="Meiryo" panose="020B0604030504040204" pitchFamily="50" charset="-128"/>
+              </a:rPr>
+              <a:t>年創立の伝統校</a:t>
             </a:r>
           </a:p>
         </p:txBody>
@@ -18036,7 +18048,7 @@
           <p:cNvPr id="17" name="四角形: 角を丸くする 16">
             <a:extLst>
               <a:ext uri="{FF2B5EF4-FFF2-40B4-BE49-F238E27FC236}">
-                <a16:creationId xmlns:a16="http://schemas.microsoft.com/office/drawing/2014/main" id="{72A63A8C-FFCE-4FE1-F3B4-F1B89EC36BE4}"/>
+                <a16:creationId xmlns:a16="http://schemas.microsoft.com/office/drawing/2014/main" id="{16AEACF5-AB0F-62A9-4A94-8F1E840AB0DC}"/>
               </a:ext>
             </a:extLst>
           </p:cNvPr>
@@ -18104,7 +18116,7 @@
           <p:cNvPr id="18" name="テキスト ボックス 17">
             <a:extLst>
               <a:ext uri="{FF2B5EF4-FFF2-40B4-BE49-F238E27FC236}">
-                <a16:creationId xmlns:a16="http://schemas.microsoft.com/office/drawing/2014/main" id="{78D5012C-142D-FC76-223A-4D12C2F8E0B4}"/>
+                <a16:creationId xmlns:a16="http://schemas.microsoft.com/office/drawing/2014/main" id="{E4C05F33-968D-EEA0-BFEC-2EF4D9D9F039}"/>
               </a:ext>
             </a:extLst>
           </p:cNvPr>
@@ -18144,7 +18156,7 @@
           <p:cNvPr id="19" name="テキスト ボックス 18">
             <a:extLst>
               <a:ext uri="{FF2B5EF4-FFF2-40B4-BE49-F238E27FC236}">
-                <a16:creationId xmlns:a16="http://schemas.microsoft.com/office/drawing/2014/main" id="{D78E36F0-D206-45D0-F282-DAFD94256F8F}"/>
+                <a16:creationId xmlns:a16="http://schemas.microsoft.com/office/drawing/2014/main" id="{1690DED7-86F0-21FC-E9D9-A4D15041989C}"/>
               </a:ext>
             </a:extLst>
           </p:cNvPr>
@@ -18174,7 +18186,7 @@
                 </a:solidFill>
                 <a:latin typeface="Meiryo" panose="020B0604030504040204" pitchFamily="50" charset="-128"/>
               </a:rPr>
-              <a:t>大学進学が約</a:t>
+              <a:t>国公立に多数</a:t>
             </a:r>
             <a:r>
               <a:rPr kumimoji="1" lang="en-US" altLang="ja-JP" sz="1200">
@@ -18183,6 +18195,78 @@
                 </a:solidFill>
                 <a:latin typeface="Meiryo" panose="020B0604030504040204" pitchFamily="50" charset="-128"/>
               </a:rPr>
+              <a:t>(2025:</a:t>
+            </a:r>
+            <a:r>
+              <a:rPr kumimoji="1" lang="ja-JP" altLang="en-US" sz="1200">
+                <a:solidFill>
+                  <a:srgbClr val="222B45"/>
+                </a:solidFill>
+                <a:latin typeface="Meiryo" panose="020B0604030504040204" pitchFamily="50" charset="-128"/>
+              </a:rPr>
+              <a:t>愛知県立大</a:t>
+            </a:r>
+            <a:r>
+              <a:rPr kumimoji="1" lang="en-US" altLang="ja-JP" sz="1200">
+                <a:solidFill>
+                  <a:srgbClr val="222B45"/>
+                </a:solidFill>
+                <a:latin typeface="Meiryo" panose="020B0604030504040204" pitchFamily="50" charset="-128"/>
+              </a:rPr>
+              <a:t>12</a:t>
+            </a:r>
+            <a:r>
+              <a:rPr kumimoji="1" lang="ja-JP" altLang="en-US" sz="1200">
+                <a:solidFill>
+                  <a:srgbClr val="222B45"/>
+                </a:solidFill>
+                <a:latin typeface="Meiryo" panose="020B0604030504040204" pitchFamily="50" charset="-128"/>
+              </a:rPr>
+              <a:t>・名市大</a:t>
+            </a:r>
+            <a:r>
+              <a:rPr kumimoji="1" lang="en-US" altLang="ja-JP" sz="1200">
+                <a:solidFill>
+                  <a:srgbClr val="222B45"/>
+                </a:solidFill>
+                <a:latin typeface="Meiryo" panose="020B0604030504040204" pitchFamily="50" charset="-128"/>
+              </a:rPr>
+              <a:t>8</a:t>
+            </a:r>
+            <a:r>
+              <a:rPr kumimoji="1" lang="ja-JP" altLang="en-US" sz="1200">
+                <a:solidFill>
+                  <a:srgbClr val="222B45"/>
+                </a:solidFill>
+                <a:latin typeface="Meiryo" panose="020B0604030504040204" pitchFamily="50" charset="-128"/>
+              </a:rPr>
+              <a:t>・三重大</a:t>
+            </a:r>
+            <a:r>
+              <a:rPr kumimoji="1" lang="en-US" altLang="ja-JP" sz="1200">
+                <a:solidFill>
+                  <a:srgbClr val="222B45"/>
+                </a:solidFill>
+                <a:latin typeface="Meiryo" panose="020B0604030504040204" pitchFamily="50" charset="-128"/>
+              </a:rPr>
+              <a:t>8</a:t>
+            </a:r>
+            <a:r>
+              <a:rPr kumimoji="1" lang="ja-JP" altLang="en-US" sz="1200">
+                <a:solidFill>
+                  <a:srgbClr val="222B45"/>
+                </a:solidFill>
+                <a:latin typeface="Meiryo" panose="020B0604030504040204" pitchFamily="50" charset="-128"/>
+              </a:rPr>
+              <a:t>・岐阜大</a:t>
+            </a:r>
+            <a:r>
+              <a:rPr kumimoji="1" lang="en-US" altLang="ja-JP" sz="1200">
+                <a:solidFill>
+                  <a:srgbClr val="222B45"/>
+                </a:solidFill>
+                <a:latin typeface="Meiryo" panose="020B0604030504040204" pitchFamily="50" charset="-128"/>
+              </a:rPr>
               <a:t>7</a:t>
             </a:r>
             <a:r>
@@ -18192,7 +18276,7 @@
                 </a:solidFill>
                 <a:latin typeface="Meiryo" panose="020B0604030504040204" pitchFamily="50" charset="-128"/>
               </a:rPr>
-              <a:t>割。地元国公立</a:t>
+              <a:t>・愛知教育大</a:t>
             </a:r>
             <a:r>
               <a:rPr kumimoji="1" lang="en-US" altLang="ja-JP" sz="1200">
@@ -18201,7 +18285,7 @@
                 </a:solidFill>
                 <a:latin typeface="Meiryo" panose="020B0604030504040204" pitchFamily="50" charset="-128"/>
               </a:rPr>
-              <a:t>(</a:t>
+              <a:t>6 </a:t>
             </a:r>
             <a:r>
               <a:rPr kumimoji="1" lang="ja-JP" altLang="en-US" sz="1200">
@@ -18210,7 +18294,7 @@
                 </a:solidFill>
                 <a:latin typeface="Meiryo" panose="020B0604030504040204" pitchFamily="50" charset="-128"/>
               </a:rPr>
-              <a:t>愛知教育大・名市大・愛知県立大</a:t>
+              <a:t>ほか</a:t>
             </a:r>
             <a:r>
               <a:rPr kumimoji="1" lang="en-US" altLang="ja-JP" sz="1200">
@@ -18228,7 +18312,7 @@
                 </a:solidFill>
                 <a:latin typeface="Meiryo" panose="020B0604030504040204" pitchFamily="50" charset="-128"/>
               </a:rPr>
-              <a:t>＋私大。音楽部が全国級</a:t>
+              <a:t>。陸上・作画研究部が活躍</a:t>
             </a:r>
           </a:p>
         </p:txBody>
@@ -18238,7 +18322,7 @@
           <p:cNvPr id="20" name="四角形: 角を丸くする 19">
             <a:extLst>
               <a:ext uri="{FF2B5EF4-FFF2-40B4-BE49-F238E27FC236}">
-                <a16:creationId xmlns:a16="http://schemas.microsoft.com/office/drawing/2014/main" id="{3EF95923-ED34-B4DA-37F7-440E97549A02}"/>
+                <a16:creationId xmlns:a16="http://schemas.microsoft.com/office/drawing/2014/main" id="{22B320E2-823C-1F42-3BF0-06AB65E1517F}"/>
               </a:ext>
             </a:extLst>
           </p:cNvPr>
@@ -18306,7 +18390,7 @@
           <p:cNvPr id="21" name="テキスト ボックス 20">
             <a:extLst>
               <a:ext uri="{FF2B5EF4-FFF2-40B4-BE49-F238E27FC236}">
-                <a16:creationId xmlns:a16="http://schemas.microsoft.com/office/drawing/2014/main" id="{2AAC9819-A561-2EC9-A0BC-C307D21FD1C1}"/>
+                <a16:creationId xmlns:a16="http://schemas.microsoft.com/office/drawing/2014/main" id="{62EFCF83-82DD-0C8A-BD83-38CFC0F4911D}"/>
               </a:ext>
             </a:extLst>
           </p:cNvPr>
@@ -18346,7 +18430,7 @@
           <p:cNvPr id="22" name="テキスト ボックス 21">
             <a:extLst>
               <a:ext uri="{FF2B5EF4-FFF2-40B4-BE49-F238E27FC236}">
-                <a16:creationId xmlns:a16="http://schemas.microsoft.com/office/drawing/2014/main" id="{E5B2B6C6-D345-0A36-0611-6EEC03A5B08F}"/>
+                <a16:creationId xmlns:a16="http://schemas.microsoft.com/office/drawing/2014/main" id="{87CE8ED8-3D93-4093-6307-318B7BF12309}"/>
               </a:ext>
             </a:extLst>
           </p:cNvPr>
@@ -18370,13 +18454,22 @@
           <a:lstStyle/>
           <a:p>
             <a:r>
+              <a:rPr kumimoji="1" lang="ja-JP" altLang="en-US" sz="1200">
+                <a:solidFill>
+                  <a:srgbClr val="222B45"/>
+                </a:solidFill>
+                <a:latin typeface="Meiryo" panose="020B0604030504040204" pitchFamily="50" charset="-128"/>
+              </a:rPr>
+              <a:t>地下鉄鶴舞線「浄心」駅 徒歩約</a:t>
+            </a:r>
+            <a:r>
               <a:rPr kumimoji="1" lang="en-US" altLang="ja-JP" sz="1200">
                 <a:solidFill>
                   <a:srgbClr val="222B45"/>
                 </a:solidFill>
                 <a:latin typeface="Meiryo" panose="020B0604030504040204" pitchFamily="50" charset="-128"/>
               </a:rPr>
-              <a:t>JR</a:t>
+              <a:t>10</a:t>
             </a:r>
             <a:r>
               <a:rPr kumimoji="1" lang="ja-JP" altLang="en-US" sz="1200">
@@ -18385,7 +18478,7 @@
                 </a:solidFill>
                 <a:latin typeface="Meiryo" panose="020B0604030504040204" pitchFamily="50" charset="-128"/>
               </a:rPr>
-              <a:t>城北線「比良」駅＋市バス。自宅</a:t>
+              <a:t>分</a:t>
             </a:r>
             <a:r>
               <a:rPr kumimoji="1" lang="en-US" altLang="ja-JP" sz="1200">
@@ -18403,7 +18496,7 @@
                 </a:solidFill>
                 <a:latin typeface="Meiryo" panose="020B0604030504040204" pitchFamily="50" charset="-128"/>
               </a:rPr>
-              <a:t>北区鳩岡</a:t>
+              <a:t>西区</a:t>
             </a:r>
             <a:r>
               <a:rPr kumimoji="1" lang="en-US" altLang="ja-JP" sz="1200">
@@ -18421,7 +18514,7 @@
                 </a:solidFill>
                 <a:latin typeface="Meiryo" panose="020B0604030504040204" pitchFamily="50" charset="-128"/>
               </a:rPr>
-              <a:t>から自転車約</a:t>
+              <a:t>。黒川→名城線→上前津→鶴舞線で約</a:t>
             </a:r>
             <a:r>
               <a:rPr kumimoji="1" lang="en-US" altLang="ja-JP" sz="1200">
@@ -18430,7 +18523,7 @@
                 </a:solidFill>
                 <a:latin typeface="Meiryo" panose="020B0604030504040204" pitchFamily="50" charset="-128"/>
               </a:rPr>
-              <a:t>15</a:t>
+              <a:t>30〜35</a:t>
             </a:r>
             <a:r>
               <a:rPr kumimoji="1" lang="ja-JP" altLang="en-US" sz="1200">
@@ -18439,7 +18532,7 @@
                 </a:solidFill>
                 <a:latin typeface="Meiryo" panose="020B0604030504040204" pitchFamily="50" charset="-128"/>
               </a:rPr>
-              <a:t>分／バス停</a:t>
+              <a:t>分／バス</a:t>
             </a:r>
             <a:r>
               <a:rPr kumimoji="1" lang="en-US" altLang="ja-JP" sz="1200">
@@ -18475,7 +18568,7 @@
                 </a:solidFill>
                 <a:latin typeface="Meiryo" panose="020B0604030504040204" pitchFamily="50" charset="-128"/>
               </a:rPr>
-              <a:t>も。市内同区で最短</a:t>
+              <a:t>も</a:t>
             </a:r>
             <a:r>
               <a:rPr kumimoji="1" lang="en-US" altLang="ja-JP" sz="1200">
@@ -18518,7 +18611,7 @@
           <p:cNvPr id="23" name="四角形: 角を丸くする 22">
             <a:extLst>
               <a:ext uri="{FF2B5EF4-FFF2-40B4-BE49-F238E27FC236}">
-                <a16:creationId xmlns:a16="http://schemas.microsoft.com/office/drawing/2014/main" id="{4E7B630B-C682-D5A8-2917-50E21401E83B}"/>
+                <a16:creationId xmlns:a16="http://schemas.microsoft.com/office/drawing/2014/main" id="{7A6AA16F-4D7F-A71C-5B1D-F9C27C0899FC}"/>
               </a:ext>
             </a:extLst>
           </p:cNvPr>
@@ -18586,7 +18679,7 @@
           <p:cNvPr id="24" name="テキスト ボックス 23">
             <a:extLst>
               <a:ext uri="{FF2B5EF4-FFF2-40B4-BE49-F238E27FC236}">
-                <a16:creationId xmlns:a16="http://schemas.microsoft.com/office/drawing/2014/main" id="{651D2CF7-0FE9-BA83-A99D-C14C9CFBF186}"/>
+                <a16:creationId xmlns:a16="http://schemas.microsoft.com/office/drawing/2014/main" id="{AE1FC953-3B29-2D54-4AE2-301F44C8D9A8}"/>
               </a:ext>
             </a:extLst>
           </p:cNvPr>
@@ -18626,7 +18719,7 @@
           <p:cNvPr id="25" name="テキスト ボックス 24">
             <a:extLst>
               <a:ext uri="{FF2B5EF4-FFF2-40B4-BE49-F238E27FC236}">
-                <a16:creationId xmlns:a16="http://schemas.microsoft.com/office/drawing/2014/main" id="{4DDFD753-270B-B920-5348-D7D633D5F296}"/>
+                <a16:creationId xmlns:a16="http://schemas.microsoft.com/office/drawing/2014/main" id="{BE980EEC-617D-C850-B503-29775944AC87}"/>
               </a:ext>
             </a:extLst>
           </p:cNvPr>
@@ -18635,7 +18728,7 @@
         </p:nvSpPr>
         <p:spPr>
           <a:xfrm>
-            <a:off x="2286000" y="3805366"/>
+            <a:off x="2286000" y="3805367"/>
             <a:ext cx="6146800" cy="210314"/>
           </a:xfrm>
           <a:prstGeom prst="rect">
@@ -18674,7 +18767,7 @@
                 </a:solidFill>
                 <a:latin typeface="Meiryo" panose="020B0604030504040204" pitchFamily="50" charset="-128"/>
               </a:rPr>
-              <a:t>専用食堂なし</a:t>
+              <a:t>食堂は要確認</a:t>
             </a:r>
             <a:r>
               <a:rPr kumimoji="1" lang="en-US" altLang="ja-JP" sz="1200">
@@ -18685,12 +18778,15 @@
               </a:rPr>
               <a:t>)</a:t>
             </a:r>
-            <a:endParaRPr kumimoji="1" lang="ja-JP" altLang="en-US" sz="1200">
-              <a:solidFill>
-                <a:srgbClr val="222B45"/>
-              </a:solidFill>
-              <a:latin typeface="Meiryo" panose="020B0604030504040204" pitchFamily="50" charset="-128"/>
-            </a:endParaRPr>
+            <a:r>
+              <a:rPr kumimoji="1" lang="ja-JP" altLang="en-US" sz="1200">
+                <a:solidFill>
+                  <a:srgbClr val="222B45"/>
+                </a:solidFill>
+                <a:latin typeface="Meiryo" panose="020B0604030504040204" pitchFamily="50" charset="-128"/>
+              </a:rPr>
+              <a:t>。黒リボンのセーラー服が人気</a:t>
+            </a:r>
           </a:p>
         </p:txBody>
       </p:sp>
@@ -18699,7 +18795,7 @@
           <p:cNvPr id="26" name="四角形: 角を丸くする 25">
             <a:extLst>
               <a:ext uri="{FF2B5EF4-FFF2-40B4-BE49-F238E27FC236}">
-                <a16:creationId xmlns:a16="http://schemas.microsoft.com/office/drawing/2014/main" id="{CB63AEC1-30EE-36AA-F155-4F6C66F599B3}"/>
+                <a16:creationId xmlns:a16="http://schemas.microsoft.com/office/drawing/2014/main" id="{29BF9363-3B76-8EB4-58F0-9029D5FA1906}"/>
               </a:ext>
             </a:extLst>
           </p:cNvPr>
@@ -18767,7 +18863,7 @@
           <p:cNvPr id="27" name="テキスト ボックス 26">
             <a:extLst>
               <a:ext uri="{FF2B5EF4-FFF2-40B4-BE49-F238E27FC236}">
-                <a16:creationId xmlns:a16="http://schemas.microsoft.com/office/drawing/2014/main" id="{341FA24B-23C2-7191-22CD-F92CC647E49B}"/>
+                <a16:creationId xmlns:a16="http://schemas.microsoft.com/office/drawing/2014/main" id="{7C06C3E0-730E-C2D9-C338-27310F092542}"/>
               </a:ext>
             </a:extLst>
           </p:cNvPr>
@@ -18879,7 +18975,7 @@
           <p:cNvPr id="28" name="四角形: 角を丸くする 27">
             <a:extLst>
               <a:ext uri="{FF2B5EF4-FFF2-40B4-BE49-F238E27FC236}">
-                <a16:creationId xmlns:a16="http://schemas.microsoft.com/office/drawing/2014/main" id="{338CC5C2-A6EA-6395-A1E6-8A6FD4A25AB8}"/>
+                <a16:creationId xmlns:a16="http://schemas.microsoft.com/office/drawing/2014/main" id="{B86C5695-40BE-A6B8-F5EE-A7F078C441F4}"/>
               </a:ext>
             </a:extLst>
           </p:cNvPr>
@@ -18947,7 +19043,7 @@
           <p:cNvPr id="29" name="テキスト ボックス 28">
             <a:extLst>
               <a:ext uri="{FF2B5EF4-FFF2-40B4-BE49-F238E27FC236}">
-                <a16:creationId xmlns:a16="http://schemas.microsoft.com/office/drawing/2014/main" id="{87E55F36-1A24-354C-A4B0-12B208ADB09A}"/>
+                <a16:creationId xmlns:a16="http://schemas.microsoft.com/office/drawing/2014/main" id="{14E5C5CF-54D6-2635-C317-E3D48B9BD33F}"/>
               </a:ext>
             </a:extLst>
           </p:cNvPr>
@@ -18978,7 +19074,7 @@
                 <a:latin typeface="Meiryo" panose="020B0604030504040204" pitchFamily="50" charset="-128"/>
                 <a:hlinkClick r:id="rId3"/>
               </a:rPr>
-              <a:t>▶ 北高校のくわしい情報（口コミ・偏差値・制服）はこちら（みんなの高校情報）</a:t>
+              <a:t>▶ 名古屋西高校のくわしい情報（口コミ・偏差値・制服）はこちら（みんなの高校情報）</a:t>
             </a:r>
             <a:endParaRPr kumimoji="1" lang="ja-JP" altLang="en-US" sz="1200">
               <a:solidFill>
@@ -18992,7 +19088,7 @@
     </p:spTree>
     <p:extLst>
       <p:ext uri="{BB962C8B-B14F-4D97-AF65-F5344CB8AC3E}">
-        <p14:creationId xmlns:p14="http://schemas.microsoft.com/office/powerpoint/2010/main" val="2137225571"/>
+        <p14:creationId xmlns:p14="http://schemas.microsoft.com/office/powerpoint/2010/main" val="286396517"/>
       </p:ext>
     </p:extLst>
   </p:cSld>
@@ -19032,7 +19128,7 @@
           <p:cNvPr id="2" name="四角形: 角を丸くする 1">
             <a:extLst>
               <a:ext uri="{FF2B5EF4-FFF2-40B4-BE49-F238E27FC236}">
-                <a16:creationId xmlns:a16="http://schemas.microsoft.com/office/drawing/2014/main" id="{6FE6D177-185A-7798-F039-F5A84BAF30BB}"/>
+                <a16:creationId xmlns:a16="http://schemas.microsoft.com/office/drawing/2014/main" id="{DD76F9AC-2A57-C516-1FE3-16FF20095C4D}"/>
               </a:ext>
             </a:extLst>
           </p:cNvPr>
@@ -19100,7 +19196,7 @@
           <p:cNvPr id="3" name="テキスト ボックス 2">
             <a:extLst>
               <a:ext uri="{FF2B5EF4-FFF2-40B4-BE49-F238E27FC236}">
-                <a16:creationId xmlns:a16="http://schemas.microsoft.com/office/drawing/2014/main" id="{9DC53C1E-14DF-716C-B39F-E115410924B8}"/>
+                <a16:creationId xmlns:a16="http://schemas.microsoft.com/office/drawing/2014/main" id="{4867AFF5-0596-CA72-E9F5-C26D249F8002}"/>
               </a:ext>
             </a:extLst>
           </p:cNvPr>
@@ -19130,7 +19226,7 @@
                 </a:solidFill>
                 <a:latin typeface="Meiryo" panose="020B0604030504040204" pitchFamily="50" charset="-128"/>
               </a:rPr>
-              <a:t>名古屋市立 北高校　②部活・校風・口コミ</a:t>
+              <a:t>愛知県立 名古屋西高校　②部活・校風・口コミ</a:t>
             </a:r>
           </a:p>
         </p:txBody>
@@ -19140,7 +19236,7 @@
           <p:cNvPr id="4" name="四角形: 角を丸くする 3">
             <a:extLst>
               <a:ext uri="{FF2B5EF4-FFF2-40B4-BE49-F238E27FC236}">
-                <a16:creationId xmlns:a16="http://schemas.microsoft.com/office/drawing/2014/main" id="{DED94BFF-8DCC-1FD7-3A2E-AE208774E33F}"/>
+                <a16:creationId xmlns:a16="http://schemas.microsoft.com/office/drawing/2014/main" id="{8D7B20D1-1B18-7CBE-C02F-26A544514EBD}"/>
               </a:ext>
             </a:extLst>
           </p:cNvPr>
@@ -19208,7 +19304,7 @@
           <p:cNvPr id="5" name="テキスト ボックス 4">
             <a:extLst>
               <a:ext uri="{FF2B5EF4-FFF2-40B4-BE49-F238E27FC236}">
-                <a16:creationId xmlns:a16="http://schemas.microsoft.com/office/drawing/2014/main" id="{0BBB770F-9108-2E3A-00ED-F1B3C15B1079}"/>
+                <a16:creationId xmlns:a16="http://schemas.microsoft.com/office/drawing/2014/main" id="{C94D13AE-E441-DDAB-150D-BBF05721E669}"/>
               </a:ext>
             </a:extLst>
           </p:cNvPr>
@@ -19248,7 +19344,7 @@
           <p:cNvPr id="6" name="テキスト ボックス 5">
             <a:extLst>
               <a:ext uri="{FF2B5EF4-FFF2-40B4-BE49-F238E27FC236}">
-                <a16:creationId xmlns:a16="http://schemas.microsoft.com/office/drawing/2014/main" id="{4338BEF5-B043-61F4-A2CB-937BB487FB5F}"/>
+                <a16:creationId xmlns:a16="http://schemas.microsoft.com/office/drawing/2014/main" id="{5FD95923-067F-25C6-835D-C1C9C8BC9B61}"/>
               </a:ext>
             </a:extLst>
           </p:cNvPr>
@@ -19278,10 +19374,17 @@
                 </a:solidFill>
                 <a:latin typeface="Meiryo" panose="020B0604030504040204" pitchFamily="50" charset="-128"/>
               </a:rPr>
-              <a:t>・文化部がとても強い。特に音楽部は全国レベルの強豪</a:t>
-            </a:r>
-          </a:p>
-          <a:p>
+              <a:t>・陸上競技部が国体</a:t>
+            </a:r>
+            <a:r>
+              <a:rPr kumimoji="1" lang="en-US" altLang="ja-JP" sz="1150">
+                <a:solidFill>
+                  <a:srgbClr val="222B45"/>
+                </a:solidFill>
+                <a:latin typeface="Meiryo" panose="020B0604030504040204" pitchFamily="50" charset="-128"/>
+              </a:rPr>
+              <a:t>4</a:t>
+            </a:r>
             <a:r>
               <a:rPr kumimoji="1" lang="ja-JP" altLang="en-US" sz="1150">
                 <a:solidFill>
@@ -19289,7 +19392,29 @@
                 </a:solidFill>
                 <a:latin typeface="Meiryo" panose="020B0604030504040204" pitchFamily="50" charset="-128"/>
               </a:rPr>
-              <a:t>・運動部は標準的</a:t>
+              <a:t>位の実績で活躍</a:t>
+            </a:r>
+          </a:p>
+          <a:p>
+            <a:r>
+              <a:rPr kumimoji="1" lang="ja-JP" altLang="en-US" sz="1150">
+                <a:solidFill>
+                  <a:srgbClr val="222B45"/>
+                </a:solidFill>
+                <a:latin typeface="Meiryo" panose="020B0604030504040204" pitchFamily="50" charset="-128"/>
+              </a:rPr>
+              <a:t>・作画研究部が全国高校漫画選手権の本戦出場</a:t>
+            </a:r>
+          </a:p>
+          <a:p>
+            <a:r>
+              <a:rPr kumimoji="1" lang="ja-JP" altLang="en-US" sz="1150">
+                <a:solidFill>
+                  <a:srgbClr val="222B45"/>
+                </a:solidFill>
+                <a:latin typeface="Meiryo" panose="020B0604030504040204" pitchFamily="50" charset="-128"/>
+              </a:rPr>
+              <a:t>・運動部・文化部とも活動</a:t>
             </a:r>
             <a:r>
               <a:rPr kumimoji="1" lang="en-US" altLang="ja-JP" sz="1150">
@@ -19307,7 +19432,7 @@
                 </a:solidFill>
                 <a:latin typeface="Meiryo" panose="020B0604030504040204" pitchFamily="50" charset="-128"/>
               </a:rPr>
-              <a:t>目立った全国実績は少なめ</a:t>
+              <a:t>詳細は要確認</a:t>
             </a:r>
             <a:r>
               <a:rPr kumimoji="1" lang="en-US" altLang="ja-JP" sz="1150">
@@ -19318,35 +19443,12 @@
               </a:rPr>
               <a:t>)</a:t>
             </a:r>
-          </a:p>
-          <a:p>
-            <a:r>
-              <a:rPr kumimoji="1" lang="ja-JP" altLang="en-US" sz="1150">
-                <a:solidFill>
-                  <a:srgbClr val="222B45"/>
-                </a:solidFill>
-                <a:latin typeface="Meiryo" panose="020B0604030504040204" pitchFamily="50" charset="-128"/>
-              </a:rPr>
-              <a:t>・</a:t>
-            </a:r>
-            <a:r>
-              <a:rPr kumimoji="1" lang="en-US" altLang="ja-JP" sz="1150">
-                <a:solidFill>
-                  <a:srgbClr val="222B45"/>
-                </a:solidFill>
-                <a:latin typeface="Meiryo" panose="020B0604030504040204" pitchFamily="50" charset="-128"/>
-              </a:rPr>
-              <a:t>※</a:t>
-            </a:r>
-            <a:r>
-              <a:rPr kumimoji="1" lang="ja-JP" altLang="en-US" sz="1150">
-                <a:solidFill>
-                  <a:srgbClr val="222B45"/>
-                </a:solidFill>
-                <a:latin typeface="Meiryo" panose="020B0604030504040204" pitchFamily="50" charset="-128"/>
-              </a:rPr>
-              <a:t>野球部・吹奏楽部は設置なし</a:t>
-            </a:r>
+            <a:endParaRPr kumimoji="1" lang="ja-JP" altLang="en-US" sz="1150">
+              <a:solidFill>
+                <a:srgbClr val="222B45"/>
+              </a:solidFill>
+              <a:latin typeface="Meiryo" panose="020B0604030504040204" pitchFamily="50" charset="-128"/>
+            </a:endParaRPr>
           </a:p>
         </p:txBody>
       </p:sp>
@@ -19355,7 +19457,7 @@
           <p:cNvPr id="7" name="四角形: 角を丸くする 6">
             <a:extLst>
               <a:ext uri="{FF2B5EF4-FFF2-40B4-BE49-F238E27FC236}">
-                <a16:creationId xmlns:a16="http://schemas.microsoft.com/office/drawing/2014/main" id="{DF0EB3E4-C066-4AD9-E693-8B52D6C0BD47}"/>
+                <a16:creationId xmlns:a16="http://schemas.microsoft.com/office/drawing/2014/main" id="{E7952A3D-FDB1-48B2-F89C-16139773021C}"/>
               </a:ext>
             </a:extLst>
           </p:cNvPr>
@@ -19423,7 +19525,7 @@
           <p:cNvPr id="8" name="テキスト ボックス 7">
             <a:extLst>
               <a:ext uri="{FF2B5EF4-FFF2-40B4-BE49-F238E27FC236}">
-                <a16:creationId xmlns:a16="http://schemas.microsoft.com/office/drawing/2014/main" id="{2E6E9ECD-9C91-AED0-3C1B-ED9971BED484}"/>
+                <a16:creationId xmlns:a16="http://schemas.microsoft.com/office/drawing/2014/main" id="{B99981AD-675F-BE86-EE2A-352521ADACA7}"/>
               </a:ext>
             </a:extLst>
           </p:cNvPr>
@@ -19463,7 +19565,7 @@
           <p:cNvPr id="9" name="テキスト ボックス 8">
             <a:extLst>
               <a:ext uri="{FF2B5EF4-FFF2-40B4-BE49-F238E27FC236}">
-                <a16:creationId xmlns:a16="http://schemas.microsoft.com/office/drawing/2014/main" id="{1A72706D-8329-7D25-7636-A0B4D51604B2}"/>
+                <a16:creationId xmlns:a16="http://schemas.microsoft.com/office/drawing/2014/main" id="{BD974208-3CA2-CAD8-9025-2572776FE09D}"/>
               </a:ext>
             </a:extLst>
           </p:cNvPr>
@@ -19493,10 +19595,17 @@
                 </a:solidFill>
                 <a:latin typeface="Meiryo" panose="020B0604030504040204" pitchFamily="50" charset="-128"/>
               </a:rPr>
-              <a:t>・校則は比較的ゆるめとの声</a:t>
-            </a:r>
-          </a:p>
-          <a:p>
+              <a:t>・</a:t>
+            </a:r>
+            <a:r>
+              <a:rPr kumimoji="1" lang="en-US" altLang="ja-JP" sz="1150">
+                <a:solidFill>
+                  <a:srgbClr val="222B45"/>
+                </a:solidFill>
+                <a:latin typeface="Meiryo" panose="020B0604030504040204" pitchFamily="50" charset="-128"/>
+              </a:rPr>
+              <a:t>『</a:t>
+            </a:r>
             <a:r>
               <a:rPr kumimoji="1" lang="ja-JP" altLang="en-US" sz="1150">
                 <a:solidFill>
@@ -19504,7 +19613,7 @@
                 </a:solidFill>
                 <a:latin typeface="Meiryo" panose="020B0604030504040204" pitchFamily="50" charset="-128"/>
               </a:rPr>
-              <a:t>・スマホ：朝</a:t>
+              <a:t>生徒想いの先生が多い</a:t>
             </a:r>
             <a:r>
               <a:rPr kumimoji="1" lang="en-US" altLang="ja-JP" sz="1150">
@@ -19513,7 +19622,7 @@
                 </a:solidFill>
                 <a:latin typeface="Meiryo" panose="020B0604030504040204" pitchFamily="50" charset="-128"/>
               </a:rPr>
-              <a:t>〜</a:t>
+              <a:t>』</a:t>
             </a:r>
             <a:r>
               <a:rPr kumimoji="1" lang="ja-JP" altLang="en-US" sz="1150">
@@ -19522,7 +19631,18 @@
                 </a:solidFill>
                 <a:latin typeface="Meiryo" panose="020B0604030504040204" pitchFamily="50" charset="-128"/>
               </a:rPr>
-              <a:t>帰りの</a:t>
+              <a:t>落ち着いた伝統校</a:t>
+            </a:r>
+          </a:p>
+          <a:p>
+            <a:r>
+              <a:rPr kumimoji="1" lang="ja-JP" altLang="en-US" sz="1150">
+                <a:solidFill>
+                  <a:srgbClr val="222B45"/>
+                </a:solidFill>
+                <a:latin typeface="Meiryo" panose="020B0604030504040204" pitchFamily="50" charset="-128"/>
+              </a:rPr>
+              <a:t>・校則は</a:t>
             </a:r>
             <a:r>
               <a:rPr kumimoji="1" lang="en-US" altLang="ja-JP" sz="1150">
@@ -19531,7 +19651,7 @@
                 </a:solidFill>
                 <a:latin typeface="Meiryo" panose="020B0604030504040204" pitchFamily="50" charset="-128"/>
               </a:rPr>
-              <a:t>ST</a:t>
+              <a:t>『</a:t>
             </a:r>
             <a:r>
               <a:rPr kumimoji="1" lang="ja-JP" altLang="en-US" sz="1150">
@@ -19540,7 +19660,7 @@
                 </a:solidFill>
                 <a:latin typeface="Meiryo" panose="020B0604030504040204" pitchFamily="50" charset="-128"/>
               </a:rPr>
-              <a:t>まで電源</a:t>
+              <a:t>ちょうどいい</a:t>
             </a:r>
             <a:r>
               <a:rPr kumimoji="1" lang="en-US" altLang="ja-JP" sz="1150">
@@ -19549,7 +19669,7 @@
                 </a:solidFill>
                 <a:latin typeface="Meiryo" panose="020B0604030504040204" pitchFamily="50" charset="-128"/>
               </a:rPr>
-              <a:t>OFF</a:t>
+              <a:t>』</a:t>
             </a:r>
             <a:r>
               <a:rPr kumimoji="1" lang="ja-JP" altLang="en-US" sz="1150">
@@ -19558,7 +19678,18 @@
                 </a:solidFill>
                 <a:latin typeface="Meiryo" panose="020B0604030504040204" pitchFamily="50" charset="-128"/>
               </a:rPr>
-              <a:t>でカバン保管</a:t>
+              <a:t>との評価が中心</a:t>
+            </a:r>
+          </a:p>
+          <a:p>
+            <a:r>
+              <a:rPr kumimoji="1" lang="ja-JP" altLang="en-US" sz="1150">
+                <a:solidFill>
+                  <a:srgbClr val="222B45"/>
+                </a:solidFill>
+                <a:latin typeface="Meiryo" panose="020B0604030504040204" pitchFamily="50" charset="-128"/>
+              </a:rPr>
+              <a:t>・ただし化粧・スカート丈は指導あり</a:t>
             </a:r>
             <a:r>
               <a:rPr kumimoji="1" lang="en-US" altLang="ja-JP" sz="1150">
@@ -19576,7 +19707,7 @@
                 </a:solidFill>
                 <a:latin typeface="Meiryo" panose="020B0604030504040204" pitchFamily="50" charset="-128"/>
               </a:rPr>
-              <a:t>行事中は</a:t>
+              <a:t>近年やや厳しめとの声</a:t>
             </a:r>
             <a:r>
               <a:rPr kumimoji="1" lang="en-US" altLang="ja-JP" sz="1150">
@@ -19585,7 +19716,7 @@
                 </a:solidFill>
                 <a:latin typeface="Meiryo" panose="020B0604030504040204" pitchFamily="50" charset="-128"/>
               </a:rPr>
-              <a:t>OK)</a:t>
+              <a:t>)</a:t>
             </a:r>
           </a:p>
           <a:p>
@@ -19596,36 +19727,7 @@
                 </a:solidFill>
                 <a:latin typeface="Meiryo" panose="020B0604030504040204" pitchFamily="50" charset="-128"/>
               </a:rPr>
-              <a:t>・髪型は巻く</a:t>
-            </a:r>
-            <a:r>
-              <a:rPr kumimoji="1" lang="en-US" altLang="ja-JP" sz="1150">
-                <a:solidFill>
-                  <a:srgbClr val="222B45"/>
-                </a:solidFill>
-                <a:latin typeface="Meiryo" panose="020B0604030504040204" pitchFamily="50" charset="-128"/>
-              </a:rPr>
-              <a:t>/</a:t>
-            </a:r>
-            <a:r>
-              <a:rPr kumimoji="1" lang="ja-JP" altLang="en-US" sz="1150">
-                <a:solidFill>
-                  <a:srgbClr val="222B45"/>
-                </a:solidFill>
-                <a:latin typeface="Meiryo" panose="020B0604030504040204" pitchFamily="50" charset="-128"/>
-              </a:rPr>
-              <a:t>束ねるは自由／アルバイトは禁止</a:t>
-            </a:r>
-          </a:p>
-          <a:p>
-            <a:r>
-              <a:rPr kumimoji="1" lang="ja-JP" altLang="en-US" sz="1150">
-                <a:solidFill>
-                  <a:srgbClr val="222B45"/>
-                </a:solidFill>
-                <a:latin typeface="Meiryo" panose="020B0604030504040204" pitchFamily="50" charset="-128"/>
-              </a:rPr>
-              <a:t>・制服は冬服が好評・夏服は不評との声</a:t>
+              <a:t>・スマホ・アルバイトの規定は要確認</a:t>
             </a:r>
           </a:p>
         </p:txBody>
@@ -19635,7 +19737,7 @@
           <p:cNvPr id="10" name="四角形: 角を丸くする 9">
             <a:extLst>
               <a:ext uri="{FF2B5EF4-FFF2-40B4-BE49-F238E27FC236}">
-                <a16:creationId xmlns:a16="http://schemas.microsoft.com/office/drawing/2014/main" id="{7C388691-C130-65EC-E030-11A5162FA083}"/>
+                <a16:creationId xmlns:a16="http://schemas.microsoft.com/office/drawing/2014/main" id="{1AF9BCC8-F3F6-D023-6D9B-05D49FD6383B}"/>
               </a:ext>
             </a:extLst>
           </p:cNvPr>
@@ -19703,7 +19805,7 @@
           <p:cNvPr id="11" name="テキスト ボックス 10">
             <a:extLst>
               <a:ext uri="{FF2B5EF4-FFF2-40B4-BE49-F238E27FC236}">
-                <a16:creationId xmlns:a16="http://schemas.microsoft.com/office/drawing/2014/main" id="{E8E58C39-626B-75EB-E2C5-351E469B8542}"/>
+                <a16:creationId xmlns:a16="http://schemas.microsoft.com/office/drawing/2014/main" id="{9BF0C24E-958F-C3C0-E96C-CF9FF0E6DB4C}"/>
               </a:ext>
             </a:extLst>
           </p:cNvPr>
@@ -19743,7 +19845,7 @@
           <p:cNvPr id="12" name="テキスト ボックス 11">
             <a:extLst>
               <a:ext uri="{FF2B5EF4-FFF2-40B4-BE49-F238E27FC236}">
-                <a16:creationId xmlns:a16="http://schemas.microsoft.com/office/drawing/2014/main" id="{3002D818-A273-E62F-628D-65BEFD7470F4}"/>
+                <a16:creationId xmlns:a16="http://schemas.microsoft.com/office/drawing/2014/main" id="{0D6B493D-C7D1-FD81-E4CA-AD52A66BA1FA}"/>
               </a:ext>
             </a:extLst>
           </p:cNvPr>
@@ -19773,7 +19875,7 @@
                 </a:solidFill>
                 <a:latin typeface="Meiryo" panose="020B0604030504040204" pitchFamily="50" charset="-128"/>
               </a:rPr>
-              <a:t>・地元</a:t>
+              <a:t>・評判が高い</a:t>
             </a:r>
             <a:r>
               <a:rPr kumimoji="1" lang="en-US" altLang="ja-JP" sz="1150">
@@ -19791,7 +19893,7 @@
                 </a:solidFill>
                 <a:latin typeface="Meiryo" panose="020B0604030504040204" pitchFamily="50" charset="-128"/>
               </a:rPr>
-              <a:t>同じ北区</a:t>
+              <a:t>口コミ</a:t>
             </a:r>
             <a:r>
               <a:rPr kumimoji="1" lang="en-US" altLang="ja-JP" sz="1150">
@@ -19800,8 +19902,28 @@
                 </a:solidFill>
                 <a:latin typeface="Meiryo" panose="020B0604030504040204" pitchFamily="50" charset="-128"/>
               </a:rPr>
+              <a:t>3.7</a:t>
+            </a:r>
+            <a:r>
+              <a:rPr kumimoji="1" lang="ja-JP" altLang="en-US" sz="1150">
+                <a:solidFill>
+                  <a:srgbClr val="222B45"/>
+                </a:solidFill>
+                <a:latin typeface="Meiryo" panose="020B0604030504040204" pitchFamily="50" charset="-128"/>
+              </a:rPr>
+              <a:t>・県内上位</a:t>
+            </a:r>
+            <a:r>
+              <a:rPr kumimoji="1" lang="en-US" altLang="ja-JP" sz="1150">
+                <a:solidFill>
+                  <a:srgbClr val="222B45"/>
+                </a:solidFill>
+                <a:latin typeface="Meiryo" panose="020B0604030504040204" pitchFamily="50" charset="-128"/>
+              </a:rPr>
               <a:t>)</a:t>
             </a:r>
+          </a:p>
+          <a:p>
             <a:r>
               <a:rPr kumimoji="1" lang="ja-JP" altLang="en-US" sz="1150">
                 <a:solidFill>
@@ -19809,7 +19931,7 @@
                 </a:solidFill>
                 <a:latin typeface="Meiryo" panose="020B0604030504040204" pitchFamily="50" charset="-128"/>
               </a:rPr>
-              <a:t>で通いやすい</a:t>
+              <a:t>・国公立進学に強い</a:t>
             </a:r>
           </a:p>
           <a:p>
@@ -19820,7 +19942,7 @@
                 </a:solidFill>
                 <a:latin typeface="Meiryo" panose="020B0604030504040204" pitchFamily="50" charset="-128"/>
               </a:rPr>
-              <a:t>・国際理解コースで英語・留学</a:t>
+              <a:t>・創造表現コースなど特色ある学び</a:t>
             </a:r>
           </a:p>
           <a:p>
@@ -19831,18 +19953,7 @@
                 </a:solidFill>
                 <a:latin typeface="Meiryo" panose="020B0604030504040204" pitchFamily="50" charset="-128"/>
               </a:rPr>
-              <a:t>・音楽部など文化部が全国級</a:t>
-            </a:r>
-          </a:p>
-          <a:p>
-            <a:r>
-              <a:rPr kumimoji="1" lang="ja-JP" altLang="en-US" sz="1150">
-                <a:solidFill>
-                  <a:srgbClr val="222B45"/>
-                </a:solidFill>
-                <a:latin typeface="Meiryo" panose="020B0604030504040204" pitchFamily="50" charset="-128"/>
-              </a:rPr>
-              <a:t>・公立で学費が抑えられる</a:t>
+              <a:t>・公立で学費が抑えられる／黒リボンのセーラー服が人気</a:t>
             </a:r>
           </a:p>
         </p:txBody>
@@ -19852,7 +19963,7 @@
           <p:cNvPr id="13" name="四角形: 角を丸くする 12">
             <a:extLst>
               <a:ext uri="{FF2B5EF4-FFF2-40B4-BE49-F238E27FC236}">
-                <a16:creationId xmlns:a16="http://schemas.microsoft.com/office/drawing/2014/main" id="{D6932E6D-4DC3-832D-4CCE-2E661E873200}"/>
+                <a16:creationId xmlns:a16="http://schemas.microsoft.com/office/drawing/2014/main" id="{810E9497-BC6A-4834-8FE6-875779C12041}"/>
               </a:ext>
             </a:extLst>
           </p:cNvPr>
@@ -19920,7 +20031,7 @@
           <p:cNvPr id="14" name="テキスト ボックス 13">
             <a:extLst>
               <a:ext uri="{FF2B5EF4-FFF2-40B4-BE49-F238E27FC236}">
-                <a16:creationId xmlns:a16="http://schemas.microsoft.com/office/drawing/2014/main" id="{8BBE83C3-6C38-3C67-55D2-F86919DE6F7F}"/>
+                <a16:creationId xmlns:a16="http://schemas.microsoft.com/office/drawing/2014/main" id="{C18D32F8-5CD3-2D82-F9BA-DA6EEBF5AD3A}"/>
               </a:ext>
             </a:extLst>
           </p:cNvPr>
@@ -19960,7 +20071,7 @@
           <p:cNvPr id="15" name="テキスト ボックス 14">
             <a:extLst>
               <a:ext uri="{FF2B5EF4-FFF2-40B4-BE49-F238E27FC236}">
-                <a16:creationId xmlns:a16="http://schemas.microsoft.com/office/drawing/2014/main" id="{D26396CB-CA7D-1DC2-9215-1F6B6F7A865E}"/>
+                <a16:creationId xmlns:a16="http://schemas.microsoft.com/office/drawing/2014/main" id="{0CFF970E-C085-A17F-142E-D7BBE5BB971E}"/>
               </a:ext>
             </a:extLst>
           </p:cNvPr>
@@ -19990,10 +20101,17 @@
                 </a:solidFill>
                 <a:latin typeface="Meiryo" panose="020B0604030504040204" pitchFamily="50" charset="-128"/>
               </a:rPr>
-              <a:t>・課題・提出物が多めとの声</a:t>
-            </a:r>
-          </a:p>
-          <a:p>
+              <a:t>・偏差値</a:t>
+            </a:r>
+            <a:r>
+              <a:rPr kumimoji="1" lang="en-US" altLang="ja-JP" sz="1150">
+                <a:solidFill>
+                  <a:srgbClr val="222B45"/>
+                </a:solidFill>
+                <a:latin typeface="Meiryo" panose="020B0604030504040204" pitchFamily="50" charset="-128"/>
+              </a:rPr>
+              <a:t>60</a:t>
+            </a:r>
             <a:r>
               <a:rPr kumimoji="1" lang="ja-JP" altLang="en-US" sz="1150">
                 <a:solidFill>
@@ -20001,10 +20119,17 @@
                 </a:solidFill>
                 <a:latin typeface="Meiryo" panose="020B0604030504040204" pitchFamily="50" charset="-128"/>
               </a:rPr>
-              <a:t>・駅から遠くバス・自転車が前提</a:t>
-            </a:r>
-          </a:p>
-          <a:p>
+              <a:t>と高め</a:t>
+            </a:r>
+            <a:r>
+              <a:rPr kumimoji="1" lang="en-US" altLang="ja-JP" sz="1150">
+                <a:solidFill>
+                  <a:srgbClr val="222B45"/>
+                </a:solidFill>
+                <a:latin typeface="Meiryo" panose="020B0604030504040204" pitchFamily="50" charset="-128"/>
+              </a:rPr>
+              <a:t>(</a:t>
+            </a:r>
             <a:r>
               <a:rPr kumimoji="1" lang="ja-JP" altLang="en-US" sz="1150">
                 <a:solidFill>
@@ -20012,8 +20137,72 @@
                 </a:solidFill>
                 <a:latin typeface="Meiryo" panose="020B0604030504040204" pitchFamily="50" charset="-128"/>
               </a:rPr>
-              <a:t>・先生により対応差との声</a:t>
-            </a:r>
+              <a:t>しっかり対策が必要</a:t>
+            </a:r>
+            <a:r>
+              <a:rPr kumimoji="1" lang="en-US" altLang="ja-JP" sz="1150">
+                <a:solidFill>
+                  <a:srgbClr val="222B45"/>
+                </a:solidFill>
+                <a:latin typeface="Meiryo" panose="020B0604030504040204" pitchFamily="50" charset="-128"/>
+              </a:rPr>
+              <a:t>)</a:t>
+            </a:r>
+          </a:p>
+          <a:p>
+            <a:r>
+              <a:rPr kumimoji="1" lang="ja-JP" altLang="en-US" sz="1150">
+                <a:solidFill>
+                  <a:srgbClr val="222B45"/>
+                </a:solidFill>
+                <a:latin typeface="Meiryo" panose="020B0604030504040204" pitchFamily="50" charset="-128"/>
+              </a:rPr>
+              <a:t>・化粧・服装の指導はある</a:t>
+            </a:r>
+          </a:p>
+          <a:p>
+            <a:r>
+              <a:rPr kumimoji="1" lang="ja-JP" altLang="en-US" sz="1150">
+                <a:solidFill>
+                  <a:srgbClr val="222B45"/>
+                </a:solidFill>
+                <a:latin typeface="Meiryo" panose="020B0604030504040204" pitchFamily="50" charset="-128"/>
+              </a:rPr>
+              <a:t>・食堂は要確認</a:t>
+            </a:r>
+            <a:r>
+              <a:rPr kumimoji="1" lang="en-US" altLang="ja-JP" sz="1150">
+                <a:solidFill>
+                  <a:srgbClr val="222B45"/>
+                </a:solidFill>
+                <a:latin typeface="Meiryo" panose="020B0604030504040204" pitchFamily="50" charset="-128"/>
+              </a:rPr>
+              <a:t>(</a:t>
+            </a:r>
+            <a:r>
+              <a:rPr kumimoji="1" lang="ja-JP" altLang="en-US" sz="1150">
+                <a:solidFill>
+                  <a:srgbClr val="222B45"/>
+                </a:solidFill>
+                <a:latin typeface="Meiryo" panose="020B0604030504040204" pitchFamily="50" charset="-128"/>
+              </a:rPr>
+              <a:t>基本はお弁当</a:t>
+            </a:r>
+            <a:r>
+              <a:rPr kumimoji="1" lang="en-US" altLang="ja-JP" sz="1150">
+                <a:solidFill>
+                  <a:srgbClr val="222B45"/>
+                </a:solidFill>
+                <a:latin typeface="Meiryo" panose="020B0604030504040204" pitchFamily="50" charset="-128"/>
+              </a:rPr>
+              <a:t>)</a:t>
+            </a:r>
+            <a:endParaRPr kumimoji="1" lang="ja-JP" altLang="en-US" sz="1150">
+              <a:solidFill>
+                <a:srgbClr val="222B45"/>
+              </a:solidFill>
+              <a:latin typeface="Meiryo" panose="020B0604030504040204" pitchFamily="50" charset="-128"/>
+            </a:endParaRPr>
           </a:p>
         </p:txBody>
       </p:sp>
@@ -20022,7 +20211,7 @@
           <p:cNvPr id="16" name="四角形: 角を丸くする 15">
             <a:extLst>
               <a:ext uri="{FF2B5EF4-FFF2-40B4-BE49-F238E27FC236}">
-                <a16:creationId xmlns:a16="http://schemas.microsoft.com/office/drawing/2014/main" id="{531CB212-FBD4-8C00-7633-54E36802171D}"/>
+                <a16:creationId xmlns:a16="http://schemas.microsoft.com/office/drawing/2014/main" id="{FAE62774-AA47-DE76-BDDB-B35C2760BC43}"/>
               </a:ext>
             </a:extLst>
           </p:cNvPr>
@@ -20090,7 +20279,7 @@
           <p:cNvPr id="17" name="テキスト ボックス 16">
             <a:extLst>
               <a:ext uri="{FF2B5EF4-FFF2-40B4-BE49-F238E27FC236}">
-                <a16:creationId xmlns:a16="http://schemas.microsoft.com/office/drawing/2014/main" id="{91D97A18-FE53-12C7-50CE-9600F0265674}"/>
+                <a16:creationId xmlns:a16="http://schemas.microsoft.com/office/drawing/2014/main" id="{84E1A296-694A-E949-57A6-AD06AA524AC9}"/>
               </a:ext>
             </a:extLst>
           </p:cNvPr>
@@ -20184,7 +20373,7 @@
           <p:cNvPr id="18" name="テキスト ボックス 17">
             <a:extLst>
               <a:ext uri="{FF2B5EF4-FFF2-40B4-BE49-F238E27FC236}">
-                <a16:creationId xmlns:a16="http://schemas.microsoft.com/office/drawing/2014/main" id="{BBE31723-62F8-33DD-27B3-99FBC393FAD3}"/>
+                <a16:creationId xmlns:a16="http://schemas.microsoft.com/office/drawing/2014/main" id="{CC8D4DEC-1C71-6BD0-B9AB-1BC37E42CDD4}"/>
               </a:ext>
             </a:extLst>
           </p:cNvPr>
@@ -20214,7 +20403,7 @@
                 </a:solidFill>
                 <a:latin typeface="Meiryo" panose="020B0604030504040204" pitchFamily="50" charset="-128"/>
               </a:rPr>
-              <a:t>説明会・見学：国際理解コース説明会 </a:t>
+              <a:t>説明会・見学：</a:t>
             </a:r>
             <a:r>
               <a:rPr kumimoji="1" lang="en-US" altLang="ja-JP" sz="1100">
@@ -20223,7 +20412,7 @@
                 </a:solidFill>
                 <a:latin typeface="Meiryo" panose="020B0604030504040204" pitchFamily="50" charset="-128"/>
               </a:rPr>
-              <a:t>8/4(</a:t>
+              <a:t>2026</a:t>
             </a:r>
             <a:r>
               <a:rPr kumimoji="1" lang="ja-JP" altLang="en-US" sz="1100">
@@ -20232,7 +20421,7 @@
                 </a:solidFill>
                 <a:latin typeface="Meiryo" panose="020B0604030504040204" pitchFamily="50" charset="-128"/>
               </a:rPr>
-              <a:t>火</a:t>
+              <a:t>年度の説明会・見学会は公式サイトで要確認</a:t>
             </a:r>
             <a:r>
               <a:rPr kumimoji="1" lang="en-US" altLang="ja-JP" sz="1100">
@@ -20241,7 +20430,7 @@
                 </a:solidFill>
                 <a:latin typeface="Meiryo" panose="020B0604030504040204" pitchFamily="50" charset="-128"/>
               </a:rPr>
-              <a:t>)10:00</a:t>
+              <a:t>(</a:t>
             </a:r>
             <a:r>
               <a:rPr kumimoji="1" lang="ja-JP" altLang="en-US" sz="1100">
@@ -20250,7 +20439,7 @@
                 </a:solidFill>
                 <a:latin typeface="Meiryo" panose="020B0604030504040204" pitchFamily="50" charset="-128"/>
               </a:rPr>
-              <a:t>／学校見学会 </a:t>
+              <a:t>現時点 未発表</a:t>
             </a:r>
             <a:r>
               <a:rPr kumimoji="1" lang="en-US" altLang="ja-JP" sz="1100">
@@ -20259,25 +20448,7 @@
                 </a:solidFill>
                 <a:latin typeface="Meiryo" panose="020B0604030504040204" pitchFamily="50" charset="-128"/>
               </a:rPr>
-              <a:t>10/10(</a:t>
-            </a:r>
-            <a:r>
-              <a:rPr kumimoji="1" lang="ja-JP" altLang="en-US" sz="1100">
-                <a:solidFill>
-                  <a:srgbClr val="222B45"/>
-                </a:solidFill>
-                <a:latin typeface="Meiryo" panose="020B0604030504040204" pitchFamily="50" charset="-128"/>
-              </a:rPr>
-              <a:t>土</a:t>
-            </a:r>
-            <a:r>
-              <a:rPr kumimoji="1" lang="en-US" altLang="ja-JP" sz="1100">
-                <a:solidFill>
-                  <a:srgbClr val="222B45"/>
-                </a:solidFill>
-                <a:latin typeface="Meiryo" panose="020B0604030504040204" pitchFamily="50" charset="-128"/>
-              </a:rPr>
-              <a:t>)13:30</a:t>
+              <a:t>)</a:t>
             </a:r>
             <a:endParaRPr kumimoji="1" lang="ja-JP" altLang="en-US" sz="1100">
               <a:solidFill>
@@ -20293,7 +20464,7 @@
           <p:cNvPr id="19" name="テキスト ボックス 18">
             <a:extLst>
               <a:ext uri="{FF2B5EF4-FFF2-40B4-BE49-F238E27FC236}">
-                <a16:creationId xmlns:a16="http://schemas.microsoft.com/office/drawing/2014/main" id="{3D43A30B-8639-CF6B-D8ED-A2D999D017E5}"/>
+                <a16:creationId xmlns:a16="http://schemas.microsoft.com/office/drawing/2014/main" id="{FFCDF79F-5630-4069-F6A5-63C1FFF71F43}"/>
               </a:ext>
             </a:extLst>
           </p:cNvPr>
@@ -20323,25 +20494,7 @@
                 </a:solidFill>
                 <a:latin typeface="Meiryo" panose="020B0604030504040204" pitchFamily="50" charset="-128"/>
               </a:rPr>
-              <a:t>文化祭：北高祭＝例年</a:t>
-            </a:r>
-            <a:r>
-              <a:rPr kumimoji="1" lang="en-US" altLang="ja-JP" sz="1100">
-                <a:solidFill>
-                  <a:srgbClr val="222B45"/>
-                </a:solidFill>
-                <a:latin typeface="Meiryo" panose="020B0604030504040204" pitchFamily="50" charset="-128"/>
-              </a:rPr>
-              <a:t>9</a:t>
-            </a:r>
-            <a:r>
-              <a:rPr kumimoji="1" lang="ja-JP" altLang="en-US" sz="1100">
-                <a:solidFill>
-                  <a:srgbClr val="222B45"/>
-                </a:solidFill>
-                <a:latin typeface="Meiryo" panose="020B0604030504040204" pitchFamily="50" charset="-128"/>
-              </a:rPr>
-              <a:t>月頃・要確認</a:t>
+              <a:t>文化祭：文化祭＝例年秋・要確認</a:t>
             </a:r>
           </a:p>
         </p:txBody>
@@ -20351,7 +20504,7 @@
           <p:cNvPr id="20" name="四角形: 角を丸くする 19">
             <a:extLst>
               <a:ext uri="{FF2B5EF4-FFF2-40B4-BE49-F238E27FC236}">
-                <a16:creationId xmlns:a16="http://schemas.microsoft.com/office/drawing/2014/main" id="{D6AD8671-9068-9504-8130-D183A13911E4}"/>
+                <a16:creationId xmlns:a16="http://schemas.microsoft.com/office/drawing/2014/main" id="{AB9EF089-5D12-8236-21D3-A3A5E9710C59}"/>
               </a:ext>
             </a:extLst>
           </p:cNvPr>
@@ -20419,7 +20572,7 @@
           <p:cNvPr id="21" name="テキスト ボックス 20">
             <a:extLst>
               <a:ext uri="{FF2B5EF4-FFF2-40B4-BE49-F238E27FC236}">
-                <a16:creationId xmlns:a16="http://schemas.microsoft.com/office/drawing/2014/main" id="{75515CF7-3198-4B84-BDFD-561080A13FB9}"/>
+                <a16:creationId xmlns:a16="http://schemas.microsoft.com/office/drawing/2014/main" id="{9558D880-FDD8-A9F9-732D-89C62A2EA350}"/>
               </a:ext>
             </a:extLst>
           </p:cNvPr>
@@ -20450,7 +20603,7 @@
                 <a:latin typeface="Meiryo" panose="020B0604030504040204" pitchFamily="50" charset="-128"/>
                 <a:hlinkClick r:id="rId2"/>
               </a:rPr>
-              <a:t>▶ 北高校のくわしい情報（口コミ・偏差値・制服）はこちら（みんなの高校情報）</a:t>
+              <a:t>▶ 名古屋西高校のくわしい情報（口コミ・偏差値・制服）はこちら（みんなの高校情報）</a:t>
             </a:r>
             <a:endParaRPr kumimoji="1" lang="ja-JP" altLang="en-US" sz="1100">
               <a:solidFill>
@@ -20464,7 +20617,7 @@
     </p:spTree>
     <p:extLst>
       <p:ext uri="{BB962C8B-B14F-4D97-AF65-F5344CB8AC3E}">
-        <p14:creationId xmlns:p14="http://schemas.microsoft.com/office/powerpoint/2010/main" val="310415343"/>
+        <p14:creationId xmlns:p14="http://schemas.microsoft.com/office/powerpoint/2010/main" val="882991568"/>
       </p:ext>
     </p:extLst>
   </p:cSld>
@@ -20504,7 +20657,7 @@
           <p:cNvPr id="2" name="四角形: 角を丸くする 1">
             <a:extLst>
               <a:ext uri="{FF2B5EF4-FFF2-40B4-BE49-F238E27FC236}">
-                <a16:creationId xmlns:a16="http://schemas.microsoft.com/office/drawing/2014/main" id="{C41D9C9C-D6BD-43B4-5DEC-8EF68A8FF293}"/>
+                <a16:creationId xmlns:a16="http://schemas.microsoft.com/office/drawing/2014/main" id="{456C2092-3050-71BD-51B5-6357BF895C2F}"/>
               </a:ext>
             </a:extLst>
           </p:cNvPr>
@@ -20572,7 +20725,7 @@
           <p:cNvPr id="3" name="テキスト ボックス 2">
             <a:extLst>
               <a:ext uri="{FF2B5EF4-FFF2-40B4-BE49-F238E27FC236}">
-                <a16:creationId xmlns:a16="http://schemas.microsoft.com/office/drawing/2014/main" id="{437F54AE-D4A1-E18E-8304-07414E35B4B0}"/>
+                <a16:creationId xmlns:a16="http://schemas.microsoft.com/office/drawing/2014/main" id="{391CDA11-1B68-A07A-103F-B27D6AD8918C}"/>
               </a:ext>
             </a:extLst>
           </p:cNvPr>
@@ -20612,7 +20765,7 @@
           <p:cNvPr id="4" name="テキスト ボックス 3">
             <a:extLst>
               <a:ext uri="{FF2B5EF4-FFF2-40B4-BE49-F238E27FC236}">
-                <a16:creationId xmlns:a16="http://schemas.microsoft.com/office/drawing/2014/main" id="{27D4D454-B8EB-BF81-B809-18EE1F9356B5}"/>
+                <a16:creationId xmlns:a16="http://schemas.microsoft.com/office/drawing/2014/main" id="{C5EACDC2-848E-1B41-147E-6CB79FAC615A}"/>
               </a:ext>
             </a:extLst>
           </p:cNvPr>
@@ -20652,7 +20805,7 @@
           <p:cNvPr id="5" name="四角形: 角を丸くする 4">
             <a:extLst>
               <a:ext uri="{FF2B5EF4-FFF2-40B4-BE49-F238E27FC236}">
-                <a16:creationId xmlns:a16="http://schemas.microsoft.com/office/drawing/2014/main" id="{6B232314-BBAD-3966-106D-6728EA9C26C3}"/>
+                <a16:creationId xmlns:a16="http://schemas.microsoft.com/office/drawing/2014/main" id="{3E46E1AF-076F-E409-9020-9EBFD3893F33}"/>
               </a:ext>
             </a:extLst>
           </p:cNvPr>
@@ -20706,7 +20859,7 @@
           <p:cNvPr id="6" name="テキスト ボックス 5">
             <a:extLst>
               <a:ext uri="{FF2B5EF4-FFF2-40B4-BE49-F238E27FC236}">
-                <a16:creationId xmlns:a16="http://schemas.microsoft.com/office/drawing/2014/main" id="{7EC2D8FA-34B8-65D8-4486-0F59078D6BD5}"/>
+                <a16:creationId xmlns:a16="http://schemas.microsoft.com/office/drawing/2014/main" id="{55CEB114-0CF4-0326-6210-8B136D678296}"/>
               </a:ext>
             </a:extLst>
           </p:cNvPr>
@@ -20747,7 +20900,7 @@
           <p:cNvPr id="7" name="テキスト ボックス 6">
             <a:extLst>
               <a:ext uri="{FF2B5EF4-FFF2-40B4-BE49-F238E27FC236}">
-                <a16:creationId xmlns:a16="http://schemas.microsoft.com/office/drawing/2014/main" id="{7F298247-E99E-B506-C4D1-DC5C11177BAC}"/>
+                <a16:creationId xmlns:a16="http://schemas.microsoft.com/office/drawing/2014/main" id="{2BF14A3D-5F6C-F861-DBC8-ED5F7BA8620E}"/>
               </a:ext>
             </a:extLst>
           </p:cNvPr>
@@ -20794,7 +20947,7 @@
           <p:cNvPr id="8" name="テキスト ボックス 7">
             <a:extLst>
               <a:ext uri="{FF2B5EF4-FFF2-40B4-BE49-F238E27FC236}">
-                <a16:creationId xmlns:a16="http://schemas.microsoft.com/office/drawing/2014/main" id="{3B929B83-310B-C9EA-ACBB-14AEAE8969CF}"/>
+                <a16:creationId xmlns:a16="http://schemas.microsoft.com/office/drawing/2014/main" id="{75EE0DBB-4A30-E5AF-5415-F46D8004756B}"/>
               </a:ext>
             </a:extLst>
           </p:cNvPr>
@@ -20835,7 +20988,7 @@
           <p:cNvPr id="9" name="四角形: 角を丸くする 8">
             <a:extLst>
               <a:ext uri="{FF2B5EF4-FFF2-40B4-BE49-F238E27FC236}">
-                <a16:creationId xmlns:a16="http://schemas.microsoft.com/office/drawing/2014/main" id="{95C98C95-E4F4-9A13-07D0-2BCD8410E6F8}"/>
+                <a16:creationId xmlns:a16="http://schemas.microsoft.com/office/drawing/2014/main" id="{D9C7B1E7-02C0-EE0A-638C-73F077A05A1E}"/>
               </a:ext>
             </a:extLst>
           </p:cNvPr>
@@ -20903,7 +21056,7 @@
           <p:cNvPr id="10" name="テキスト ボックス 9">
             <a:extLst>
               <a:ext uri="{FF2B5EF4-FFF2-40B4-BE49-F238E27FC236}">
-                <a16:creationId xmlns:a16="http://schemas.microsoft.com/office/drawing/2014/main" id="{91D45486-00EB-8385-AEE6-2CEBE3FD11DD}"/>
+                <a16:creationId xmlns:a16="http://schemas.microsoft.com/office/drawing/2014/main" id="{3824FF45-5E64-538F-FAF2-A7E8D7E83A1F}"/>
               </a:ext>
             </a:extLst>
           </p:cNvPr>
@@ -20944,7 +21097,7 @@
           <p:cNvPr id="12" name="図 11">
             <a:extLst>
               <a:ext uri="{FF2B5EF4-FFF2-40B4-BE49-F238E27FC236}">
-                <a16:creationId xmlns:a16="http://schemas.microsoft.com/office/drawing/2014/main" id="{4215CC53-9F3F-0446-A864-1B9CE26F0F34}"/>
+                <a16:creationId xmlns:a16="http://schemas.microsoft.com/office/drawing/2014/main" id="{E11C4482-0BA4-9534-B4B3-E36AC0561267}"/>
               </a:ext>
             </a:extLst>
           </p:cNvPr>
@@ -20985,7 +21138,7 @@
           <p:cNvPr id="13" name="テキスト ボックス 12">
             <a:extLst>
               <a:ext uri="{FF2B5EF4-FFF2-40B4-BE49-F238E27FC236}">
-                <a16:creationId xmlns:a16="http://schemas.microsoft.com/office/drawing/2014/main" id="{97D449B8-3524-86F1-0330-9736A6A5CC3B}"/>
+                <a16:creationId xmlns:a16="http://schemas.microsoft.com/office/drawing/2014/main" id="{38326131-54A1-0D3A-D974-7C5859122D28}"/>
               </a:ext>
             </a:extLst>
           </p:cNvPr>
@@ -21059,7 +21212,7 @@
           <p:cNvPr id="14" name="四角形: 角を丸くする 13">
             <a:extLst>
               <a:ext uri="{FF2B5EF4-FFF2-40B4-BE49-F238E27FC236}">
-                <a16:creationId xmlns:a16="http://schemas.microsoft.com/office/drawing/2014/main" id="{954C5D91-C6CC-8420-FCD0-7BB388454960}"/>
+                <a16:creationId xmlns:a16="http://schemas.microsoft.com/office/drawing/2014/main" id="{7E79052F-7D12-5786-01E7-2C4C38F62842}"/>
               </a:ext>
             </a:extLst>
           </p:cNvPr>
@@ -21127,7 +21280,7 @@
           <p:cNvPr id="15" name="テキスト ボックス 14">
             <a:extLst>
               <a:ext uri="{FF2B5EF4-FFF2-40B4-BE49-F238E27FC236}">
-                <a16:creationId xmlns:a16="http://schemas.microsoft.com/office/drawing/2014/main" id="{DB40FB28-E461-BF42-43DC-27C827FAD434}"/>
+                <a16:creationId xmlns:a16="http://schemas.microsoft.com/office/drawing/2014/main" id="{94D59049-7EFA-5D85-FE92-A3352F551DAE}"/>
               </a:ext>
             </a:extLst>
           </p:cNvPr>
@@ -21167,7 +21320,7 @@
           <p:cNvPr id="16" name="テキスト ボックス 15">
             <a:extLst>
               <a:ext uri="{FF2B5EF4-FFF2-40B4-BE49-F238E27FC236}">
-                <a16:creationId xmlns:a16="http://schemas.microsoft.com/office/drawing/2014/main" id="{5A209B9D-B288-6C62-6F0A-36DECF514203}"/>
+                <a16:creationId xmlns:a16="http://schemas.microsoft.com/office/drawing/2014/main" id="{7C827AC6-50E3-E784-0F0D-C7519811A7F0}"/>
               </a:ext>
             </a:extLst>
           </p:cNvPr>
@@ -21207,7 +21360,7 @@
           <p:cNvPr id="17" name="四角形: 角を丸くする 16">
             <a:extLst>
               <a:ext uri="{FF2B5EF4-FFF2-40B4-BE49-F238E27FC236}">
-                <a16:creationId xmlns:a16="http://schemas.microsoft.com/office/drawing/2014/main" id="{C6BB39CC-A135-5472-E852-FD5C8C516A62}"/>
+                <a16:creationId xmlns:a16="http://schemas.microsoft.com/office/drawing/2014/main" id="{C42B5B78-A145-3342-BF0A-414839C05DC7}"/>
               </a:ext>
             </a:extLst>
           </p:cNvPr>
@@ -21275,7 +21428,7 @@
           <p:cNvPr id="18" name="テキスト ボックス 17">
             <a:extLst>
               <a:ext uri="{FF2B5EF4-FFF2-40B4-BE49-F238E27FC236}">
-                <a16:creationId xmlns:a16="http://schemas.microsoft.com/office/drawing/2014/main" id="{53EA74E0-30DF-E97A-31DD-FB14D4958E15}"/>
+                <a16:creationId xmlns:a16="http://schemas.microsoft.com/office/drawing/2014/main" id="{3717D967-4AEC-47BA-B719-9AC8F1408715}"/>
               </a:ext>
             </a:extLst>
           </p:cNvPr>
@@ -21315,7 +21468,7 @@
           <p:cNvPr id="19" name="テキスト ボックス 18">
             <a:extLst>
               <a:ext uri="{FF2B5EF4-FFF2-40B4-BE49-F238E27FC236}">
-                <a16:creationId xmlns:a16="http://schemas.microsoft.com/office/drawing/2014/main" id="{C943C478-AD0D-53A4-0B4F-7EC92C998379}"/>
+                <a16:creationId xmlns:a16="http://schemas.microsoft.com/office/drawing/2014/main" id="{83777B45-2000-65A9-4DF1-34B9A3F4BE11}"/>
               </a:ext>
             </a:extLst>
           </p:cNvPr>
@@ -21355,7 +21508,7 @@
           <p:cNvPr id="20" name="四角形: 角を丸くする 19">
             <a:extLst>
               <a:ext uri="{FF2B5EF4-FFF2-40B4-BE49-F238E27FC236}">
-                <a16:creationId xmlns:a16="http://schemas.microsoft.com/office/drawing/2014/main" id="{F3E38AE1-BA37-4223-8A5B-581F8E3C989E}"/>
+                <a16:creationId xmlns:a16="http://schemas.microsoft.com/office/drawing/2014/main" id="{ACC8A7A4-D872-88DD-D900-7511B60F2689}"/>
               </a:ext>
             </a:extLst>
           </p:cNvPr>
@@ -21423,7 +21576,7 @@
           <p:cNvPr id="21" name="テキスト ボックス 20">
             <a:extLst>
               <a:ext uri="{FF2B5EF4-FFF2-40B4-BE49-F238E27FC236}">
-                <a16:creationId xmlns:a16="http://schemas.microsoft.com/office/drawing/2014/main" id="{408D0FA5-A2D5-C60E-D5A7-0ECE812AC77C}"/>
+                <a16:creationId xmlns:a16="http://schemas.microsoft.com/office/drawing/2014/main" id="{27B5605A-86CC-C141-7EF4-788F02C39B69}"/>
               </a:ext>
             </a:extLst>
           </p:cNvPr>
@@ -21463,7 +21616,7 @@
           <p:cNvPr id="22" name="テキスト ボックス 21">
             <a:extLst>
               <a:ext uri="{FF2B5EF4-FFF2-40B4-BE49-F238E27FC236}">
-                <a16:creationId xmlns:a16="http://schemas.microsoft.com/office/drawing/2014/main" id="{DDD8DCEF-FB17-FCB1-1559-F7AC681D73B7}"/>
+                <a16:creationId xmlns:a16="http://schemas.microsoft.com/office/drawing/2014/main" id="{86EB9CD6-1BF8-7A7A-144F-F42E4CE10F43}"/>
               </a:ext>
             </a:extLst>
           </p:cNvPr>
@@ -21608,7 +21761,7 @@
           <p:cNvPr id="23" name="四角形: 角を丸くする 22">
             <a:extLst>
               <a:ext uri="{FF2B5EF4-FFF2-40B4-BE49-F238E27FC236}">
-                <a16:creationId xmlns:a16="http://schemas.microsoft.com/office/drawing/2014/main" id="{B6123D33-7FFD-26E4-ECCD-E92FFD18BC77}"/>
+                <a16:creationId xmlns:a16="http://schemas.microsoft.com/office/drawing/2014/main" id="{ECA2C320-8741-4BD1-AA76-C01ED059B775}"/>
               </a:ext>
             </a:extLst>
           </p:cNvPr>
@@ -21676,7 +21829,7 @@
           <p:cNvPr id="24" name="テキスト ボックス 23">
             <a:extLst>
               <a:ext uri="{FF2B5EF4-FFF2-40B4-BE49-F238E27FC236}">
-                <a16:creationId xmlns:a16="http://schemas.microsoft.com/office/drawing/2014/main" id="{D11B6C5F-B50D-1AB8-B75F-908D5EBA7A10}"/>
+                <a16:creationId xmlns:a16="http://schemas.microsoft.com/office/drawing/2014/main" id="{DF8D1F3C-B7F3-0008-0A6C-6202067A7EE9}"/>
               </a:ext>
             </a:extLst>
           </p:cNvPr>
@@ -21716,7 +21869,7 @@
           <p:cNvPr id="25" name="テキスト ボックス 24">
             <a:extLst>
               <a:ext uri="{FF2B5EF4-FFF2-40B4-BE49-F238E27FC236}">
-                <a16:creationId xmlns:a16="http://schemas.microsoft.com/office/drawing/2014/main" id="{B09A93E3-4688-7F8D-00D4-69BB9D7A18CA}"/>
+                <a16:creationId xmlns:a16="http://schemas.microsoft.com/office/drawing/2014/main" id="{E08E9916-ECB0-FB8D-67DB-5ACB5A9590E7}"/>
               </a:ext>
             </a:extLst>
           </p:cNvPr>
@@ -21756,7 +21909,7 @@
           <p:cNvPr id="26" name="四角形: 角を丸くする 25">
             <a:extLst>
               <a:ext uri="{FF2B5EF4-FFF2-40B4-BE49-F238E27FC236}">
-                <a16:creationId xmlns:a16="http://schemas.microsoft.com/office/drawing/2014/main" id="{4E79A583-73E4-BACF-EE6C-A5B9F13C9563}"/>
+                <a16:creationId xmlns:a16="http://schemas.microsoft.com/office/drawing/2014/main" id="{6EF6EED9-C060-8089-1EE7-AA1CA25B6384}"/>
               </a:ext>
             </a:extLst>
           </p:cNvPr>
@@ -21824,7 +21977,7 @@
           <p:cNvPr id="27" name="テキスト ボックス 26">
             <a:extLst>
               <a:ext uri="{FF2B5EF4-FFF2-40B4-BE49-F238E27FC236}">
-                <a16:creationId xmlns:a16="http://schemas.microsoft.com/office/drawing/2014/main" id="{95129E74-4610-FF1A-88A9-68455AE269D9}"/>
+                <a16:creationId xmlns:a16="http://schemas.microsoft.com/office/drawing/2014/main" id="{7CB7463D-43C7-A00B-CF63-79EB5E3ACC5E}"/>
               </a:ext>
             </a:extLst>
           </p:cNvPr>
@@ -21936,7 +22089,7 @@
           <p:cNvPr id="28" name="四角形: 角を丸くする 27">
             <a:extLst>
               <a:ext uri="{FF2B5EF4-FFF2-40B4-BE49-F238E27FC236}">
-                <a16:creationId xmlns:a16="http://schemas.microsoft.com/office/drawing/2014/main" id="{DB23801C-88AA-0CFD-D183-5EC2044705E7}"/>
+                <a16:creationId xmlns:a16="http://schemas.microsoft.com/office/drawing/2014/main" id="{1FFEB4CC-5547-BBE8-F7C9-C6348B20712E}"/>
               </a:ext>
             </a:extLst>
           </p:cNvPr>
@@ -22004,7 +22157,7 @@
           <p:cNvPr id="29" name="テキスト ボックス 28">
             <a:extLst>
               <a:ext uri="{FF2B5EF4-FFF2-40B4-BE49-F238E27FC236}">
-                <a16:creationId xmlns:a16="http://schemas.microsoft.com/office/drawing/2014/main" id="{3337692C-8698-A8EB-F37D-D580B3F2FD11}"/>
+                <a16:creationId xmlns:a16="http://schemas.microsoft.com/office/drawing/2014/main" id="{CFC50A32-57AF-7CD5-88C3-A5C76FC49C6F}"/>
               </a:ext>
             </a:extLst>
           </p:cNvPr>
@@ -22049,7 +22202,7 @@
     </p:spTree>
     <p:extLst>
       <p:ext uri="{BB962C8B-B14F-4D97-AF65-F5344CB8AC3E}">
-        <p14:creationId xmlns:p14="http://schemas.microsoft.com/office/powerpoint/2010/main" val="2634927684"/>
+        <p14:creationId xmlns:p14="http://schemas.microsoft.com/office/powerpoint/2010/main" val="3961282509"/>
       </p:ext>
     </p:extLst>
   </p:cSld>
@@ -22089,7 +22242,7 @@
           <p:cNvPr id="2" name="四角形: 角を丸くする 1">
             <a:extLst>
               <a:ext uri="{FF2B5EF4-FFF2-40B4-BE49-F238E27FC236}">
-                <a16:creationId xmlns:a16="http://schemas.microsoft.com/office/drawing/2014/main" id="{0858D848-C585-0758-B590-B69DBC5C36DB}"/>
+                <a16:creationId xmlns:a16="http://schemas.microsoft.com/office/drawing/2014/main" id="{ED9A5EDF-563F-F143-E6AE-0256D5CB1C2F}"/>
               </a:ext>
             </a:extLst>
           </p:cNvPr>
@@ -22157,7 +22310,7 @@
           <p:cNvPr id="3" name="テキスト ボックス 2">
             <a:extLst>
               <a:ext uri="{FF2B5EF4-FFF2-40B4-BE49-F238E27FC236}">
-                <a16:creationId xmlns:a16="http://schemas.microsoft.com/office/drawing/2014/main" id="{0064F060-6204-1039-BB01-58D32342D7AF}"/>
+                <a16:creationId xmlns:a16="http://schemas.microsoft.com/office/drawing/2014/main" id="{DA095CAF-6E5B-51B5-BD28-0DB44F6D3D5E}"/>
               </a:ext>
             </a:extLst>
           </p:cNvPr>
@@ -22197,7 +22350,7 @@
           <p:cNvPr id="4" name="四角形: 角を丸くする 3">
             <a:extLst>
               <a:ext uri="{FF2B5EF4-FFF2-40B4-BE49-F238E27FC236}">
-                <a16:creationId xmlns:a16="http://schemas.microsoft.com/office/drawing/2014/main" id="{E5CB3F11-7A34-884D-2A5D-7280C5D93A25}"/>
+                <a16:creationId xmlns:a16="http://schemas.microsoft.com/office/drawing/2014/main" id="{7FCF3B31-E75A-BA9A-AABC-6A73D31905B4}"/>
               </a:ext>
             </a:extLst>
           </p:cNvPr>
@@ -22265,7 +22418,7 @@
           <p:cNvPr id="5" name="テキスト ボックス 4">
             <a:extLst>
               <a:ext uri="{FF2B5EF4-FFF2-40B4-BE49-F238E27FC236}">
-                <a16:creationId xmlns:a16="http://schemas.microsoft.com/office/drawing/2014/main" id="{FC7FC84C-19CA-12E9-2B7D-9880741264D6}"/>
+                <a16:creationId xmlns:a16="http://schemas.microsoft.com/office/drawing/2014/main" id="{5D85D8C0-5AE5-3D96-7B15-2F8F9C5E6DC4}"/>
               </a:ext>
             </a:extLst>
           </p:cNvPr>
@@ -22305,7 +22458,7 @@
           <p:cNvPr id="6" name="テキスト ボックス 5">
             <a:extLst>
               <a:ext uri="{FF2B5EF4-FFF2-40B4-BE49-F238E27FC236}">
-                <a16:creationId xmlns:a16="http://schemas.microsoft.com/office/drawing/2014/main" id="{A544D8E4-DD78-1DB8-9EBC-2A917E25F38B}"/>
+                <a16:creationId xmlns:a16="http://schemas.microsoft.com/office/drawing/2014/main" id="{60FB6C8C-30AF-98C8-77BB-B58F0CFD4220}"/>
               </a:ext>
             </a:extLst>
           </p:cNvPr>
@@ -22394,7 +22547,7 @@
           <p:cNvPr id="7" name="四角形: 角を丸くする 6">
             <a:extLst>
               <a:ext uri="{FF2B5EF4-FFF2-40B4-BE49-F238E27FC236}">
-                <a16:creationId xmlns:a16="http://schemas.microsoft.com/office/drawing/2014/main" id="{B10BAB0B-5DF3-3F50-BA2C-1460D354B086}"/>
+                <a16:creationId xmlns:a16="http://schemas.microsoft.com/office/drawing/2014/main" id="{A9B75A1A-AC9A-D956-3D57-E3EB1170C71A}"/>
               </a:ext>
             </a:extLst>
           </p:cNvPr>
@@ -22462,7 +22615,7 @@
           <p:cNvPr id="8" name="テキスト ボックス 7">
             <a:extLst>
               <a:ext uri="{FF2B5EF4-FFF2-40B4-BE49-F238E27FC236}">
-                <a16:creationId xmlns:a16="http://schemas.microsoft.com/office/drawing/2014/main" id="{5DE12021-A257-1ECE-3841-14D00DFB0FC1}"/>
+                <a16:creationId xmlns:a16="http://schemas.microsoft.com/office/drawing/2014/main" id="{238E713A-A173-644E-71E1-39C6E83C24F6}"/>
               </a:ext>
             </a:extLst>
           </p:cNvPr>
@@ -22502,7 +22655,7 @@
           <p:cNvPr id="9" name="テキスト ボックス 8">
             <a:extLst>
               <a:ext uri="{FF2B5EF4-FFF2-40B4-BE49-F238E27FC236}">
-                <a16:creationId xmlns:a16="http://schemas.microsoft.com/office/drawing/2014/main" id="{B6A66E30-BD05-C281-E055-6465F04AB769}"/>
+                <a16:creationId xmlns:a16="http://schemas.microsoft.com/office/drawing/2014/main" id="{711FCE2F-54EA-AD12-CCD7-24E29CE71686}"/>
               </a:ext>
             </a:extLst>
           </p:cNvPr>
@@ -22665,7 +22818,7 @@
           <p:cNvPr id="10" name="四角形: 角を丸くする 9">
             <a:extLst>
               <a:ext uri="{FF2B5EF4-FFF2-40B4-BE49-F238E27FC236}">
-                <a16:creationId xmlns:a16="http://schemas.microsoft.com/office/drawing/2014/main" id="{53E0F37A-35A3-8559-4017-540953A6C8AE}"/>
+                <a16:creationId xmlns:a16="http://schemas.microsoft.com/office/drawing/2014/main" id="{4B233B8B-1F7F-43F8-E6C3-B8F6C1759200}"/>
               </a:ext>
             </a:extLst>
           </p:cNvPr>
@@ -22733,7 +22886,7 @@
           <p:cNvPr id="11" name="テキスト ボックス 10">
             <a:extLst>
               <a:ext uri="{FF2B5EF4-FFF2-40B4-BE49-F238E27FC236}">
-                <a16:creationId xmlns:a16="http://schemas.microsoft.com/office/drawing/2014/main" id="{C900EF0E-0CD1-5C8A-2534-99410ABC5F26}"/>
+                <a16:creationId xmlns:a16="http://schemas.microsoft.com/office/drawing/2014/main" id="{68B91836-82E2-9DA1-6B40-40C3BAA68116}"/>
               </a:ext>
             </a:extLst>
           </p:cNvPr>
@@ -22773,7 +22926,7 @@
           <p:cNvPr id="12" name="テキスト ボックス 11">
             <a:extLst>
               <a:ext uri="{FF2B5EF4-FFF2-40B4-BE49-F238E27FC236}">
-                <a16:creationId xmlns:a16="http://schemas.microsoft.com/office/drawing/2014/main" id="{65C89AB8-9A3C-A746-ACBA-57BE2C9DAA81}"/>
+                <a16:creationId xmlns:a16="http://schemas.microsoft.com/office/drawing/2014/main" id="{A8A927EE-F4B6-D36E-CC78-161BF5D16F96}"/>
               </a:ext>
             </a:extLst>
           </p:cNvPr>
@@ -22846,7 +22999,7 @@
           <p:cNvPr id="13" name="四角形: 角を丸くする 12">
             <a:extLst>
               <a:ext uri="{FF2B5EF4-FFF2-40B4-BE49-F238E27FC236}">
-                <a16:creationId xmlns:a16="http://schemas.microsoft.com/office/drawing/2014/main" id="{ADEA2AD7-11D2-78BC-258D-2129F123116C}"/>
+                <a16:creationId xmlns:a16="http://schemas.microsoft.com/office/drawing/2014/main" id="{828FAF81-C4CE-7A2D-F4DA-4821A6814B20}"/>
               </a:ext>
             </a:extLst>
           </p:cNvPr>
@@ -22914,7 +23067,7 @@
           <p:cNvPr id="14" name="テキスト ボックス 13">
             <a:extLst>
               <a:ext uri="{FF2B5EF4-FFF2-40B4-BE49-F238E27FC236}">
-                <a16:creationId xmlns:a16="http://schemas.microsoft.com/office/drawing/2014/main" id="{BDAAA60C-91F7-D786-C7E7-FC7C167287C6}"/>
+                <a16:creationId xmlns:a16="http://schemas.microsoft.com/office/drawing/2014/main" id="{454699FD-279A-8E17-DC11-D02A3D0E9DBE}"/>
               </a:ext>
             </a:extLst>
           </p:cNvPr>
@@ -22954,7 +23107,7 @@
           <p:cNvPr id="15" name="テキスト ボックス 14">
             <a:extLst>
               <a:ext uri="{FF2B5EF4-FFF2-40B4-BE49-F238E27FC236}">
-                <a16:creationId xmlns:a16="http://schemas.microsoft.com/office/drawing/2014/main" id="{6B492433-9D41-994B-3BEF-76B7F2E186DD}"/>
+                <a16:creationId xmlns:a16="http://schemas.microsoft.com/office/drawing/2014/main" id="{F6BFEF56-3ECB-2F28-E559-4A5FB0E81450}"/>
               </a:ext>
             </a:extLst>
           </p:cNvPr>
@@ -23005,7 +23158,7 @@
           <p:cNvPr id="16" name="四角形: 角を丸くする 15">
             <a:extLst>
               <a:ext uri="{FF2B5EF4-FFF2-40B4-BE49-F238E27FC236}">
-                <a16:creationId xmlns:a16="http://schemas.microsoft.com/office/drawing/2014/main" id="{EF0CD9EC-EB4A-0F1B-9B94-1C3C078BB46D}"/>
+                <a16:creationId xmlns:a16="http://schemas.microsoft.com/office/drawing/2014/main" id="{202C8BE4-5DEF-A45F-A1E4-A56E905618E2}"/>
               </a:ext>
             </a:extLst>
           </p:cNvPr>
@@ -23073,7 +23226,7 @@
           <p:cNvPr id="17" name="テキスト ボックス 16">
             <a:extLst>
               <a:ext uri="{FF2B5EF4-FFF2-40B4-BE49-F238E27FC236}">
-                <a16:creationId xmlns:a16="http://schemas.microsoft.com/office/drawing/2014/main" id="{A92EE308-4CEC-64F0-04E2-68089904CFC2}"/>
+                <a16:creationId xmlns:a16="http://schemas.microsoft.com/office/drawing/2014/main" id="{882674F5-AA02-A2D3-B50E-4B09638FC6B0}"/>
               </a:ext>
             </a:extLst>
           </p:cNvPr>
@@ -23167,7 +23320,7 @@
           <p:cNvPr id="18" name="テキスト ボックス 17">
             <a:extLst>
               <a:ext uri="{FF2B5EF4-FFF2-40B4-BE49-F238E27FC236}">
-                <a16:creationId xmlns:a16="http://schemas.microsoft.com/office/drawing/2014/main" id="{3A3C1150-E86A-3925-2351-55B11C50D697}"/>
+                <a16:creationId xmlns:a16="http://schemas.microsoft.com/office/drawing/2014/main" id="{D86356BC-7F16-11EE-6876-AE2F952A589C}"/>
               </a:ext>
             </a:extLst>
           </p:cNvPr>
@@ -23276,7 +23429,7 @@
           <p:cNvPr id="19" name="テキスト ボックス 18">
             <a:extLst>
               <a:ext uri="{FF2B5EF4-FFF2-40B4-BE49-F238E27FC236}">
-                <a16:creationId xmlns:a16="http://schemas.microsoft.com/office/drawing/2014/main" id="{59A96E61-37BC-BA6D-ECA7-E93E993A47D8}"/>
+                <a16:creationId xmlns:a16="http://schemas.microsoft.com/office/drawing/2014/main" id="{2AC6DF06-23C7-002C-2AD4-4E1F5FEEB8BC}"/>
               </a:ext>
             </a:extLst>
           </p:cNvPr>
@@ -23352,7 +23505,7 @@
           <p:cNvPr id="20" name="四角形: 角を丸くする 19">
             <a:extLst>
               <a:ext uri="{FF2B5EF4-FFF2-40B4-BE49-F238E27FC236}">
-                <a16:creationId xmlns:a16="http://schemas.microsoft.com/office/drawing/2014/main" id="{C11A26BE-B6FD-05A7-3AD6-312BB23FA55C}"/>
+                <a16:creationId xmlns:a16="http://schemas.microsoft.com/office/drawing/2014/main" id="{04117C45-3234-39FE-3A1A-934326C7C744}"/>
               </a:ext>
             </a:extLst>
           </p:cNvPr>
@@ -23420,7 +23573,7 @@
           <p:cNvPr id="21" name="テキスト ボックス 20">
             <a:extLst>
               <a:ext uri="{FF2B5EF4-FFF2-40B4-BE49-F238E27FC236}">
-                <a16:creationId xmlns:a16="http://schemas.microsoft.com/office/drawing/2014/main" id="{10F3B596-3F30-50A4-2857-68222727451F}"/>
+                <a16:creationId xmlns:a16="http://schemas.microsoft.com/office/drawing/2014/main" id="{B1500291-B6B8-B64B-8353-0BF1A949790F}"/>
               </a:ext>
             </a:extLst>
           </p:cNvPr>
@@ -23465,7 +23618,7 @@
     </p:spTree>
     <p:extLst>
       <p:ext uri="{BB962C8B-B14F-4D97-AF65-F5344CB8AC3E}">
-        <p14:creationId xmlns:p14="http://schemas.microsoft.com/office/powerpoint/2010/main" val="2510127165"/>
+        <p14:creationId xmlns:p14="http://schemas.microsoft.com/office/powerpoint/2010/main" val="3882128757"/>
       </p:ext>
     </p:extLst>
   </p:cSld>
@@ -23505,7 +23658,7 @@
           <p:cNvPr id="2" name="四角形: 角を丸くする 1">
             <a:extLst>
               <a:ext uri="{FF2B5EF4-FFF2-40B4-BE49-F238E27FC236}">
-                <a16:creationId xmlns:a16="http://schemas.microsoft.com/office/drawing/2014/main" id="{58B9C3E1-CB09-CA45-5BCF-EA75ACD777EB}"/>
+                <a16:creationId xmlns:a16="http://schemas.microsoft.com/office/drawing/2014/main" id="{BC8027DB-A570-A430-C7BA-F8B0700E4EB6}"/>
               </a:ext>
             </a:extLst>
           </p:cNvPr>
@@ -23573,7 +23726,7 @@
           <p:cNvPr id="3" name="テキスト ボックス 2">
             <a:extLst>
               <a:ext uri="{FF2B5EF4-FFF2-40B4-BE49-F238E27FC236}">
-                <a16:creationId xmlns:a16="http://schemas.microsoft.com/office/drawing/2014/main" id="{6958DBCD-88F1-85C1-2BE6-3CF8B99E1E9A}"/>
+                <a16:creationId xmlns:a16="http://schemas.microsoft.com/office/drawing/2014/main" id="{02828BAF-F02A-7106-ED04-07ADA4EEFB6E}"/>
               </a:ext>
             </a:extLst>
           </p:cNvPr>
@@ -23619,7 +23772,7 @@
           <p:cNvPr id="4" name="テキスト ボックス 3">
             <a:extLst>
               <a:ext uri="{FF2B5EF4-FFF2-40B4-BE49-F238E27FC236}">
-                <a16:creationId xmlns:a16="http://schemas.microsoft.com/office/drawing/2014/main" id="{286F0F50-B5E0-F39A-90D3-FA7648657135}"/>
+                <a16:creationId xmlns:a16="http://schemas.microsoft.com/office/drawing/2014/main" id="{B68939AF-4C55-70F2-A15E-DD22A9A0F252}"/>
               </a:ext>
             </a:extLst>
           </p:cNvPr>
@@ -23677,7 +23830,7 @@
           <p:cNvPr id="5" name="四角形: 角を丸くする 4">
             <a:extLst>
               <a:ext uri="{FF2B5EF4-FFF2-40B4-BE49-F238E27FC236}">
-                <a16:creationId xmlns:a16="http://schemas.microsoft.com/office/drawing/2014/main" id="{EDD6EF77-256C-B139-D30D-47D5D894B902}"/>
+                <a16:creationId xmlns:a16="http://schemas.microsoft.com/office/drawing/2014/main" id="{3D98488E-4CD6-5C61-B1C0-697CFCBAD9EF}"/>
               </a:ext>
             </a:extLst>
           </p:cNvPr>
@@ -23731,7 +23884,7 @@
           <p:cNvPr id="6" name="テキスト ボックス 5">
             <a:extLst>
               <a:ext uri="{FF2B5EF4-FFF2-40B4-BE49-F238E27FC236}">
-                <a16:creationId xmlns:a16="http://schemas.microsoft.com/office/drawing/2014/main" id="{FE7C3E3A-0B9A-564B-3F51-A502539D5D29}"/>
+                <a16:creationId xmlns:a16="http://schemas.microsoft.com/office/drawing/2014/main" id="{D80FB53F-66C2-E267-5186-7F3AD8E941B9}"/>
               </a:ext>
             </a:extLst>
           </p:cNvPr>
@@ -23772,7 +23925,7 @@
           <p:cNvPr id="7" name="テキスト ボックス 6">
             <a:extLst>
               <a:ext uri="{FF2B5EF4-FFF2-40B4-BE49-F238E27FC236}">
-                <a16:creationId xmlns:a16="http://schemas.microsoft.com/office/drawing/2014/main" id="{471125C0-951C-AF59-40D9-EF3F37112F41}"/>
+                <a16:creationId xmlns:a16="http://schemas.microsoft.com/office/drawing/2014/main" id="{BB624951-FFF0-1909-FABA-119CF537060B}"/>
               </a:ext>
             </a:extLst>
           </p:cNvPr>
@@ -23819,7 +23972,7 @@
           <p:cNvPr id="8" name="テキスト ボックス 7">
             <a:extLst>
               <a:ext uri="{FF2B5EF4-FFF2-40B4-BE49-F238E27FC236}">
-                <a16:creationId xmlns:a16="http://schemas.microsoft.com/office/drawing/2014/main" id="{902B3334-55DC-1E52-1007-4447614C57E8}"/>
+                <a16:creationId xmlns:a16="http://schemas.microsoft.com/office/drawing/2014/main" id="{2D8A620E-67D1-5AF6-4749-C27C9FD58C50}"/>
               </a:ext>
             </a:extLst>
           </p:cNvPr>
@@ -23893,7 +24046,7 @@
           <p:cNvPr id="9" name="四角形: 角を丸くする 8">
             <a:extLst>
               <a:ext uri="{FF2B5EF4-FFF2-40B4-BE49-F238E27FC236}">
-                <a16:creationId xmlns:a16="http://schemas.microsoft.com/office/drawing/2014/main" id="{A806E88B-C3D0-B90C-8231-59684FFFAAC9}"/>
+                <a16:creationId xmlns:a16="http://schemas.microsoft.com/office/drawing/2014/main" id="{81E8F400-6830-243C-7789-9B19B9897820}"/>
               </a:ext>
             </a:extLst>
           </p:cNvPr>
@@ -23961,7 +24114,7 @@
           <p:cNvPr id="10" name="テキスト ボックス 9">
             <a:extLst>
               <a:ext uri="{FF2B5EF4-FFF2-40B4-BE49-F238E27FC236}">
-                <a16:creationId xmlns:a16="http://schemas.microsoft.com/office/drawing/2014/main" id="{6CDA18FA-0E6A-A422-5614-C0C1B6F1C0A8}"/>
+                <a16:creationId xmlns:a16="http://schemas.microsoft.com/office/drawing/2014/main" id="{C83257C5-4716-787A-AF7D-F6F425CE7282}"/>
               </a:ext>
             </a:extLst>
           </p:cNvPr>
@@ -24002,7 +24155,7 @@
           <p:cNvPr id="12" name="図 11">
             <a:extLst>
               <a:ext uri="{FF2B5EF4-FFF2-40B4-BE49-F238E27FC236}">
-                <a16:creationId xmlns:a16="http://schemas.microsoft.com/office/drawing/2014/main" id="{E7A37CA6-6552-DC4A-4526-3DFF0575CB63}"/>
+                <a16:creationId xmlns:a16="http://schemas.microsoft.com/office/drawing/2014/main" id="{E2570D1F-9C90-29F5-03A0-943967D08B55}"/>
               </a:ext>
             </a:extLst>
           </p:cNvPr>
@@ -24043,7 +24196,7 @@
           <p:cNvPr id="13" name="テキスト ボックス 12">
             <a:extLst>
               <a:ext uri="{FF2B5EF4-FFF2-40B4-BE49-F238E27FC236}">
-                <a16:creationId xmlns:a16="http://schemas.microsoft.com/office/drawing/2014/main" id="{29BA55F1-7598-A1BC-AD07-3CE4787CB3F5}"/>
+                <a16:creationId xmlns:a16="http://schemas.microsoft.com/office/drawing/2014/main" id="{C082E01C-C63C-C32D-FF09-39B9AEE116C1}"/>
               </a:ext>
             </a:extLst>
           </p:cNvPr>
@@ -24117,7 +24270,7 @@
           <p:cNvPr id="14" name="四角形: 角を丸くする 13">
             <a:extLst>
               <a:ext uri="{FF2B5EF4-FFF2-40B4-BE49-F238E27FC236}">
-                <a16:creationId xmlns:a16="http://schemas.microsoft.com/office/drawing/2014/main" id="{6A905197-B4CE-424C-581B-6B0272ABBE09}"/>
+                <a16:creationId xmlns:a16="http://schemas.microsoft.com/office/drawing/2014/main" id="{23B99E67-E21C-B7BC-1B49-C0A7B852C456}"/>
               </a:ext>
             </a:extLst>
           </p:cNvPr>
@@ -24185,7 +24338,7 @@
           <p:cNvPr id="15" name="テキスト ボックス 14">
             <a:extLst>
               <a:ext uri="{FF2B5EF4-FFF2-40B4-BE49-F238E27FC236}">
-                <a16:creationId xmlns:a16="http://schemas.microsoft.com/office/drawing/2014/main" id="{8FBFDDEC-5C7F-66D4-9805-8AE5624880A2}"/>
+                <a16:creationId xmlns:a16="http://schemas.microsoft.com/office/drawing/2014/main" id="{2048C1DD-905C-58A4-8C54-DB7E76BB9D78}"/>
               </a:ext>
             </a:extLst>
           </p:cNvPr>
@@ -24225,7 +24378,7 @@
           <p:cNvPr id="16" name="テキスト ボックス 15">
             <a:extLst>
               <a:ext uri="{FF2B5EF4-FFF2-40B4-BE49-F238E27FC236}">
-                <a16:creationId xmlns:a16="http://schemas.microsoft.com/office/drawing/2014/main" id="{03A19374-D2B4-ED8B-85D7-CFD49E3E6EB5}"/>
+                <a16:creationId xmlns:a16="http://schemas.microsoft.com/office/drawing/2014/main" id="{0BDE1A81-ECBC-7B95-6AC0-457AE2A95C4C}"/>
               </a:ext>
             </a:extLst>
           </p:cNvPr>
@@ -24301,7 +24454,7 @@
           <p:cNvPr id="17" name="四角形: 角を丸くする 16">
             <a:extLst>
               <a:ext uri="{FF2B5EF4-FFF2-40B4-BE49-F238E27FC236}">
-                <a16:creationId xmlns:a16="http://schemas.microsoft.com/office/drawing/2014/main" id="{17DEBB2A-5ED6-931C-D555-1B25FF9647E4}"/>
+                <a16:creationId xmlns:a16="http://schemas.microsoft.com/office/drawing/2014/main" id="{5EEBB44C-F9A3-3F05-B03D-8A9FE6004FD8}"/>
               </a:ext>
             </a:extLst>
           </p:cNvPr>
@@ -24369,7 +24522,7 @@
           <p:cNvPr id="18" name="テキスト ボックス 17">
             <a:extLst>
               <a:ext uri="{FF2B5EF4-FFF2-40B4-BE49-F238E27FC236}">
-                <a16:creationId xmlns:a16="http://schemas.microsoft.com/office/drawing/2014/main" id="{798B5435-E0BC-B295-7D14-7D7C946853C1}"/>
+                <a16:creationId xmlns:a16="http://schemas.microsoft.com/office/drawing/2014/main" id="{5A91185D-90E6-4DDB-2E77-7062522A218A}"/>
               </a:ext>
             </a:extLst>
           </p:cNvPr>
@@ -24409,7 +24562,7 @@
           <p:cNvPr id="19" name="テキスト ボックス 18">
             <a:extLst>
               <a:ext uri="{FF2B5EF4-FFF2-40B4-BE49-F238E27FC236}">
-                <a16:creationId xmlns:a16="http://schemas.microsoft.com/office/drawing/2014/main" id="{AA6F3D5A-6DF9-ABBA-4CA3-D368043745FB}"/>
+                <a16:creationId xmlns:a16="http://schemas.microsoft.com/office/drawing/2014/main" id="{A4D6DDC9-4AEA-CC0F-DEB5-A2B1C157FF2B}"/>
               </a:ext>
             </a:extLst>
           </p:cNvPr>
@@ -24482,7 +24635,7 @@
           <p:cNvPr id="20" name="四角形: 角を丸くする 19">
             <a:extLst>
               <a:ext uri="{FF2B5EF4-FFF2-40B4-BE49-F238E27FC236}">
-                <a16:creationId xmlns:a16="http://schemas.microsoft.com/office/drawing/2014/main" id="{65C2B396-73FD-BEAF-6767-184BE2A30AC3}"/>
+                <a16:creationId xmlns:a16="http://schemas.microsoft.com/office/drawing/2014/main" id="{C5B82D9B-2A4F-0C7F-94A9-058414172795}"/>
               </a:ext>
             </a:extLst>
           </p:cNvPr>
@@ -24550,7 +24703,7 @@
           <p:cNvPr id="21" name="テキスト ボックス 20">
             <a:extLst>
               <a:ext uri="{FF2B5EF4-FFF2-40B4-BE49-F238E27FC236}">
-                <a16:creationId xmlns:a16="http://schemas.microsoft.com/office/drawing/2014/main" id="{38168D70-DD88-CA08-2F7E-B2D985DE22C1}"/>
+                <a16:creationId xmlns:a16="http://schemas.microsoft.com/office/drawing/2014/main" id="{04B4E27F-5BB9-D60A-3167-F2B549FBF864}"/>
               </a:ext>
             </a:extLst>
           </p:cNvPr>
@@ -24590,7 +24743,7 @@
           <p:cNvPr id="22" name="テキスト ボックス 21">
             <a:extLst>
               <a:ext uri="{FF2B5EF4-FFF2-40B4-BE49-F238E27FC236}">
-                <a16:creationId xmlns:a16="http://schemas.microsoft.com/office/drawing/2014/main" id="{63F2927E-1F26-9721-0026-DB03935151D1}"/>
+                <a16:creationId xmlns:a16="http://schemas.microsoft.com/office/drawing/2014/main" id="{4881C39D-65B0-1C66-8D47-0C0FC81022B6}"/>
               </a:ext>
             </a:extLst>
           </p:cNvPr>
@@ -24717,7 +24870,7 @@
           <p:cNvPr id="23" name="四角形: 角を丸くする 22">
             <a:extLst>
               <a:ext uri="{FF2B5EF4-FFF2-40B4-BE49-F238E27FC236}">
-                <a16:creationId xmlns:a16="http://schemas.microsoft.com/office/drawing/2014/main" id="{EFDD4635-CA30-3841-AC34-DB118E4F0B88}"/>
+                <a16:creationId xmlns:a16="http://schemas.microsoft.com/office/drawing/2014/main" id="{C7418049-A86C-7C8E-DD00-E692F38926E1}"/>
               </a:ext>
             </a:extLst>
           </p:cNvPr>
@@ -24785,7 +24938,7 @@
           <p:cNvPr id="24" name="テキスト ボックス 23">
             <a:extLst>
               <a:ext uri="{FF2B5EF4-FFF2-40B4-BE49-F238E27FC236}">
-                <a16:creationId xmlns:a16="http://schemas.microsoft.com/office/drawing/2014/main" id="{7E0CD6BB-2802-C6E5-9580-AA5F9F1DA4DF}"/>
+                <a16:creationId xmlns:a16="http://schemas.microsoft.com/office/drawing/2014/main" id="{A184E186-EE9D-F7A3-58F5-DF695B8A7448}"/>
               </a:ext>
             </a:extLst>
           </p:cNvPr>
@@ -24825,7 +24978,7 @@
           <p:cNvPr id="25" name="テキスト ボックス 24">
             <a:extLst>
               <a:ext uri="{FF2B5EF4-FFF2-40B4-BE49-F238E27FC236}">
-                <a16:creationId xmlns:a16="http://schemas.microsoft.com/office/drawing/2014/main" id="{CFF206DD-2535-A476-AF2F-828A7BEC2EC1}"/>
+                <a16:creationId xmlns:a16="http://schemas.microsoft.com/office/drawing/2014/main" id="{294252EC-AF9C-72FD-6675-05191481F839}"/>
               </a:ext>
             </a:extLst>
           </p:cNvPr>
@@ -24865,7 +25018,7 @@
           <p:cNvPr id="26" name="四角形: 角を丸くする 25">
             <a:extLst>
               <a:ext uri="{FF2B5EF4-FFF2-40B4-BE49-F238E27FC236}">
-                <a16:creationId xmlns:a16="http://schemas.microsoft.com/office/drawing/2014/main" id="{201EE4D0-DB51-5DB1-F5CA-5F355095AC99}"/>
+                <a16:creationId xmlns:a16="http://schemas.microsoft.com/office/drawing/2014/main" id="{F1D74733-25A1-6254-E4AE-325CE9153114}"/>
               </a:ext>
             </a:extLst>
           </p:cNvPr>
@@ -24933,7 +25086,7 @@
           <p:cNvPr id="27" name="テキスト ボックス 26">
             <a:extLst>
               <a:ext uri="{FF2B5EF4-FFF2-40B4-BE49-F238E27FC236}">
-                <a16:creationId xmlns:a16="http://schemas.microsoft.com/office/drawing/2014/main" id="{EDED7A0E-8D29-D967-8AB7-B85290398FE7}"/>
+                <a16:creationId xmlns:a16="http://schemas.microsoft.com/office/drawing/2014/main" id="{965B4B33-AFEA-1012-580C-67E581BDD953}"/>
               </a:ext>
             </a:extLst>
           </p:cNvPr>
@@ -25045,7 +25198,7 @@
           <p:cNvPr id="28" name="四角形: 角を丸くする 27">
             <a:extLst>
               <a:ext uri="{FF2B5EF4-FFF2-40B4-BE49-F238E27FC236}">
-                <a16:creationId xmlns:a16="http://schemas.microsoft.com/office/drawing/2014/main" id="{65337CC0-7EFC-F18F-0C37-979E2EED0A09}"/>
+                <a16:creationId xmlns:a16="http://schemas.microsoft.com/office/drawing/2014/main" id="{7B3D3B22-2C63-71D0-0289-4FC5E1FE41CA}"/>
               </a:ext>
             </a:extLst>
           </p:cNvPr>
@@ -25113,7 +25266,7 @@
           <p:cNvPr id="29" name="テキスト ボックス 28">
             <a:extLst>
               <a:ext uri="{FF2B5EF4-FFF2-40B4-BE49-F238E27FC236}">
-                <a16:creationId xmlns:a16="http://schemas.microsoft.com/office/drawing/2014/main" id="{4767B38B-6F41-7343-8C4E-F923F2F76AAF}"/>
+                <a16:creationId xmlns:a16="http://schemas.microsoft.com/office/drawing/2014/main" id="{541A2AD7-7E31-3428-349F-ED8B3D42B965}"/>
               </a:ext>
             </a:extLst>
           </p:cNvPr>
@@ -25158,7 +25311,7 @@
     </p:spTree>
     <p:extLst>
       <p:ext uri="{BB962C8B-B14F-4D97-AF65-F5344CB8AC3E}">
-        <p14:creationId xmlns:p14="http://schemas.microsoft.com/office/powerpoint/2010/main" val="3958573888"/>
+        <p14:creationId xmlns:p14="http://schemas.microsoft.com/office/powerpoint/2010/main" val="3225877826"/>
       </p:ext>
     </p:extLst>
   </p:cSld>
@@ -25198,7 +25351,7 @@
           <p:cNvPr id="2" name="四角形: 角を丸くする 1">
             <a:extLst>
               <a:ext uri="{FF2B5EF4-FFF2-40B4-BE49-F238E27FC236}">
-                <a16:creationId xmlns:a16="http://schemas.microsoft.com/office/drawing/2014/main" id="{F845422B-A599-982E-3F6D-ED741260B2C0}"/>
+                <a16:creationId xmlns:a16="http://schemas.microsoft.com/office/drawing/2014/main" id="{E900DB6D-E6D7-FD7C-4637-374B9136DD27}"/>
               </a:ext>
             </a:extLst>
           </p:cNvPr>
@@ -25266,7 +25419,7 @@
           <p:cNvPr id="3" name="テキスト ボックス 2">
             <a:extLst>
               <a:ext uri="{FF2B5EF4-FFF2-40B4-BE49-F238E27FC236}">
-                <a16:creationId xmlns:a16="http://schemas.microsoft.com/office/drawing/2014/main" id="{F77286C6-4695-B5BE-1E46-86580A88AF55}"/>
+                <a16:creationId xmlns:a16="http://schemas.microsoft.com/office/drawing/2014/main" id="{3459BBA1-9419-02F8-57EB-EF390A19CDBD}"/>
               </a:ext>
             </a:extLst>
           </p:cNvPr>
@@ -25306,7 +25459,7 @@
           <p:cNvPr id="4" name="四角形: 角を丸くする 3">
             <a:extLst>
               <a:ext uri="{FF2B5EF4-FFF2-40B4-BE49-F238E27FC236}">
-                <a16:creationId xmlns:a16="http://schemas.microsoft.com/office/drawing/2014/main" id="{BB38566A-863F-F6E5-F158-1DCB3DB68F96}"/>
+                <a16:creationId xmlns:a16="http://schemas.microsoft.com/office/drawing/2014/main" id="{F4420203-6A40-86F3-DE2A-43D6E54D6407}"/>
               </a:ext>
             </a:extLst>
           </p:cNvPr>
@@ -25374,7 +25527,7 @@
           <p:cNvPr id="5" name="テキスト ボックス 4">
             <a:extLst>
               <a:ext uri="{FF2B5EF4-FFF2-40B4-BE49-F238E27FC236}">
-                <a16:creationId xmlns:a16="http://schemas.microsoft.com/office/drawing/2014/main" id="{1BF1D532-410E-ED59-924F-94EC5065D17D}"/>
+                <a16:creationId xmlns:a16="http://schemas.microsoft.com/office/drawing/2014/main" id="{3FE68197-D72F-0656-EEDA-675F1F7341F6}"/>
               </a:ext>
             </a:extLst>
           </p:cNvPr>
@@ -25414,7 +25567,7 @@
           <p:cNvPr id="6" name="テキスト ボックス 5">
             <a:extLst>
               <a:ext uri="{FF2B5EF4-FFF2-40B4-BE49-F238E27FC236}">
-                <a16:creationId xmlns:a16="http://schemas.microsoft.com/office/drawing/2014/main" id="{3E68E16A-D4E3-897B-A4EC-6E59BE6831B4}"/>
+                <a16:creationId xmlns:a16="http://schemas.microsoft.com/office/drawing/2014/main" id="{A88C99F8-0AB6-3AD1-603E-CC5DB6B4E7BD}"/>
               </a:ext>
             </a:extLst>
           </p:cNvPr>
@@ -25523,7 +25676,7 @@
           <p:cNvPr id="7" name="四角形: 角を丸くする 6">
             <a:extLst>
               <a:ext uri="{FF2B5EF4-FFF2-40B4-BE49-F238E27FC236}">
-                <a16:creationId xmlns:a16="http://schemas.microsoft.com/office/drawing/2014/main" id="{0B9907E9-D337-CCEC-3D73-BBEA9B4E2560}"/>
+                <a16:creationId xmlns:a16="http://schemas.microsoft.com/office/drawing/2014/main" id="{CF358F7C-7A04-97DF-995B-0B08A2BC8C1F}"/>
               </a:ext>
             </a:extLst>
           </p:cNvPr>
@@ -25591,7 +25744,7 @@
           <p:cNvPr id="8" name="テキスト ボックス 7">
             <a:extLst>
               <a:ext uri="{FF2B5EF4-FFF2-40B4-BE49-F238E27FC236}">
-                <a16:creationId xmlns:a16="http://schemas.microsoft.com/office/drawing/2014/main" id="{CDEE5946-639C-E2F1-5F89-91593FB93749}"/>
+                <a16:creationId xmlns:a16="http://schemas.microsoft.com/office/drawing/2014/main" id="{D1E38807-55DD-9759-C85D-321DBFBDB211}"/>
               </a:ext>
             </a:extLst>
           </p:cNvPr>
@@ -25631,7 +25784,7 @@
           <p:cNvPr id="9" name="テキスト ボックス 8">
             <a:extLst>
               <a:ext uri="{FF2B5EF4-FFF2-40B4-BE49-F238E27FC236}">
-                <a16:creationId xmlns:a16="http://schemas.microsoft.com/office/drawing/2014/main" id="{91D86542-B49D-282B-F5FC-A456905E5FB7}"/>
+                <a16:creationId xmlns:a16="http://schemas.microsoft.com/office/drawing/2014/main" id="{C27E83B7-77C6-A9DD-DFDB-52E19B7F9776}"/>
               </a:ext>
             </a:extLst>
           </p:cNvPr>
@@ -25729,7 +25882,7 @@
           <p:cNvPr id="10" name="四角形: 角を丸くする 9">
             <a:extLst>
               <a:ext uri="{FF2B5EF4-FFF2-40B4-BE49-F238E27FC236}">
-                <a16:creationId xmlns:a16="http://schemas.microsoft.com/office/drawing/2014/main" id="{6B7F3F5A-510C-EEE9-0ACF-9B022F8E7FC3}"/>
+                <a16:creationId xmlns:a16="http://schemas.microsoft.com/office/drawing/2014/main" id="{EFDFB6B5-C1FC-A56D-81DF-8CD71406D166}"/>
               </a:ext>
             </a:extLst>
           </p:cNvPr>
@@ -25797,7 +25950,7 @@
           <p:cNvPr id="11" name="テキスト ボックス 10">
             <a:extLst>
               <a:ext uri="{FF2B5EF4-FFF2-40B4-BE49-F238E27FC236}">
-                <a16:creationId xmlns:a16="http://schemas.microsoft.com/office/drawing/2014/main" id="{41802F30-E86D-750B-1191-BAE39B30A7E1}"/>
+                <a16:creationId xmlns:a16="http://schemas.microsoft.com/office/drawing/2014/main" id="{DEE14E0A-8F27-B391-577F-02084779156F}"/>
               </a:ext>
             </a:extLst>
           </p:cNvPr>
@@ -25837,7 +25990,7 @@
           <p:cNvPr id="12" name="テキスト ボックス 11">
             <a:extLst>
               <a:ext uri="{FF2B5EF4-FFF2-40B4-BE49-F238E27FC236}">
-                <a16:creationId xmlns:a16="http://schemas.microsoft.com/office/drawing/2014/main" id="{B9FB81CA-09D8-8785-5294-1D2EFD1FB0C9}"/>
+                <a16:creationId xmlns:a16="http://schemas.microsoft.com/office/drawing/2014/main" id="{DF686BB6-B2FE-F938-6DAB-4868AA2EF703}"/>
               </a:ext>
             </a:extLst>
           </p:cNvPr>
@@ -25937,7 +26090,7 @@
           <p:cNvPr id="13" name="四角形: 角を丸くする 12">
             <a:extLst>
               <a:ext uri="{FF2B5EF4-FFF2-40B4-BE49-F238E27FC236}">
-                <a16:creationId xmlns:a16="http://schemas.microsoft.com/office/drawing/2014/main" id="{C174D613-3A7B-6808-AE08-A4268B17FF93}"/>
+                <a16:creationId xmlns:a16="http://schemas.microsoft.com/office/drawing/2014/main" id="{D9162854-1EEE-0F91-5607-2517A6C7DF84}"/>
               </a:ext>
             </a:extLst>
           </p:cNvPr>
@@ -26005,7 +26158,7 @@
           <p:cNvPr id="14" name="テキスト ボックス 13">
             <a:extLst>
               <a:ext uri="{FF2B5EF4-FFF2-40B4-BE49-F238E27FC236}">
-                <a16:creationId xmlns:a16="http://schemas.microsoft.com/office/drawing/2014/main" id="{FC7F1095-3948-61E5-D40B-5EB8A03C3EB7}"/>
+                <a16:creationId xmlns:a16="http://schemas.microsoft.com/office/drawing/2014/main" id="{4E31D9C3-CDA2-6787-0187-D3B18FD48D60}"/>
               </a:ext>
             </a:extLst>
           </p:cNvPr>
@@ -26045,7 +26198,7 @@
           <p:cNvPr id="15" name="テキスト ボックス 14">
             <a:extLst>
               <a:ext uri="{FF2B5EF4-FFF2-40B4-BE49-F238E27FC236}">
-                <a16:creationId xmlns:a16="http://schemas.microsoft.com/office/drawing/2014/main" id="{3A7F8F2C-9AAF-CEFD-D169-E9D87757826B}"/>
+                <a16:creationId xmlns:a16="http://schemas.microsoft.com/office/drawing/2014/main" id="{36E77B16-AE80-D315-9700-1AC23ABFB3A4}"/>
               </a:ext>
             </a:extLst>
           </p:cNvPr>
@@ -26107,7 +26260,7 @@
           <p:cNvPr id="16" name="四角形: 角を丸くする 15">
             <a:extLst>
               <a:ext uri="{FF2B5EF4-FFF2-40B4-BE49-F238E27FC236}">
-                <a16:creationId xmlns:a16="http://schemas.microsoft.com/office/drawing/2014/main" id="{FC210630-D848-FC53-095C-E80ABEC7E511}"/>
+                <a16:creationId xmlns:a16="http://schemas.microsoft.com/office/drawing/2014/main" id="{DC576FF7-31F4-34C9-9ED8-A54A9C7A6D15}"/>
               </a:ext>
             </a:extLst>
           </p:cNvPr>
@@ -26175,7 +26328,7 @@
           <p:cNvPr id="17" name="テキスト ボックス 16">
             <a:extLst>
               <a:ext uri="{FF2B5EF4-FFF2-40B4-BE49-F238E27FC236}">
-                <a16:creationId xmlns:a16="http://schemas.microsoft.com/office/drawing/2014/main" id="{0EFD68F6-701C-3C7C-A5D7-4016DC7A3742}"/>
+                <a16:creationId xmlns:a16="http://schemas.microsoft.com/office/drawing/2014/main" id="{8A884872-0396-1565-3E4D-36CDC7082F28}"/>
               </a:ext>
             </a:extLst>
           </p:cNvPr>
@@ -26269,7 +26422,7 @@
           <p:cNvPr id="18" name="テキスト ボックス 17">
             <a:extLst>
               <a:ext uri="{FF2B5EF4-FFF2-40B4-BE49-F238E27FC236}">
-                <a16:creationId xmlns:a16="http://schemas.microsoft.com/office/drawing/2014/main" id="{BCD77AB2-6A87-AAB8-3EFA-AC0C9355B3C2}"/>
+                <a16:creationId xmlns:a16="http://schemas.microsoft.com/office/drawing/2014/main" id="{724E597C-EA5D-067B-2914-F0BE09AB8B6A}"/>
               </a:ext>
             </a:extLst>
           </p:cNvPr>
@@ -26414,7 +26567,7 @@
           <p:cNvPr id="19" name="テキスト ボックス 18">
             <a:extLst>
               <a:ext uri="{FF2B5EF4-FFF2-40B4-BE49-F238E27FC236}">
-                <a16:creationId xmlns:a16="http://schemas.microsoft.com/office/drawing/2014/main" id="{9CA3DA84-643F-6F9F-676F-6A294DF49811}"/>
+                <a16:creationId xmlns:a16="http://schemas.microsoft.com/office/drawing/2014/main" id="{9EF878B4-7E82-7AC1-AF03-A24D5C840452}"/>
               </a:ext>
             </a:extLst>
           </p:cNvPr>
@@ -26514,7 +26667,7 @@
           <p:cNvPr id="20" name="四角形: 角を丸くする 19">
             <a:extLst>
               <a:ext uri="{FF2B5EF4-FFF2-40B4-BE49-F238E27FC236}">
-                <a16:creationId xmlns:a16="http://schemas.microsoft.com/office/drawing/2014/main" id="{8D68418B-B4D1-2FB7-E3C7-AD8FDFB8BC3F}"/>
+                <a16:creationId xmlns:a16="http://schemas.microsoft.com/office/drawing/2014/main" id="{744C51FD-F7DF-470E-76CF-6C7A2618EC57}"/>
               </a:ext>
             </a:extLst>
           </p:cNvPr>
@@ -26582,7 +26735,7 @@
           <p:cNvPr id="21" name="テキスト ボックス 20">
             <a:extLst>
               <a:ext uri="{FF2B5EF4-FFF2-40B4-BE49-F238E27FC236}">
-                <a16:creationId xmlns:a16="http://schemas.microsoft.com/office/drawing/2014/main" id="{2B921892-27EF-898C-BC14-480619E52914}"/>
+                <a16:creationId xmlns:a16="http://schemas.microsoft.com/office/drawing/2014/main" id="{F98B8A36-9ABB-B381-87EC-62BAB2C25BE0}"/>
               </a:ext>
             </a:extLst>
           </p:cNvPr>
@@ -26627,7 +26780,7 @@
     </p:spTree>
     <p:extLst>
       <p:ext uri="{BB962C8B-B14F-4D97-AF65-F5344CB8AC3E}">
-        <p14:creationId xmlns:p14="http://schemas.microsoft.com/office/powerpoint/2010/main" val="3463797520"/>
+        <p14:creationId xmlns:p14="http://schemas.microsoft.com/office/powerpoint/2010/main" val="2419197323"/>
       </p:ext>
     </p:extLst>
   </p:cSld>
